--- a/plots/Figures.pptx
+++ b/plots/Figures.pptx
@@ -5,28 +5,44 @@
     <p:sldMasterId id="2147483648" r:id="rId1"/>
   </p:sldMasterIdLst>
   <p:notesMasterIdLst>
-    <p:notesMasterId r:id="rId18"/>
+    <p:notesMasterId r:id="rId34"/>
   </p:notesMasterIdLst>
   <p:sldIdLst>
     <p:sldId id="262" r:id="rId2"/>
-    <p:sldId id="256" r:id="rId3"/>
-    <p:sldId id="257" r:id="rId4"/>
-    <p:sldId id="258" r:id="rId5"/>
-    <p:sldId id="261" r:id="rId6"/>
-    <p:sldId id="259" r:id="rId7"/>
-    <p:sldId id="260" r:id="rId8"/>
-    <p:sldId id="263" r:id="rId9"/>
-    <p:sldId id="264" r:id="rId10"/>
-    <p:sldId id="265" r:id="rId11"/>
-    <p:sldId id="266" r:id="rId12"/>
-    <p:sldId id="269" r:id="rId13"/>
-    <p:sldId id="267" r:id="rId14"/>
-    <p:sldId id="268" r:id="rId15"/>
-    <p:sldId id="270" r:id="rId16"/>
-    <p:sldId id="271" r:id="rId17"/>
+    <p:sldId id="286" r:id="rId3"/>
+    <p:sldId id="284" r:id="rId4"/>
+    <p:sldId id="285" r:id="rId5"/>
+    <p:sldId id="258" r:id="rId6"/>
+    <p:sldId id="261" r:id="rId7"/>
+    <p:sldId id="280" r:id="rId8"/>
+    <p:sldId id="259" r:id="rId9"/>
+    <p:sldId id="287" r:id="rId10"/>
+    <p:sldId id="279" r:id="rId11"/>
+    <p:sldId id="260" r:id="rId12"/>
+    <p:sldId id="263" r:id="rId13"/>
+    <p:sldId id="288" r:id="rId14"/>
+    <p:sldId id="264" r:id="rId15"/>
+    <p:sldId id="289" r:id="rId16"/>
+    <p:sldId id="266" r:id="rId17"/>
+    <p:sldId id="265" r:id="rId18"/>
+    <p:sldId id="290" r:id="rId19"/>
+    <p:sldId id="269" r:id="rId20"/>
+    <p:sldId id="281" r:id="rId21"/>
+    <p:sldId id="267" r:id="rId22"/>
+    <p:sldId id="268" r:id="rId23"/>
+    <p:sldId id="270" r:id="rId24"/>
+    <p:sldId id="271" r:id="rId25"/>
+    <p:sldId id="272" r:id="rId26"/>
+    <p:sldId id="282" r:id="rId27"/>
+    <p:sldId id="273" r:id="rId28"/>
+    <p:sldId id="274" r:id="rId29"/>
+    <p:sldId id="275" r:id="rId30"/>
+    <p:sldId id="278" r:id="rId31"/>
+    <p:sldId id="276" r:id="rId32"/>
+    <p:sldId id="277" r:id="rId33"/>
   </p:sldIdLst>
   <p:sldSz cx="12192000" cy="6858000"/>
-  <p:notesSz cx="6858000" cy="9144000"/>
+  <p:notesSz cx="6858000" cy="9313863"/>
   <p:defaultTextStyle>
     <a:defPPr>
       <a:defRPr lang="en-US"/>
@@ -133,7 +149,7 @@
 <file path=ppt/revisionInfo.xml><?xml version="1.0" encoding="utf-8"?>
 <p1510:revInfo xmlns:a="http://schemas.openxmlformats.org/drawingml/2006/main" xmlns:r="http://schemas.openxmlformats.org/officeDocument/2006/relationships" xmlns:p1510="http://schemas.microsoft.com/office/powerpoint/2015/10/main">
   <p1510:revLst>
-    <p1510:client id="{6C085BFB-8188-41C0-9F99-678D7B597D20}" v="27" dt="2025-03-11T07:29:16.634"/>
+    <p1510:client id="{6C085BFB-8188-41C0-9F99-678D7B597D20}" v="99" dt="2025-04-01T15:41:06.922"/>
   </p1510:revLst>
 </p1510:revInfo>
 </file>
@@ -142,55 +158,482 @@
 <pc:chgInfo xmlns:a="http://schemas.openxmlformats.org/drawingml/2006/main" xmlns:r="http://schemas.openxmlformats.org/officeDocument/2006/relationships" xmlns:ac="http://schemas.microsoft.com/office/drawing/2013/main/command" xmlns:pc="http://schemas.microsoft.com/office/powerpoint/2013/main/command">
   <pc:docChgLst>
     <pc:chgData name="Maaike Vercauteren" userId="ebf6c57b-443c-4492-b592-ebdccbd79b0c" providerId="ADAL" clId="{6C085BFB-8188-41C0-9F99-678D7B597D20}"/>
-    <pc:docChg chg="undo custSel addSld modSld sldOrd">
-      <pc:chgData name="Maaike Vercauteren" userId="ebf6c57b-443c-4492-b592-ebdccbd79b0c" providerId="ADAL" clId="{6C085BFB-8188-41C0-9F99-678D7B597D20}" dt="2025-03-11T07:29:16.619" v="170" actId="164"/>
+    <pc:docChg chg="undo redo custSel addSld delSld modSld sldOrd modNotesMaster">
+      <pc:chgData name="Maaike Vercauteren" userId="ebf6c57b-443c-4492-b592-ebdccbd79b0c" providerId="ADAL" clId="{6C085BFB-8188-41C0-9F99-678D7B597D20}" dt="2025-04-01T15:42:08.589" v="601" actId="1076"/>
       <pc:docMkLst>
         <pc:docMk/>
       </pc:docMkLst>
-      <pc:sldChg chg="modSp mod">
-        <pc:chgData name="Maaike Vercauteren" userId="ebf6c57b-443c-4492-b592-ebdccbd79b0c" providerId="ADAL" clId="{6C085BFB-8188-41C0-9F99-678D7B597D20}" dt="2025-03-06T08:44:10.998" v="85" actId="1076"/>
+      <pc:sldChg chg="delSp modSp del mod">
+        <pc:chgData name="Maaike Vercauteren" userId="ebf6c57b-443c-4492-b592-ebdccbd79b0c" providerId="ADAL" clId="{6C085BFB-8188-41C0-9F99-678D7B597D20}" dt="2025-04-01T13:26:51.017" v="435" actId="47"/>
         <pc:sldMkLst>
           <pc:docMk/>
           <pc:sldMk cId="279204721" sldId="256"/>
         </pc:sldMkLst>
-        <pc:spChg chg="mod">
-          <ac:chgData name="Maaike Vercauteren" userId="ebf6c57b-443c-4492-b592-ebdccbd79b0c" providerId="ADAL" clId="{6C085BFB-8188-41C0-9F99-678D7B597D20}" dt="2025-03-06T08:44:10.998" v="85" actId="1076"/>
+        <pc:spChg chg="mod topLvl">
+          <ac:chgData name="Maaike Vercauteren" userId="ebf6c57b-443c-4492-b592-ebdccbd79b0c" providerId="ADAL" clId="{6C085BFB-8188-41C0-9F99-678D7B597D20}" dt="2025-04-01T13:05:10.861" v="334" actId="165"/>
+          <ac:spMkLst>
+            <pc:docMk/>
+            <pc:sldMk cId="279204721" sldId="256"/>
+            <ac:spMk id="5" creationId="{FE152EE9-23B5-15A6-C325-31BDF3BC7597}"/>
+          </ac:spMkLst>
+        </pc:spChg>
+        <pc:spChg chg="mod topLvl">
+          <ac:chgData name="Maaike Vercauteren" userId="ebf6c57b-443c-4492-b592-ebdccbd79b0c" providerId="ADAL" clId="{6C085BFB-8188-41C0-9F99-678D7B597D20}" dt="2025-04-01T13:12:22.815" v="342" actId="1076"/>
           <ac:spMkLst>
             <pc:docMk/>
             <pc:sldMk cId="279204721" sldId="256"/>
             <ac:spMk id="8" creationId="{ADBAF2E4-C0BF-5441-63B7-E51CA0FDF460}"/>
           </ac:spMkLst>
         </pc:spChg>
+        <pc:spChg chg="mod topLvl">
+          <ac:chgData name="Maaike Vercauteren" userId="ebf6c57b-443c-4492-b592-ebdccbd79b0c" providerId="ADAL" clId="{6C085BFB-8188-41C0-9F99-678D7B597D20}" dt="2025-04-01T13:12:22.815" v="342" actId="1076"/>
+          <ac:spMkLst>
+            <pc:docMk/>
+            <pc:sldMk cId="279204721" sldId="256"/>
+            <ac:spMk id="9" creationId="{6CEFA57A-4628-8BA0-913B-0B4AF6759DD9}"/>
+          </ac:spMkLst>
+        </pc:spChg>
         <pc:spChg chg="mod">
-          <ac:chgData name="Maaike Vercauteren" userId="ebf6c57b-443c-4492-b592-ebdccbd79b0c" providerId="ADAL" clId="{6C085BFB-8188-41C0-9F99-678D7B597D20}" dt="2025-03-06T08:44:10.998" v="85" actId="1076"/>
+          <ac:chgData name="Maaike Vercauteren" userId="ebf6c57b-443c-4492-b592-ebdccbd79b0c" providerId="ADAL" clId="{6C085BFB-8188-41C0-9F99-678D7B597D20}" dt="2025-04-01T13:12:22.815" v="342" actId="1076"/>
           <ac:spMkLst>
             <pc:docMk/>
             <pc:sldMk cId="279204721" sldId="256"/>
             <ac:spMk id="10" creationId="{736F8240-5CB7-ACE7-6D56-D2B93671462A}"/>
           </ac:spMkLst>
         </pc:spChg>
-        <pc:spChg chg="mod">
-          <ac:chgData name="Maaike Vercauteren" userId="ebf6c57b-443c-4492-b592-ebdccbd79b0c" providerId="ADAL" clId="{6C085BFB-8188-41C0-9F99-678D7B597D20}" dt="2025-03-06T08:44:10.998" v="85" actId="1076"/>
+        <pc:spChg chg="mod topLvl">
+          <ac:chgData name="Maaike Vercauteren" userId="ebf6c57b-443c-4492-b592-ebdccbd79b0c" providerId="ADAL" clId="{6C085BFB-8188-41C0-9F99-678D7B597D20}" dt="2025-04-01T13:12:22.815" v="342" actId="1076"/>
+          <ac:spMkLst>
+            <pc:docMk/>
+            <pc:sldMk cId="279204721" sldId="256"/>
+            <ac:spMk id="11" creationId="{1A0C8B67-0A6F-3337-7292-31F9EA7D8C04}"/>
+          </ac:spMkLst>
+        </pc:spChg>
+        <pc:spChg chg="mod topLvl">
+          <ac:chgData name="Maaike Vercauteren" userId="ebf6c57b-443c-4492-b592-ebdccbd79b0c" providerId="ADAL" clId="{6C085BFB-8188-41C0-9F99-678D7B597D20}" dt="2025-04-01T13:12:22.815" v="342" actId="1076"/>
+          <ac:spMkLst>
+            <pc:docMk/>
+            <pc:sldMk cId="279204721" sldId="256"/>
+            <ac:spMk id="13" creationId="{2824C5FC-C992-9A4C-618B-978DEDC2DD96}"/>
+          </ac:spMkLst>
+        </pc:spChg>
+        <pc:spChg chg="mod topLvl">
+          <ac:chgData name="Maaike Vercauteren" userId="ebf6c57b-443c-4492-b592-ebdccbd79b0c" providerId="ADAL" clId="{6C085BFB-8188-41C0-9F99-678D7B597D20}" dt="2025-04-01T13:12:22.815" v="342" actId="1076"/>
+          <ac:spMkLst>
+            <pc:docMk/>
+            <pc:sldMk cId="279204721" sldId="256"/>
+            <ac:spMk id="14" creationId="{9D08AD6D-1B60-8ADB-6B48-B37A89324092}"/>
+          </ac:spMkLst>
+        </pc:spChg>
+        <pc:spChg chg="mod topLvl">
+          <ac:chgData name="Maaike Vercauteren" userId="ebf6c57b-443c-4492-b592-ebdccbd79b0c" providerId="ADAL" clId="{6C085BFB-8188-41C0-9F99-678D7B597D20}" dt="2025-04-01T13:12:22.815" v="342" actId="1076"/>
           <ac:spMkLst>
             <pc:docMk/>
             <pc:sldMk cId="279204721" sldId="256"/>
             <ac:spMk id="15" creationId="{52E74963-778A-AD99-A804-B8DF629E9D21}"/>
           </ac:spMkLst>
         </pc:spChg>
-        <pc:spChg chg="mod">
-          <ac:chgData name="Maaike Vercauteren" userId="ebf6c57b-443c-4492-b592-ebdccbd79b0c" providerId="ADAL" clId="{6C085BFB-8188-41C0-9F99-678D7B597D20}" dt="2025-03-06T08:44:10.998" v="85" actId="1076"/>
+        <pc:spChg chg="mod topLvl">
+          <ac:chgData name="Maaike Vercauteren" userId="ebf6c57b-443c-4492-b592-ebdccbd79b0c" providerId="ADAL" clId="{6C085BFB-8188-41C0-9F99-678D7B597D20}" dt="2025-04-01T13:12:22.815" v="342" actId="1076"/>
+          <ac:spMkLst>
+            <pc:docMk/>
+            <pc:sldMk cId="279204721" sldId="256"/>
+            <ac:spMk id="16" creationId="{31DD3E44-6143-E91E-2F69-5F13C19C18AF}"/>
+          </ac:spMkLst>
+        </pc:spChg>
+        <pc:spChg chg="mod topLvl">
+          <ac:chgData name="Maaike Vercauteren" userId="ebf6c57b-443c-4492-b592-ebdccbd79b0c" providerId="ADAL" clId="{6C085BFB-8188-41C0-9F99-678D7B597D20}" dt="2025-04-01T13:05:10.861" v="334" actId="165"/>
+          <ac:spMkLst>
+            <pc:docMk/>
+            <pc:sldMk cId="279204721" sldId="256"/>
+            <ac:spMk id="18" creationId="{D0BE79D5-DE12-F250-3735-A0F831ED9C87}"/>
+          </ac:spMkLst>
+        </pc:spChg>
+        <pc:spChg chg="mod topLvl">
+          <ac:chgData name="Maaike Vercauteren" userId="ebf6c57b-443c-4492-b592-ebdccbd79b0c" providerId="ADAL" clId="{6C085BFB-8188-41C0-9F99-678D7B597D20}" dt="2025-04-01T13:05:10.861" v="334" actId="165"/>
           <ac:spMkLst>
             <pc:docMk/>
             <pc:sldMk cId="279204721" sldId="256"/>
             <ac:spMk id="19" creationId="{F47CF5A1-1433-17B1-8B5E-457583DD7EED}"/>
           </ac:spMkLst>
         </pc:spChg>
-        <pc:picChg chg="mod">
-          <ac:chgData name="Maaike Vercauteren" userId="ebf6c57b-443c-4492-b592-ebdccbd79b0c" providerId="ADAL" clId="{6C085BFB-8188-41C0-9F99-678D7B597D20}" dt="2025-03-06T08:44:10.998" v="85" actId="1076"/>
+        <pc:picChg chg="del mod">
+          <ac:chgData name="Maaike Vercauteren" userId="ebf6c57b-443c-4492-b592-ebdccbd79b0c" providerId="ADAL" clId="{6C085BFB-8188-41C0-9F99-678D7B597D20}" dt="2025-04-01T13:12:11.469" v="341" actId="478"/>
           <ac:picMkLst>
             <pc:docMk/>
             <pc:sldMk cId="279204721" sldId="256"/>
             <ac:picMk id="7" creationId="{D03CE7A1-AED1-F994-0DB4-F1818DC61E57}"/>
+          </ac:picMkLst>
+        </pc:picChg>
+      </pc:sldChg>
+      <pc:sldChg chg="del">
+        <pc:chgData name="Maaike Vercauteren" userId="ebf6c57b-443c-4492-b592-ebdccbd79b0c" providerId="ADAL" clId="{6C085BFB-8188-41C0-9F99-678D7B597D20}" dt="2025-04-01T13:26:30.617" v="434" actId="47"/>
+        <pc:sldMkLst>
+          <pc:docMk/>
+          <pc:sldMk cId="2189420211" sldId="257"/>
+        </pc:sldMkLst>
+      </pc:sldChg>
+      <pc:sldChg chg="addSp delSp modSp mod">
+        <pc:chgData name="Maaike Vercauteren" userId="ebf6c57b-443c-4492-b592-ebdccbd79b0c" providerId="ADAL" clId="{6C085BFB-8188-41C0-9F99-678D7B597D20}" dt="2025-04-01T13:33:32.814" v="513" actId="164"/>
+        <pc:sldMkLst>
+          <pc:docMk/>
+          <pc:sldMk cId="3754332044" sldId="258"/>
+        </pc:sldMkLst>
+        <pc:grpChg chg="del">
+          <ac:chgData name="Maaike Vercauteren" userId="ebf6c57b-443c-4492-b592-ebdccbd79b0c" providerId="ADAL" clId="{6C085BFB-8188-41C0-9F99-678D7B597D20}" dt="2025-04-01T13:30:24.854" v="474" actId="478"/>
+          <ac:grpSpMkLst>
+            <pc:docMk/>
+            <pc:sldMk cId="3754332044" sldId="258"/>
+            <ac:grpSpMk id="4" creationId="{37AEF501-431A-BB70-528F-0281CD23DFCA}"/>
+          </ac:grpSpMkLst>
+        </pc:grpChg>
+        <pc:grpChg chg="add mod ord">
+          <ac:chgData name="Maaike Vercauteren" userId="ebf6c57b-443c-4492-b592-ebdccbd79b0c" providerId="ADAL" clId="{6C085BFB-8188-41C0-9F99-678D7B597D20}" dt="2025-04-01T13:33:32.814" v="513" actId="164"/>
+          <ac:grpSpMkLst>
+            <pc:docMk/>
+            <pc:sldMk cId="3754332044" sldId="258"/>
+            <ac:grpSpMk id="17" creationId="{66825F74-DF43-9A85-C8C1-9EC8FFCC4ECF}"/>
+          </ac:grpSpMkLst>
+        </pc:grpChg>
+        <pc:grpChg chg="add mod">
+          <ac:chgData name="Maaike Vercauteren" userId="ebf6c57b-443c-4492-b592-ebdccbd79b0c" providerId="ADAL" clId="{6C085BFB-8188-41C0-9F99-678D7B597D20}" dt="2025-04-01T13:33:32.814" v="513" actId="164"/>
+          <ac:grpSpMkLst>
+            <pc:docMk/>
+            <pc:sldMk cId="3754332044" sldId="258"/>
+            <ac:grpSpMk id="18" creationId="{29C84B15-39D2-6146-BF6B-EFE063D46C8F}"/>
+          </ac:grpSpMkLst>
+        </pc:grpChg>
+        <pc:picChg chg="del mod">
+          <ac:chgData name="Maaike Vercauteren" userId="ebf6c57b-443c-4492-b592-ebdccbd79b0c" providerId="ADAL" clId="{6C085BFB-8188-41C0-9F99-678D7B597D20}" dt="2025-04-01T13:30:08.190" v="470" actId="478"/>
+          <ac:picMkLst>
+            <pc:docMk/>
+            <pc:sldMk cId="3754332044" sldId="258"/>
+            <ac:picMk id="5" creationId="{B5B03F69-2E25-E705-A4F9-B8C5BB24AC1E}"/>
+          </ac:picMkLst>
+        </pc:picChg>
+        <pc:picChg chg="add mod ord">
+          <ac:chgData name="Maaike Vercauteren" userId="ebf6c57b-443c-4492-b592-ebdccbd79b0c" providerId="ADAL" clId="{6C085BFB-8188-41C0-9F99-678D7B597D20}" dt="2025-04-01T13:33:32.814" v="513" actId="164"/>
+          <ac:picMkLst>
+            <pc:docMk/>
+            <pc:sldMk cId="3754332044" sldId="258"/>
+            <ac:picMk id="14" creationId="{B8CA3483-6DB6-B5CC-9675-9ED8FAF21380}"/>
+          </ac:picMkLst>
+        </pc:picChg>
+        <pc:picChg chg="add mod modCrop">
+          <ac:chgData name="Maaike Vercauteren" userId="ebf6c57b-443c-4492-b592-ebdccbd79b0c" providerId="ADAL" clId="{6C085BFB-8188-41C0-9F99-678D7B597D20}" dt="2025-04-01T13:31:18.018" v="485" actId="164"/>
+          <ac:picMkLst>
+            <pc:docMk/>
+            <pc:sldMk cId="3754332044" sldId="258"/>
+            <ac:picMk id="15" creationId="{CE8C44ED-DFB7-632A-6C50-A97ECD750BEB}"/>
+          </ac:picMkLst>
+        </pc:picChg>
+        <pc:picChg chg="add mod modCrop">
+          <ac:chgData name="Maaike Vercauteren" userId="ebf6c57b-443c-4492-b592-ebdccbd79b0c" providerId="ADAL" clId="{6C085BFB-8188-41C0-9F99-678D7B597D20}" dt="2025-04-01T13:31:18.018" v="485" actId="164"/>
+          <ac:picMkLst>
+            <pc:docMk/>
+            <pc:sldMk cId="3754332044" sldId="258"/>
+            <ac:picMk id="16" creationId="{4004A7DC-2092-04C8-6FCF-5B6F881DA9BE}"/>
+          </ac:picMkLst>
+        </pc:picChg>
+      </pc:sldChg>
+      <pc:sldChg chg="addSp delSp modSp mod modNotesTx">
+        <pc:chgData name="Maaike Vercauteren" userId="ebf6c57b-443c-4492-b592-ebdccbd79b0c" providerId="ADAL" clId="{6C085BFB-8188-41C0-9F99-678D7B597D20}" dt="2025-04-01T13:59:05.902" v="521" actId="14826"/>
+        <pc:sldMkLst>
+          <pc:docMk/>
+          <pc:sldMk cId="2292916659" sldId="259"/>
+        </pc:sldMkLst>
+        <pc:picChg chg="add mod">
+          <ac:chgData name="Maaike Vercauteren" userId="ebf6c57b-443c-4492-b592-ebdccbd79b0c" providerId="ADAL" clId="{6C085BFB-8188-41C0-9F99-678D7B597D20}" dt="2025-04-01T13:59:05.902" v="521" actId="14826"/>
+          <ac:picMkLst>
+            <pc:docMk/>
+            <pc:sldMk cId="2292916659" sldId="259"/>
+            <ac:picMk id="3" creationId="{DEB70CC4-5DA7-0E44-85B4-B94A5F786849}"/>
+          </ac:picMkLst>
+        </pc:picChg>
+      </pc:sldChg>
+      <pc:sldChg chg="modSp add del mod modNotesTx">
+        <pc:chgData name="Maaike Vercauteren" userId="ebf6c57b-443c-4492-b592-ebdccbd79b0c" providerId="ADAL" clId="{6C085BFB-8188-41C0-9F99-678D7B597D20}" dt="2025-04-01T14:00:29.384" v="535" actId="20577"/>
+        <pc:sldMkLst>
+          <pc:docMk/>
+          <pc:sldMk cId="624012253" sldId="260"/>
+        </pc:sldMkLst>
+        <pc:picChg chg="mod">
+          <ac:chgData name="Maaike Vercauteren" userId="ebf6c57b-443c-4492-b592-ebdccbd79b0c" providerId="ADAL" clId="{6C085BFB-8188-41C0-9F99-678D7B597D20}" dt="2025-04-01T14:00:26.085" v="525" actId="14826"/>
+          <ac:picMkLst>
+            <pc:docMk/>
+            <pc:sldMk cId="624012253" sldId="260"/>
+            <ac:picMk id="2" creationId="{B40C30F4-1CD0-11A3-2728-1FCD2CC8D748}"/>
+          </ac:picMkLst>
+        </pc:picChg>
+      </pc:sldChg>
+      <pc:sldChg chg="addSp delSp modSp mod">
+        <pc:chgData name="Maaike Vercauteren" userId="ebf6c57b-443c-4492-b592-ebdccbd79b0c" providerId="ADAL" clId="{6C085BFB-8188-41C0-9F99-678D7B597D20}" dt="2025-04-01T14:24:37.197" v="566" actId="164"/>
+        <pc:sldMkLst>
+          <pc:docMk/>
+          <pc:sldMk cId="2164078111" sldId="261"/>
+        </pc:sldMkLst>
+        <pc:spChg chg="mod ord">
+          <ac:chgData name="Maaike Vercauteren" userId="ebf6c57b-443c-4492-b592-ebdccbd79b0c" providerId="ADAL" clId="{6C085BFB-8188-41C0-9F99-678D7B597D20}" dt="2025-04-01T13:33:07.828" v="506" actId="166"/>
+          <ac:spMkLst>
+            <pc:docMk/>
+            <pc:sldMk cId="2164078111" sldId="261"/>
+            <ac:spMk id="5" creationId="{59AD996D-45A5-4A4D-F41B-320F2941C98F}"/>
+          </ac:spMkLst>
+        </pc:spChg>
+        <pc:spChg chg="mod ord">
+          <ac:chgData name="Maaike Vercauteren" userId="ebf6c57b-443c-4492-b592-ebdccbd79b0c" providerId="ADAL" clId="{6C085BFB-8188-41C0-9F99-678D7B597D20}" dt="2025-04-01T13:33:07.828" v="506" actId="166"/>
+          <ac:spMkLst>
+            <pc:docMk/>
+            <pc:sldMk cId="2164078111" sldId="261"/>
+            <ac:spMk id="6" creationId="{C2C86C59-B274-4111-07C5-D2AEC64359F9}"/>
+          </ac:spMkLst>
+        </pc:spChg>
+        <pc:spChg chg="mod ord">
+          <ac:chgData name="Maaike Vercauteren" userId="ebf6c57b-443c-4492-b592-ebdccbd79b0c" providerId="ADAL" clId="{6C085BFB-8188-41C0-9F99-678D7B597D20}" dt="2025-04-01T13:33:07.828" v="506" actId="166"/>
+          <ac:spMkLst>
+            <pc:docMk/>
+            <pc:sldMk cId="2164078111" sldId="261"/>
+            <ac:spMk id="9" creationId="{89B2572C-4640-EE59-4D19-AB6B6780A446}"/>
+          </ac:spMkLst>
+        </pc:spChg>
+        <pc:spChg chg="mod ord">
+          <ac:chgData name="Maaike Vercauteren" userId="ebf6c57b-443c-4492-b592-ebdccbd79b0c" providerId="ADAL" clId="{6C085BFB-8188-41C0-9F99-678D7B597D20}" dt="2025-04-01T13:33:23.097" v="510" actId="1076"/>
+          <ac:spMkLst>
+            <pc:docMk/>
+            <pc:sldMk cId="2164078111" sldId="261"/>
+            <ac:spMk id="10" creationId="{75344B4F-0B16-3BFD-4DD4-FA1DF58F1195}"/>
+          </ac:spMkLst>
+        </pc:spChg>
+        <pc:spChg chg="mod ord">
+          <ac:chgData name="Maaike Vercauteren" userId="ebf6c57b-443c-4492-b592-ebdccbd79b0c" providerId="ADAL" clId="{6C085BFB-8188-41C0-9F99-678D7B597D20}" dt="2025-04-01T13:33:25.314" v="511" actId="1076"/>
+          <ac:spMkLst>
+            <pc:docMk/>
+            <pc:sldMk cId="2164078111" sldId="261"/>
+            <ac:spMk id="11" creationId="{4E9BA3F8-1141-4200-9D71-937A47B761E8}"/>
+          </ac:spMkLst>
+        </pc:spChg>
+        <pc:spChg chg="mod ord">
+          <ac:chgData name="Maaike Vercauteren" userId="ebf6c57b-443c-4492-b592-ebdccbd79b0c" providerId="ADAL" clId="{6C085BFB-8188-41C0-9F99-678D7B597D20}" dt="2025-04-01T13:33:20.721" v="509" actId="1076"/>
+          <ac:spMkLst>
+            <pc:docMk/>
+            <pc:sldMk cId="2164078111" sldId="261"/>
+            <ac:spMk id="12" creationId="{D450DB8D-E025-B129-44EE-FBEED9393116}"/>
+          </ac:spMkLst>
+        </pc:spChg>
+        <pc:spChg chg="mod ord">
+          <ac:chgData name="Maaike Vercauteren" userId="ebf6c57b-443c-4492-b592-ebdccbd79b0c" providerId="ADAL" clId="{6C085BFB-8188-41C0-9F99-678D7B597D20}" dt="2025-04-01T13:33:17.745" v="508" actId="1076"/>
+          <ac:spMkLst>
+            <pc:docMk/>
+            <pc:sldMk cId="2164078111" sldId="261"/>
+            <ac:spMk id="13" creationId="{35BA436D-0BEB-6090-D72F-B91B5D8959BE}"/>
+          </ac:spMkLst>
+        </pc:spChg>
+        <pc:spChg chg="mod">
+          <ac:chgData name="Maaike Vercauteren" userId="ebf6c57b-443c-4492-b592-ebdccbd79b0c" providerId="ADAL" clId="{6C085BFB-8188-41C0-9F99-678D7B597D20}" dt="2025-04-01T13:33:04.403" v="505" actId="1076"/>
+          <ac:spMkLst>
+            <pc:docMk/>
+            <pc:sldMk cId="2164078111" sldId="261"/>
+            <ac:spMk id="14" creationId="{6F11A55A-0D9D-8A68-D315-FE50D63D91D6}"/>
+          </ac:spMkLst>
+        </pc:spChg>
+        <pc:spChg chg="mod ord">
+          <ac:chgData name="Maaike Vercauteren" userId="ebf6c57b-443c-4492-b592-ebdccbd79b0c" providerId="ADAL" clId="{6C085BFB-8188-41C0-9F99-678D7B597D20}" dt="2025-04-01T13:33:07.828" v="506" actId="166"/>
+          <ac:spMkLst>
+            <pc:docMk/>
+            <pc:sldMk cId="2164078111" sldId="261"/>
+            <ac:spMk id="15" creationId="{0F3BF294-3418-86AB-F821-56242B933D59}"/>
+          </ac:spMkLst>
+        </pc:spChg>
+        <pc:spChg chg="mod ord">
+          <ac:chgData name="Maaike Vercauteren" userId="ebf6c57b-443c-4492-b592-ebdccbd79b0c" providerId="ADAL" clId="{6C085BFB-8188-41C0-9F99-678D7B597D20}" dt="2025-04-01T13:33:07.828" v="506" actId="166"/>
+          <ac:spMkLst>
+            <pc:docMk/>
+            <pc:sldMk cId="2164078111" sldId="261"/>
+            <ac:spMk id="16" creationId="{2A79C189-C157-8C98-33AB-A745840A1CD6}"/>
+          </ac:spMkLst>
+        </pc:spChg>
+        <pc:spChg chg="mod ord">
+          <ac:chgData name="Maaike Vercauteren" userId="ebf6c57b-443c-4492-b592-ebdccbd79b0c" providerId="ADAL" clId="{6C085BFB-8188-41C0-9F99-678D7B597D20}" dt="2025-04-01T13:33:27.625" v="512" actId="1076"/>
+          <ac:spMkLst>
+            <pc:docMk/>
+            <pc:sldMk cId="2164078111" sldId="261"/>
+            <ac:spMk id="17" creationId="{537AF6F7-1DC0-FE54-06A7-B9BD4F2A7B84}"/>
+          </ac:spMkLst>
+        </pc:spChg>
+        <pc:spChg chg="add mod">
+          <ac:chgData name="Maaike Vercauteren" userId="ebf6c57b-443c-4492-b592-ebdccbd79b0c" providerId="ADAL" clId="{6C085BFB-8188-41C0-9F99-678D7B597D20}" dt="2025-04-01T14:24:37.197" v="566" actId="164"/>
+          <ac:spMkLst>
+            <pc:docMk/>
+            <pc:sldMk cId="2164078111" sldId="261"/>
+            <ac:spMk id="25" creationId="{61921805-1D0F-5EB3-F07E-17A296718FB3}"/>
+          </ac:spMkLst>
+        </pc:spChg>
+        <pc:spChg chg="add mod">
+          <ac:chgData name="Maaike Vercauteren" userId="ebf6c57b-443c-4492-b592-ebdccbd79b0c" providerId="ADAL" clId="{6C085BFB-8188-41C0-9F99-678D7B597D20}" dt="2025-04-01T14:23:29.963" v="539" actId="1076"/>
+          <ac:spMkLst>
+            <pc:docMk/>
+            <pc:sldMk cId="2164078111" sldId="261"/>
+            <ac:spMk id="26" creationId="{5B00F0E6-9047-712A-3175-C7D7C2F00B09}"/>
+          </ac:spMkLst>
+        </pc:spChg>
+        <pc:spChg chg="add mod">
+          <ac:chgData name="Maaike Vercauteren" userId="ebf6c57b-443c-4492-b592-ebdccbd79b0c" providerId="ADAL" clId="{6C085BFB-8188-41C0-9F99-678D7B597D20}" dt="2025-04-01T14:24:37.197" v="566" actId="164"/>
+          <ac:spMkLst>
+            <pc:docMk/>
+            <pc:sldMk cId="2164078111" sldId="261"/>
+            <ac:spMk id="27" creationId="{54076C20-DE3A-3E1C-F3CB-B9DAF248E88E}"/>
+          </ac:spMkLst>
+        </pc:spChg>
+        <pc:spChg chg="add mod">
+          <ac:chgData name="Maaike Vercauteren" userId="ebf6c57b-443c-4492-b592-ebdccbd79b0c" providerId="ADAL" clId="{6C085BFB-8188-41C0-9F99-678D7B597D20}" dt="2025-04-01T14:23:49.518" v="549" actId="1035"/>
+          <ac:spMkLst>
+            <pc:docMk/>
+            <pc:sldMk cId="2164078111" sldId="261"/>
+            <ac:spMk id="28" creationId="{0D5D7DC3-604C-F0C9-1E93-AA0BE90930CD}"/>
+          </ac:spMkLst>
+        </pc:spChg>
+        <pc:spChg chg="add mod">
+          <ac:chgData name="Maaike Vercauteren" userId="ebf6c57b-443c-4492-b592-ebdccbd79b0c" providerId="ADAL" clId="{6C085BFB-8188-41C0-9F99-678D7B597D20}" dt="2025-04-01T14:24:37.197" v="566" actId="164"/>
+          <ac:spMkLst>
+            <pc:docMk/>
+            <pc:sldMk cId="2164078111" sldId="261"/>
+            <ac:spMk id="29" creationId="{ACF92BB0-138C-7368-E470-D74B6620BEB2}"/>
+          </ac:spMkLst>
+        </pc:spChg>
+        <pc:spChg chg="add mod">
+          <ac:chgData name="Maaike Vercauteren" userId="ebf6c57b-443c-4492-b592-ebdccbd79b0c" providerId="ADAL" clId="{6C085BFB-8188-41C0-9F99-678D7B597D20}" dt="2025-04-01T14:24:37.197" v="566" actId="164"/>
+          <ac:spMkLst>
+            <pc:docMk/>
+            <pc:sldMk cId="2164078111" sldId="261"/>
+            <ac:spMk id="30" creationId="{1CFFA16B-3287-6914-86C7-AF39D3CA9993}"/>
+          </ac:spMkLst>
+        </pc:spChg>
+        <pc:spChg chg="add mod">
+          <ac:chgData name="Maaike Vercauteren" userId="ebf6c57b-443c-4492-b592-ebdccbd79b0c" providerId="ADAL" clId="{6C085BFB-8188-41C0-9F99-678D7B597D20}" dt="2025-04-01T14:24:37.197" v="566" actId="164"/>
+          <ac:spMkLst>
+            <pc:docMk/>
+            <pc:sldMk cId="2164078111" sldId="261"/>
+            <ac:spMk id="31" creationId="{6DAF934E-06F2-FCF6-7762-408D407B41CC}"/>
+          </ac:spMkLst>
+        </pc:spChg>
+        <pc:spChg chg="add mod">
+          <ac:chgData name="Maaike Vercauteren" userId="ebf6c57b-443c-4492-b592-ebdccbd79b0c" providerId="ADAL" clId="{6C085BFB-8188-41C0-9F99-678D7B597D20}" dt="2025-04-01T14:24:37.197" v="566" actId="164"/>
+          <ac:spMkLst>
+            <pc:docMk/>
+            <pc:sldMk cId="2164078111" sldId="261"/>
+            <ac:spMk id="32" creationId="{29A829DF-B3E3-6BD7-C893-329E9770D1B2}"/>
+          </ac:spMkLst>
+        </pc:spChg>
+        <pc:spChg chg="add mod">
+          <ac:chgData name="Maaike Vercauteren" userId="ebf6c57b-443c-4492-b592-ebdccbd79b0c" providerId="ADAL" clId="{6C085BFB-8188-41C0-9F99-678D7B597D20}" dt="2025-04-01T14:24:37.197" v="566" actId="164"/>
+          <ac:spMkLst>
+            <pc:docMk/>
+            <pc:sldMk cId="2164078111" sldId="261"/>
+            <ac:spMk id="33" creationId="{C699DD8D-36D2-CE38-28B0-A9530ACE6A82}"/>
+          </ac:spMkLst>
+        </pc:spChg>
+        <pc:spChg chg="add mod">
+          <ac:chgData name="Maaike Vercauteren" userId="ebf6c57b-443c-4492-b592-ebdccbd79b0c" providerId="ADAL" clId="{6C085BFB-8188-41C0-9F99-678D7B597D20}" dt="2025-04-01T14:24:37.197" v="566" actId="164"/>
+          <ac:spMkLst>
+            <pc:docMk/>
+            <pc:sldMk cId="2164078111" sldId="261"/>
+            <ac:spMk id="34" creationId="{AA445779-3192-2154-3CD0-F1EC098E4E1D}"/>
+          </ac:spMkLst>
+        </pc:spChg>
+        <pc:spChg chg="add mod">
+          <ac:chgData name="Maaike Vercauteren" userId="ebf6c57b-443c-4492-b592-ebdccbd79b0c" providerId="ADAL" clId="{6C085BFB-8188-41C0-9F99-678D7B597D20}" dt="2025-04-01T14:24:37.197" v="566" actId="164"/>
+          <ac:spMkLst>
+            <pc:docMk/>
+            <pc:sldMk cId="2164078111" sldId="261"/>
+            <ac:spMk id="35" creationId="{4C870FE5-DE8B-9999-CF23-CEB889C5177E}"/>
+          </ac:spMkLst>
+        </pc:spChg>
+        <pc:spChg chg="add mod">
+          <ac:chgData name="Maaike Vercauteren" userId="ebf6c57b-443c-4492-b592-ebdccbd79b0c" providerId="ADAL" clId="{6C085BFB-8188-41C0-9F99-678D7B597D20}" dt="2025-04-01T14:24:37.197" v="566" actId="164"/>
+          <ac:spMkLst>
+            <pc:docMk/>
+            <pc:sldMk cId="2164078111" sldId="261"/>
+            <ac:spMk id="36" creationId="{996499D2-9F10-B2CC-EAFC-7DD5C3901FDD}"/>
+          </ac:spMkLst>
+        </pc:spChg>
+        <pc:grpChg chg="mod">
+          <ac:chgData name="Maaike Vercauteren" userId="ebf6c57b-443c-4492-b592-ebdccbd79b0c" providerId="ADAL" clId="{6C085BFB-8188-41C0-9F99-678D7B597D20}" dt="2025-04-01T13:34:55.701" v="520" actId="164"/>
+          <ac:grpSpMkLst>
+            <pc:docMk/>
+            <pc:sldMk cId="2164078111" sldId="261"/>
+            <ac:grpSpMk id="2" creationId="{5B1C2830-E483-27FA-BACD-566A826FAD68}"/>
+          </ac:grpSpMkLst>
+        </pc:grpChg>
+        <pc:grpChg chg="del">
+          <ac:chgData name="Maaike Vercauteren" userId="ebf6c57b-443c-4492-b592-ebdccbd79b0c" providerId="ADAL" clId="{6C085BFB-8188-41C0-9F99-678D7B597D20}" dt="2025-04-01T13:31:36.814" v="488" actId="478"/>
+          <ac:grpSpMkLst>
+            <pc:docMk/>
+            <pc:sldMk cId="2164078111" sldId="261"/>
+            <ac:grpSpMk id="8" creationId="{8BB00BFE-3559-D2DD-92A4-9CC726FDC61E}"/>
+          </ac:grpSpMkLst>
+        </pc:grpChg>
+        <pc:grpChg chg="add mod">
+          <ac:chgData name="Maaike Vercauteren" userId="ebf6c57b-443c-4492-b592-ebdccbd79b0c" providerId="ADAL" clId="{6C085BFB-8188-41C0-9F99-678D7B597D20}" dt="2025-04-01T13:34:55.701" v="520" actId="164"/>
+          <ac:grpSpMkLst>
+            <pc:docMk/>
+            <pc:sldMk cId="2164078111" sldId="261"/>
+            <ac:grpSpMk id="19" creationId="{C64AE380-8B66-477F-EA25-21B2371E6054}"/>
+          </ac:grpSpMkLst>
+        </pc:grpChg>
+        <pc:grpChg chg="mod">
+          <ac:chgData name="Maaike Vercauteren" userId="ebf6c57b-443c-4492-b592-ebdccbd79b0c" providerId="ADAL" clId="{6C085BFB-8188-41C0-9F99-678D7B597D20}" dt="2025-04-01T13:33:34.808" v="514"/>
+          <ac:grpSpMkLst>
+            <pc:docMk/>
+            <pc:sldMk cId="2164078111" sldId="261"/>
+            <ac:grpSpMk id="20" creationId="{E1BE39D1-4A9D-8B99-2596-F34D8D4011E9}"/>
+          </ac:grpSpMkLst>
+        </pc:grpChg>
+        <pc:grpChg chg="add mod">
+          <ac:chgData name="Maaike Vercauteren" userId="ebf6c57b-443c-4492-b592-ebdccbd79b0c" providerId="ADAL" clId="{6C085BFB-8188-41C0-9F99-678D7B597D20}" dt="2025-04-01T13:34:55.701" v="520" actId="164"/>
+          <ac:grpSpMkLst>
+            <pc:docMk/>
+            <pc:sldMk cId="2164078111" sldId="261"/>
+            <ac:grpSpMk id="24" creationId="{82C83067-2738-26B7-3650-04100EB5879D}"/>
+          </ac:grpSpMkLst>
+        </pc:grpChg>
+        <pc:picChg chg="mod modCrop">
+          <ac:chgData name="Maaike Vercauteren" userId="ebf6c57b-443c-4492-b592-ebdccbd79b0c" providerId="ADAL" clId="{6C085BFB-8188-41C0-9F99-678D7B597D20}" dt="2025-04-01T13:33:49.512" v="518" actId="732"/>
+          <ac:picMkLst>
+            <pc:docMk/>
+            <pc:sldMk cId="2164078111" sldId="261"/>
+            <ac:picMk id="4" creationId="{6BC3F0AC-F0BC-6134-DE25-A25331AF3A4F}"/>
+          </ac:picMkLst>
+        </pc:picChg>
+        <pc:picChg chg="add mod ord modCrop">
+          <ac:chgData name="Maaike Vercauteren" userId="ebf6c57b-443c-4492-b592-ebdccbd79b0c" providerId="ADAL" clId="{6C085BFB-8188-41C0-9F99-678D7B597D20}" dt="2025-04-01T13:34:55.701" v="520" actId="164"/>
+          <ac:picMkLst>
+            <pc:docMk/>
+            <pc:sldMk cId="2164078111" sldId="261"/>
+            <ac:picMk id="18" creationId="{F8175942-31B7-C464-B741-3E6649B91A73}"/>
+          </ac:picMkLst>
+        </pc:picChg>
+        <pc:picChg chg="mod">
+          <ac:chgData name="Maaike Vercauteren" userId="ebf6c57b-443c-4492-b592-ebdccbd79b0c" providerId="ADAL" clId="{6C085BFB-8188-41C0-9F99-678D7B597D20}" dt="2025-04-01T13:33:34.808" v="514"/>
+          <ac:picMkLst>
+            <pc:docMk/>
+            <pc:sldMk cId="2164078111" sldId="261"/>
+            <ac:picMk id="21" creationId="{3F4775F8-4742-65F4-75B2-D44CFA6A2A0A}"/>
+          </ac:picMkLst>
+        </pc:picChg>
+        <pc:picChg chg="mod">
+          <ac:chgData name="Maaike Vercauteren" userId="ebf6c57b-443c-4492-b592-ebdccbd79b0c" providerId="ADAL" clId="{6C085BFB-8188-41C0-9F99-678D7B597D20}" dt="2025-04-01T13:33:34.808" v="514"/>
+          <ac:picMkLst>
+            <pc:docMk/>
+            <pc:sldMk cId="2164078111" sldId="261"/>
+            <ac:picMk id="22" creationId="{BCF4680E-7E11-D927-4A5B-7EC01EA6D569}"/>
+          </ac:picMkLst>
+        </pc:picChg>
+        <pc:picChg chg="mod">
+          <ac:chgData name="Maaike Vercauteren" userId="ebf6c57b-443c-4492-b592-ebdccbd79b0c" providerId="ADAL" clId="{6C085BFB-8188-41C0-9F99-678D7B597D20}" dt="2025-04-01T13:33:34.808" v="514"/>
+          <ac:picMkLst>
+            <pc:docMk/>
+            <pc:sldMk cId="2164078111" sldId="261"/>
+            <ac:picMk id="23" creationId="{A1BA95AD-459C-55DD-9628-E0CE7FC3A107}"/>
           </ac:picMkLst>
         </pc:picChg>
       </pc:sldChg>
@@ -239,53 +682,45 @@
           </ac:picMkLst>
         </pc:picChg>
       </pc:sldChg>
-      <pc:sldChg chg="addSp new">
-        <pc:chgData name="Maaike Vercauteren" userId="ebf6c57b-443c-4492-b592-ebdccbd79b0c" providerId="ADAL" clId="{6C085BFB-8188-41C0-9F99-678D7B597D20}" dt="2025-03-06T08:37:36.650" v="29"/>
+      <pc:sldChg chg="addSp delSp new mod ord">
+        <pc:chgData name="Maaike Vercauteren" userId="ebf6c57b-443c-4492-b592-ebdccbd79b0c" providerId="ADAL" clId="{6C085BFB-8188-41C0-9F99-678D7B597D20}" dt="2025-04-01T15:40:09.220" v="598"/>
         <pc:sldMkLst>
           <pc:docMk/>
           <pc:sldMk cId="3400665824" sldId="265"/>
         </pc:sldMkLst>
-        <pc:picChg chg="add">
-          <ac:chgData name="Maaike Vercauteren" userId="ebf6c57b-443c-4492-b592-ebdccbd79b0c" providerId="ADAL" clId="{6C085BFB-8188-41C0-9F99-678D7B597D20}" dt="2025-03-06T08:37:36.650" v="29"/>
+        <pc:picChg chg="add del">
+          <ac:chgData name="Maaike Vercauteren" userId="ebf6c57b-443c-4492-b592-ebdccbd79b0c" providerId="ADAL" clId="{6C085BFB-8188-41C0-9F99-678D7B597D20}" dt="2025-04-01T15:40:07.628" v="597" actId="478"/>
           <ac:picMkLst>
             <pc:docMk/>
             <pc:sldMk cId="3400665824" sldId="265"/>
             <ac:picMk id="2" creationId="{C1010345-E88A-3D4D-7EEF-128893B385E4}"/>
           </ac:picMkLst>
         </pc:picChg>
+        <pc:picChg chg="add">
+          <ac:chgData name="Maaike Vercauteren" userId="ebf6c57b-443c-4492-b592-ebdccbd79b0c" providerId="ADAL" clId="{6C085BFB-8188-41C0-9F99-678D7B597D20}" dt="2025-04-01T15:40:09.220" v="598"/>
+          <ac:picMkLst>
+            <pc:docMk/>
+            <pc:sldMk cId="3400665824" sldId="265"/>
+            <ac:picMk id="3" creationId="{532CB25F-AACA-D704-6864-F7592B4D0D87}"/>
+          </ac:picMkLst>
+        </pc:picChg>
       </pc:sldChg>
       <pc:sldChg chg="addSp delSp modSp new mod">
-        <pc:chgData name="Maaike Vercauteren" userId="ebf6c57b-443c-4492-b592-ebdccbd79b0c" providerId="ADAL" clId="{6C085BFB-8188-41C0-9F99-678D7B597D20}" dt="2025-03-11T07:28:12.993" v="157"/>
+        <pc:chgData name="Maaike Vercauteren" userId="ebf6c57b-443c-4492-b592-ebdccbd79b0c" providerId="ADAL" clId="{6C085BFB-8188-41C0-9F99-678D7B597D20}" dt="2025-04-01T15:35:38.877" v="594" actId="14100"/>
         <pc:sldMkLst>
           <pc:docMk/>
           <pc:sldMk cId="573083663" sldId="266"/>
         </pc:sldMkLst>
-        <pc:grpChg chg="add del mod">
-          <ac:chgData name="Maaike Vercauteren" userId="ebf6c57b-443c-4492-b592-ebdccbd79b0c" providerId="ADAL" clId="{6C085BFB-8188-41C0-9F99-678D7B597D20}" dt="2025-03-11T07:28:11.318" v="156" actId="478"/>
-          <ac:grpSpMkLst>
+        <pc:picChg chg="add mod">
+          <ac:chgData name="Maaike Vercauteren" userId="ebf6c57b-443c-4492-b592-ebdccbd79b0c" providerId="ADAL" clId="{6C085BFB-8188-41C0-9F99-678D7B597D20}" dt="2025-04-01T15:35:38.877" v="594" actId="14100"/>
+          <ac:picMkLst>
             <pc:docMk/>
             <pc:sldMk cId="573083663" sldId="266"/>
-            <ac:grpSpMk id="4" creationId="{4147D027-497E-C202-09BA-21AFE16FD81F}"/>
-          </ac:grpSpMkLst>
-        </pc:grpChg>
-        <pc:picChg chg="add mod modCrop">
-          <ac:chgData name="Maaike Vercauteren" userId="ebf6c57b-443c-4492-b592-ebdccbd79b0c" providerId="ADAL" clId="{6C085BFB-8188-41C0-9F99-678D7B597D20}" dt="2025-03-06T08:41:56.121" v="65" actId="164"/>
-          <ac:picMkLst>
-            <pc:docMk/>
-            <pc:sldMk cId="573083663" sldId="266"/>
-            <ac:picMk id="2" creationId="{5BC44233-69DC-AEF7-D462-483DB1274E39}"/>
+            <ac:picMk id="2" creationId="{41544A76-1C86-67DA-7532-3D2F7574200A}"/>
           </ac:picMkLst>
         </pc:picChg>
-        <pc:picChg chg="add mod modCrop">
-          <ac:chgData name="Maaike Vercauteren" userId="ebf6c57b-443c-4492-b592-ebdccbd79b0c" providerId="ADAL" clId="{6C085BFB-8188-41C0-9F99-678D7B597D20}" dt="2025-03-06T08:41:56.121" v="65" actId="164"/>
-          <ac:picMkLst>
-            <pc:docMk/>
-            <pc:sldMk cId="573083663" sldId="266"/>
-            <ac:picMk id="3" creationId="{FCF6D5F9-2270-1683-A044-33B662DFAB9A}"/>
-          </ac:picMkLst>
-        </pc:picChg>
-        <pc:picChg chg="add">
-          <ac:chgData name="Maaike Vercauteren" userId="ebf6c57b-443c-4492-b592-ebdccbd79b0c" providerId="ADAL" clId="{6C085BFB-8188-41C0-9F99-678D7B597D20}" dt="2025-03-11T07:28:12.993" v="157"/>
+        <pc:picChg chg="add del">
+          <ac:chgData name="Maaike Vercauteren" userId="ebf6c57b-443c-4492-b592-ebdccbd79b0c" providerId="ADAL" clId="{6C085BFB-8188-41C0-9F99-678D7B597D20}" dt="2025-04-01T15:35:34.622" v="592" actId="478"/>
           <ac:picMkLst>
             <pc:docMk/>
             <pc:sldMk cId="573083663" sldId="266"/>
@@ -353,30 +788,6 @@
             <ac:spMk id="11" creationId="{B6A1C291-EF87-8DBB-BAC4-94480CBF460D}"/>
           </ac:spMkLst>
         </pc:spChg>
-        <pc:spChg chg="add del mod">
-          <ac:chgData name="Maaike Vercauteren" userId="ebf6c57b-443c-4492-b592-ebdccbd79b0c" providerId="ADAL" clId="{6C085BFB-8188-41C0-9F99-678D7B597D20}" dt="2025-03-11T07:28:53.949" v="169" actId="478"/>
-          <ac:spMkLst>
-            <pc:docMk/>
-            <pc:sldMk cId="1788890561" sldId="269"/>
-            <ac:spMk id="12" creationId="{9FA600DC-ADC3-886D-0170-1E0FE8D4C2EB}"/>
-          </ac:spMkLst>
-        </pc:spChg>
-        <pc:spChg chg="add del mod">
-          <ac:chgData name="Maaike Vercauteren" userId="ebf6c57b-443c-4492-b592-ebdccbd79b0c" providerId="ADAL" clId="{6C085BFB-8188-41C0-9F99-678D7B597D20}" dt="2025-03-11T07:28:53.256" v="168" actId="478"/>
-          <ac:spMkLst>
-            <pc:docMk/>
-            <pc:sldMk cId="1788890561" sldId="269"/>
-            <ac:spMk id="13" creationId="{CDD3FCB3-C04E-7357-240B-8B224D3DB9D9}"/>
-          </ac:spMkLst>
-        </pc:spChg>
-        <pc:spChg chg="add del mod">
-          <ac:chgData name="Maaike Vercauteren" userId="ebf6c57b-443c-4492-b592-ebdccbd79b0c" providerId="ADAL" clId="{6C085BFB-8188-41C0-9F99-678D7B597D20}" dt="2025-03-11T07:28:52.222" v="167" actId="478"/>
-          <ac:spMkLst>
-            <pc:docMk/>
-            <pc:sldMk cId="1788890561" sldId="269"/>
-            <ac:spMk id="14" creationId="{0A090612-9647-D4C4-FEDC-A894AA322A75}"/>
-          </ac:spMkLst>
-        </pc:spChg>
         <pc:spChg chg="add mod">
           <ac:chgData name="Maaike Vercauteren" userId="ebf6c57b-443c-4492-b592-ebdccbd79b0c" providerId="ADAL" clId="{6C085BFB-8188-41C0-9F99-678D7B597D20}" dt="2025-03-11T07:29:16.619" v="170" actId="164"/>
           <ac:spMkLst>
@@ -449,14 +860,6 @@
             <ac:spMk id="24" creationId="{C96CC3F2-4539-B304-53CC-B2F905A69ABB}"/>
           </ac:spMkLst>
         </pc:spChg>
-        <pc:grpChg chg="add del mod">
-          <ac:chgData name="Maaike Vercauteren" userId="ebf6c57b-443c-4492-b592-ebdccbd79b0c" providerId="ADAL" clId="{6C085BFB-8188-41C0-9F99-678D7B597D20}" dt="2025-03-11T07:28:18.449" v="158" actId="478"/>
-          <ac:grpSpMkLst>
-            <pc:docMk/>
-            <pc:sldMk cId="1788890561" sldId="269"/>
-            <ac:grpSpMk id="5" creationId="{DD32DDEB-9EE8-1939-97EF-115E4ED26EA8}"/>
-          </ac:grpSpMkLst>
-        </pc:grpChg>
         <pc:picChg chg="add mod modCrop">
           <ac:chgData name="Maaike Vercauteren" userId="ebf6c57b-443c-4492-b592-ebdccbd79b0c" providerId="ADAL" clId="{6C085BFB-8188-41C0-9F99-678D7B597D20}" dt="2025-03-06T08:40:48.190" v="49" actId="732"/>
           <ac:picMkLst>
@@ -479,22 +882,6 @@
             <pc:docMk/>
             <pc:sldMk cId="1788890561" sldId="269"/>
             <ac:picMk id="4" creationId="{23867A03-D590-F303-7C40-393C65A69A74}"/>
-          </ac:picMkLst>
-        </pc:picChg>
-        <pc:picChg chg="mod">
-          <ac:chgData name="Maaike Vercauteren" userId="ebf6c57b-443c-4492-b592-ebdccbd79b0c" providerId="ADAL" clId="{6C085BFB-8188-41C0-9F99-678D7B597D20}" dt="2025-03-06T08:42:04.907" v="69"/>
-          <ac:picMkLst>
-            <pc:docMk/>
-            <pc:sldMk cId="1788890561" sldId="269"/>
-            <ac:picMk id="6" creationId="{DAE81B22-F005-05B8-F277-F12993C36318}"/>
-          </ac:picMkLst>
-        </pc:picChg>
-        <pc:picChg chg="mod">
-          <ac:chgData name="Maaike Vercauteren" userId="ebf6c57b-443c-4492-b592-ebdccbd79b0c" providerId="ADAL" clId="{6C085BFB-8188-41C0-9F99-678D7B597D20}" dt="2025-03-06T08:42:04.907" v="69"/>
-          <ac:picMkLst>
-            <pc:docMk/>
-            <pc:sldMk cId="1788890561" sldId="269"/>
-            <ac:picMk id="7" creationId="{0654C19A-5F14-1325-197E-F3BCB004C366}"/>
           </ac:picMkLst>
         </pc:picChg>
         <pc:picChg chg="add mod modCrop">
@@ -533,6 +920,691 @@
             <pc:docMk/>
             <pc:sldMk cId="4105410793" sldId="271"/>
             <ac:picMk id="4" creationId="{61A932BF-2F1A-E0E4-017A-11E5A4946EB1}"/>
+          </ac:picMkLst>
+        </pc:picChg>
+      </pc:sldChg>
+      <pc:sldChg chg="modSp new mod">
+        <pc:chgData name="Maaike Vercauteren" userId="ebf6c57b-443c-4492-b592-ebdccbd79b0c" providerId="ADAL" clId="{6C085BFB-8188-41C0-9F99-678D7B597D20}" dt="2025-03-24T16:32:30.572" v="182" actId="20577"/>
+        <pc:sldMkLst>
+          <pc:docMk/>
+          <pc:sldMk cId="2901655223" sldId="272"/>
+        </pc:sldMkLst>
+        <pc:spChg chg="mod">
+          <ac:chgData name="Maaike Vercauteren" userId="ebf6c57b-443c-4492-b592-ebdccbd79b0c" providerId="ADAL" clId="{6C085BFB-8188-41C0-9F99-678D7B597D20}" dt="2025-03-24T16:32:30.572" v="182" actId="20577"/>
+          <ac:spMkLst>
+            <pc:docMk/>
+            <pc:sldMk cId="2901655223" sldId="272"/>
+            <ac:spMk id="2" creationId="{B88CE779-0998-79CA-DA43-205F555DE38F}"/>
+          </ac:spMkLst>
+        </pc:spChg>
+      </pc:sldChg>
+      <pc:sldChg chg="addSp new">
+        <pc:chgData name="Maaike Vercauteren" userId="ebf6c57b-443c-4492-b592-ebdccbd79b0c" providerId="ADAL" clId="{6C085BFB-8188-41C0-9F99-678D7B597D20}" dt="2025-03-24T16:39:21.716" v="185"/>
+        <pc:sldMkLst>
+          <pc:docMk/>
+          <pc:sldMk cId="1017550823" sldId="273"/>
+        </pc:sldMkLst>
+        <pc:spChg chg="add">
+          <ac:chgData name="Maaike Vercauteren" userId="ebf6c57b-443c-4492-b592-ebdccbd79b0c" providerId="ADAL" clId="{6C085BFB-8188-41C0-9F99-678D7B597D20}" dt="2025-03-24T16:39:19.550" v="184"/>
+          <ac:spMkLst>
+            <pc:docMk/>
+            <pc:sldMk cId="1017550823" sldId="273"/>
+            <ac:spMk id="2" creationId="{40EAA3F3-5CFD-F5BA-0104-2259FF64E40A}"/>
+          </ac:spMkLst>
+        </pc:spChg>
+        <pc:picChg chg="add">
+          <ac:chgData name="Maaike Vercauteren" userId="ebf6c57b-443c-4492-b592-ebdccbd79b0c" providerId="ADAL" clId="{6C085BFB-8188-41C0-9F99-678D7B597D20}" dt="2025-03-24T16:39:21.716" v="185"/>
+          <ac:picMkLst>
+            <pc:docMk/>
+            <pc:sldMk cId="1017550823" sldId="273"/>
+            <ac:picMk id="3" creationId="{E4635759-54DB-9D45-1F9B-ED578C4A50AE}"/>
+          </ac:picMkLst>
+        </pc:picChg>
+      </pc:sldChg>
+      <pc:sldChg chg="addSp new">
+        <pc:chgData name="Maaike Vercauteren" userId="ebf6c57b-443c-4492-b592-ebdccbd79b0c" providerId="ADAL" clId="{6C085BFB-8188-41C0-9F99-678D7B597D20}" dt="2025-03-24T16:44:01.018" v="188"/>
+        <pc:sldMkLst>
+          <pc:docMk/>
+          <pc:sldMk cId="3367009107" sldId="274"/>
+        </pc:sldMkLst>
+        <pc:picChg chg="add">
+          <ac:chgData name="Maaike Vercauteren" userId="ebf6c57b-443c-4492-b592-ebdccbd79b0c" providerId="ADAL" clId="{6C085BFB-8188-41C0-9F99-678D7B597D20}" dt="2025-03-24T16:44:01.018" v="188"/>
+          <ac:picMkLst>
+            <pc:docMk/>
+            <pc:sldMk cId="3367009107" sldId="274"/>
+            <ac:picMk id="2" creationId="{F79C3D27-8396-9D3C-A8DC-F53A6448442A}"/>
+          </ac:picMkLst>
+        </pc:picChg>
+      </pc:sldChg>
+      <pc:sldChg chg="addSp modSp new mod">
+        <pc:chgData name="Maaike Vercauteren" userId="ebf6c57b-443c-4492-b592-ebdccbd79b0c" providerId="ADAL" clId="{6C085BFB-8188-41C0-9F99-678D7B597D20}" dt="2025-03-26T11:46:32.148" v="230" actId="732"/>
+        <pc:sldMkLst>
+          <pc:docMk/>
+          <pc:sldMk cId="3642722863" sldId="275"/>
+        </pc:sldMkLst>
+        <pc:picChg chg="add mod modCrop">
+          <ac:chgData name="Maaike Vercauteren" userId="ebf6c57b-443c-4492-b592-ebdccbd79b0c" providerId="ADAL" clId="{6C085BFB-8188-41C0-9F99-678D7B597D20}" dt="2025-03-26T11:46:32.148" v="230" actId="732"/>
+          <ac:picMkLst>
+            <pc:docMk/>
+            <pc:sldMk cId="3642722863" sldId="275"/>
+            <ac:picMk id="2" creationId="{843C835B-8BD7-4C3D-FB20-7BB07BD79C1F}"/>
+          </ac:picMkLst>
+        </pc:picChg>
+      </pc:sldChg>
+      <pc:sldChg chg="addSp new modNotesTx">
+        <pc:chgData name="Maaike Vercauteren" userId="ebf6c57b-443c-4492-b592-ebdccbd79b0c" providerId="ADAL" clId="{6C085BFB-8188-41C0-9F99-678D7B597D20}" dt="2025-03-26T11:31:43.176" v="202" actId="20577"/>
+        <pc:sldMkLst>
+          <pc:docMk/>
+          <pc:sldMk cId="3383698100" sldId="276"/>
+        </pc:sldMkLst>
+        <pc:picChg chg="add">
+          <ac:chgData name="Maaike Vercauteren" userId="ebf6c57b-443c-4492-b592-ebdccbd79b0c" providerId="ADAL" clId="{6C085BFB-8188-41C0-9F99-678D7B597D20}" dt="2025-03-26T11:31:40.056" v="192"/>
+          <ac:picMkLst>
+            <pc:docMk/>
+            <pc:sldMk cId="3383698100" sldId="276"/>
+            <ac:picMk id="2" creationId="{9C7BCDBC-0CB1-E433-469B-3CAADD740DEC}"/>
+          </ac:picMkLst>
+        </pc:picChg>
+      </pc:sldChg>
+      <pc:sldChg chg="addSp new modNotesTx">
+        <pc:chgData name="Maaike Vercauteren" userId="ebf6c57b-443c-4492-b592-ebdccbd79b0c" providerId="ADAL" clId="{6C085BFB-8188-41C0-9F99-678D7B597D20}" dt="2025-03-26T11:31:56.634" v="213" actId="20577"/>
+        <pc:sldMkLst>
+          <pc:docMk/>
+          <pc:sldMk cId="2982277789" sldId="277"/>
+        </pc:sldMkLst>
+        <pc:picChg chg="add">
+          <ac:chgData name="Maaike Vercauteren" userId="ebf6c57b-443c-4492-b592-ebdccbd79b0c" providerId="ADAL" clId="{6C085BFB-8188-41C0-9F99-678D7B597D20}" dt="2025-03-26T11:31:53.229" v="204"/>
+          <ac:picMkLst>
+            <pc:docMk/>
+            <pc:sldMk cId="2982277789" sldId="277"/>
+            <ac:picMk id="2" creationId="{B0A7E23D-8116-4DA5-BD13-D1568B22F60F}"/>
+          </ac:picMkLst>
+        </pc:picChg>
+      </pc:sldChg>
+      <pc:sldChg chg="addSp delSp modSp new mod">
+        <pc:chgData name="Maaike Vercauteren" userId="ebf6c57b-443c-4492-b592-ebdccbd79b0c" providerId="ADAL" clId="{6C085BFB-8188-41C0-9F99-678D7B597D20}" dt="2025-03-26T11:50:42.645" v="296" actId="164"/>
+        <pc:sldMkLst>
+          <pc:docMk/>
+          <pc:sldMk cId="3827089126" sldId="278"/>
+        </pc:sldMkLst>
+        <pc:spChg chg="add mod">
+          <ac:chgData name="Maaike Vercauteren" userId="ebf6c57b-443c-4492-b592-ebdccbd79b0c" providerId="ADAL" clId="{6C085BFB-8188-41C0-9F99-678D7B597D20}" dt="2025-03-26T11:50:42.645" v="296" actId="164"/>
+          <ac:spMkLst>
+            <pc:docMk/>
+            <pc:sldMk cId="3827089126" sldId="278"/>
+            <ac:spMk id="10" creationId="{E9B9654C-E601-C668-0764-A1537B14D2AB}"/>
+          </ac:spMkLst>
+        </pc:spChg>
+        <pc:spChg chg="add mod">
+          <ac:chgData name="Maaike Vercauteren" userId="ebf6c57b-443c-4492-b592-ebdccbd79b0c" providerId="ADAL" clId="{6C085BFB-8188-41C0-9F99-678D7B597D20}" dt="2025-03-26T11:50:42.645" v="296" actId="164"/>
+          <ac:spMkLst>
+            <pc:docMk/>
+            <pc:sldMk cId="3827089126" sldId="278"/>
+            <ac:spMk id="11" creationId="{3C57C436-EDB7-A8DF-1A55-C38800A43750}"/>
+          </ac:spMkLst>
+        </pc:spChg>
+        <pc:spChg chg="add mod">
+          <ac:chgData name="Maaike Vercauteren" userId="ebf6c57b-443c-4492-b592-ebdccbd79b0c" providerId="ADAL" clId="{6C085BFB-8188-41C0-9F99-678D7B597D20}" dt="2025-03-26T11:50:42.645" v="296" actId="164"/>
+          <ac:spMkLst>
+            <pc:docMk/>
+            <pc:sldMk cId="3827089126" sldId="278"/>
+            <ac:spMk id="12" creationId="{CB6C43D3-BD26-F01D-B04E-1244A1C871B2}"/>
+          </ac:spMkLst>
+        </pc:spChg>
+        <pc:spChg chg="add mod">
+          <ac:chgData name="Maaike Vercauteren" userId="ebf6c57b-443c-4492-b592-ebdccbd79b0c" providerId="ADAL" clId="{6C085BFB-8188-41C0-9F99-678D7B597D20}" dt="2025-03-26T11:50:42.645" v="296" actId="164"/>
+          <ac:spMkLst>
+            <pc:docMk/>
+            <pc:sldMk cId="3827089126" sldId="278"/>
+            <ac:spMk id="13" creationId="{3023AC3F-4C93-5029-F803-26FBBBDB1FF0}"/>
+          </ac:spMkLst>
+        </pc:spChg>
+        <pc:spChg chg="add mod">
+          <ac:chgData name="Maaike Vercauteren" userId="ebf6c57b-443c-4492-b592-ebdccbd79b0c" providerId="ADAL" clId="{6C085BFB-8188-41C0-9F99-678D7B597D20}" dt="2025-03-26T11:50:42.645" v="296" actId="164"/>
+          <ac:spMkLst>
+            <pc:docMk/>
+            <pc:sldMk cId="3827089126" sldId="278"/>
+            <ac:spMk id="14" creationId="{710E39F1-4D2C-BECD-B45F-30EAA109107F}"/>
+          </ac:spMkLst>
+        </pc:spChg>
+        <pc:spChg chg="add mod">
+          <ac:chgData name="Maaike Vercauteren" userId="ebf6c57b-443c-4492-b592-ebdccbd79b0c" providerId="ADAL" clId="{6C085BFB-8188-41C0-9F99-678D7B597D20}" dt="2025-03-26T11:50:42.645" v="296" actId="164"/>
+          <ac:spMkLst>
+            <pc:docMk/>
+            <pc:sldMk cId="3827089126" sldId="278"/>
+            <ac:spMk id="15" creationId="{B8280DDD-CDE4-4E32-9205-775ADE0BD713}"/>
+          </ac:spMkLst>
+        </pc:spChg>
+        <pc:grpChg chg="add mod">
+          <ac:chgData name="Maaike Vercauteren" userId="ebf6c57b-443c-4492-b592-ebdccbd79b0c" providerId="ADAL" clId="{6C085BFB-8188-41C0-9F99-678D7B597D20}" dt="2025-03-26T11:48:17.340" v="259" actId="164"/>
+          <ac:grpSpMkLst>
+            <pc:docMk/>
+            <pc:sldMk cId="3827089126" sldId="278"/>
+            <ac:grpSpMk id="4" creationId="{13E83B2D-2379-A4A0-E999-4BD95C33113E}"/>
+          </ac:grpSpMkLst>
+        </pc:grpChg>
+        <pc:grpChg chg="add mod">
+          <ac:chgData name="Maaike Vercauteren" userId="ebf6c57b-443c-4492-b592-ebdccbd79b0c" providerId="ADAL" clId="{6C085BFB-8188-41C0-9F99-678D7B597D20}" dt="2025-03-26T11:50:42.645" v="296" actId="164"/>
+          <ac:grpSpMkLst>
+            <pc:docMk/>
+            <pc:sldMk cId="3827089126" sldId="278"/>
+            <ac:grpSpMk id="8" creationId="{C1B0D54A-6A01-7479-558C-DD08982961AF}"/>
+          </ac:grpSpMkLst>
+        </pc:grpChg>
+        <pc:grpChg chg="add mod">
+          <ac:chgData name="Maaike Vercauteren" userId="ebf6c57b-443c-4492-b592-ebdccbd79b0c" providerId="ADAL" clId="{6C085BFB-8188-41C0-9F99-678D7B597D20}" dt="2025-03-26T11:50:42.645" v="296" actId="164"/>
+          <ac:grpSpMkLst>
+            <pc:docMk/>
+            <pc:sldMk cId="3827089126" sldId="278"/>
+            <ac:grpSpMk id="16" creationId="{A50099FE-A2EA-F208-C09C-8EF90140C885}"/>
+          </ac:grpSpMkLst>
+        </pc:grpChg>
+        <pc:picChg chg="add mod modCrop">
+          <ac:chgData name="Maaike Vercauteren" userId="ebf6c57b-443c-4492-b592-ebdccbd79b0c" providerId="ADAL" clId="{6C085BFB-8188-41C0-9F99-678D7B597D20}" dt="2025-03-26T11:46:36.243" v="232" actId="14100"/>
+          <ac:picMkLst>
+            <pc:docMk/>
+            <pc:sldMk cId="3827089126" sldId="278"/>
+            <ac:picMk id="2" creationId="{CDC66E1A-9662-0ED9-F07E-A0CAEDE935A6}"/>
+          </ac:picMkLst>
+        </pc:picChg>
+        <pc:picChg chg="add mod modCrop">
+          <ac:chgData name="Maaike Vercauteren" userId="ebf6c57b-443c-4492-b592-ebdccbd79b0c" providerId="ADAL" clId="{6C085BFB-8188-41C0-9F99-678D7B597D20}" dt="2025-03-26T11:45:41.315" v="227" actId="164"/>
+          <ac:picMkLst>
+            <pc:docMk/>
+            <pc:sldMk cId="3827089126" sldId="278"/>
+            <ac:picMk id="3" creationId="{2C111F46-1F72-FBB1-4EBE-B207D718ED2E}"/>
+          </ac:picMkLst>
+        </pc:picChg>
+        <pc:picChg chg="add mod modCrop">
+          <ac:chgData name="Maaike Vercauteren" userId="ebf6c57b-443c-4492-b592-ebdccbd79b0c" providerId="ADAL" clId="{6C085BFB-8188-41C0-9F99-678D7B597D20}" dt="2025-03-26T11:48:17.340" v="259" actId="164"/>
+          <ac:picMkLst>
+            <pc:docMk/>
+            <pc:sldMk cId="3827089126" sldId="278"/>
+            <ac:picMk id="5" creationId="{1A8F3A03-751A-92C3-22AB-BDC5E46E82A1}"/>
+          </ac:picMkLst>
+        </pc:picChg>
+        <pc:picChg chg="add mod modCrop">
+          <ac:chgData name="Maaike Vercauteren" userId="ebf6c57b-443c-4492-b592-ebdccbd79b0c" providerId="ADAL" clId="{6C085BFB-8188-41C0-9F99-678D7B597D20}" dt="2025-03-26T11:48:17.340" v="259" actId="164"/>
+          <ac:picMkLst>
+            <pc:docMk/>
+            <pc:sldMk cId="3827089126" sldId="278"/>
+            <ac:picMk id="6" creationId="{24C225C3-A78E-588C-A466-04706D4B4719}"/>
+          </ac:picMkLst>
+        </pc:picChg>
+        <pc:picChg chg="add mod modCrop">
+          <ac:chgData name="Maaike Vercauteren" userId="ebf6c57b-443c-4492-b592-ebdccbd79b0c" providerId="ADAL" clId="{6C085BFB-8188-41C0-9F99-678D7B597D20}" dt="2025-03-26T11:48:17.340" v="259" actId="164"/>
+          <ac:picMkLst>
+            <pc:docMk/>
+            <pc:sldMk cId="3827089126" sldId="278"/>
+            <ac:picMk id="7" creationId="{A4E4F849-9F86-BFC8-2777-64559E70A4C1}"/>
+          </ac:picMkLst>
+        </pc:picChg>
+      </pc:sldChg>
+      <pc:sldChg chg="addSp modSp new mod modNotesTx">
+        <pc:chgData name="Maaike Vercauteren" userId="ebf6c57b-443c-4492-b592-ebdccbd79b0c" providerId="ADAL" clId="{6C085BFB-8188-41C0-9F99-678D7B597D20}" dt="2025-04-01T14:00:11.876" v="524" actId="14826"/>
+        <pc:sldMkLst>
+          <pc:docMk/>
+          <pc:sldMk cId="3309135196" sldId="279"/>
+        </pc:sldMkLst>
+        <pc:picChg chg="add mod">
+          <ac:chgData name="Maaike Vercauteren" userId="ebf6c57b-443c-4492-b592-ebdccbd79b0c" providerId="ADAL" clId="{6C085BFB-8188-41C0-9F99-678D7B597D20}" dt="2025-04-01T14:00:11.876" v="524" actId="14826"/>
+          <ac:picMkLst>
+            <pc:docMk/>
+            <pc:sldMk cId="3309135196" sldId="279"/>
+            <ac:picMk id="2" creationId="{4C1EAA87-9E8C-A954-61B6-E44EDB570F56}"/>
+          </ac:picMkLst>
+        </pc:picChg>
+      </pc:sldChg>
+      <pc:sldChg chg="addSp delSp new mod ord modClrScheme chgLayout">
+        <pc:chgData name="Maaike Vercauteren" userId="ebf6c57b-443c-4492-b592-ebdccbd79b0c" providerId="ADAL" clId="{6C085BFB-8188-41C0-9F99-678D7B597D20}" dt="2025-04-01T13:03:21.471" v="331"/>
+        <pc:sldMkLst>
+          <pc:docMk/>
+          <pc:sldMk cId="2160086040" sldId="280"/>
+        </pc:sldMkLst>
+        <pc:picChg chg="add">
+          <ac:chgData name="Maaike Vercauteren" userId="ebf6c57b-443c-4492-b592-ebdccbd79b0c" providerId="ADAL" clId="{6C085BFB-8188-41C0-9F99-678D7B597D20}" dt="2025-03-26T14:06:45.128" v="324"/>
+          <ac:picMkLst>
+            <pc:docMk/>
+            <pc:sldMk cId="2160086040" sldId="280"/>
+            <ac:picMk id="4" creationId="{3D696133-EBD6-16AC-7D1B-D137C2A8D6CD}"/>
+          </ac:picMkLst>
+        </pc:picChg>
+      </pc:sldChg>
+      <pc:sldChg chg="addSp delSp new mod ord modClrScheme chgLayout">
+        <pc:chgData name="Maaike Vercauteren" userId="ebf6c57b-443c-4492-b592-ebdccbd79b0c" providerId="ADAL" clId="{6C085BFB-8188-41C0-9F99-678D7B597D20}" dt="2025-04-01T15:21:47.160" v="568"/>
+        <pc:sldMkLst>
+          <pc:docMk/>
+          <pc:sldMk cId="3035554453" sldId="281"/>
+        </pc:sldMkLst>
+        <pc:picChg chg="add">
+          <ac:chgData name="Maaike Vercauteren" userId="ebf6c57b-443c-4492-b592-ebdccbd79b0c" providerId="ADAL" clId="{6C085BFB-8188-41C0-9F99-678D7B597D20}" dt="2025-03-26T14:41:53.490" v="327"/>
+          <ac:picMkLst>
+            <pc:docMk/>
+            <pc:sldMk cId="3035554453" sldId="281"/>
+            <ac:picMk id="4" creationId="{0F865C4A-CB7A-EEE7-5F46-6119BBE075EA}"/>
+          </ac:picMkLst>
+        </pc:picChg>
+      </pc:sldChg>
+      <pc:sldChg chg="addSp new">
+        <pc:chgData name="Maaike Vercauteren" userId="ebf6c57b-443c-4492-b592-ebdccbd79b0c" providerId="ADAL" clId="{6C085BFB-8188-41C0-9F99-678D7B597D20}" dt="2025-03-26T14:55:42.787" v="329"/>
+        <pc:sldMkLst>
+          <pc:docMk/>
+          <pc:sldMk cId="653595572" sldId="282"/>
+        </pc:sldMkLst>
+        <pc:picChg chg="add">
+          <ac:chgData name="Maaike Vercauteren" userId="ebf6c57b-443c-4492-b592-ebdccbd79b0c" providerId="ADAL" clId="{6C085BFB-8188-41C0-9F99-678D7B597D20}" dt="2025-03-26T14:55:42.787" v="329"/>
+          <ac:picMkLst>
+            <pc:docMk/>
+            <pc:sldMk cId="653595572" sldId="282"/>
+            <ac:picMk id="2" creationId="{B4E2DA13-59D0-ACBC-9CE0-DFFCD1F948FA}"/>
+          </ac:picMkLst>
+        </pc:picChg>
+      </pc:sldChg>
+      <pc:sldChg chg="addSp delSp modSp new del mod">
+        <pc:chgData name="Maaike Vercauteren" userId="ebf6c57b-443c-4492-b592-ebdccbd79b0c" providerId="ADAL" clId="{6C085BFB-8188-41C0-9F99-678D7B597D20}" dt="2025-04-01T13:34:01.513" v="519" actId="47"/>
+        <pc:sldMkLst>
+          <pc:docMk/>
+          <pc:sldMk cId="2937415096" sldId="283"/>
+        </pc:sldMkLst>
+        <pc:spChg chg="add mod">
+          <ac:chgData name="Maaike Vercauteren" userId="ebf6c57b-443c-4492-b592-ebdccbd79b0c" providerId="ADAL" clId="{6C085BFB-8188-41C0-9F99-678D7B597D20}" dt="2025-04-01T13:16:28.452" v="390" actId="207"/>
+          <ac:spMkLst>
+            <pc:docMk/>
+            <pc:sldMk cId="2937415096" sldId="283"/>
+            <ac:spMk id="3" creationId="{3781A071-ADC2-1FBB-4297-B9627C653185}"/>
+          </ac:spMkLst>
+        </pc:spChg>
+        <pc:spChg chg="add mod">
+          <ac:chgData name="Maaike Vercauteren" userId="ebf6c57b-443c-4492-b592-ebdccbd79b0c" providerId="ADAL" clId="{6C085BFB-8188-41C0-9F99-678D7B597D20}" dt="2025-04-01T13:22:26.705" v="400" actId="1076"/>
+          <ac:spMkLst>
+            <pc:docMk/>
+            <pc:sldMk cId="2937415096" sldId="283"/>
+            <ac:spMk id="4" creationId="{9D20A2A0-EEF2-10FC-AB7A-14C7A022E016}"/>
+          </ac:spMkLst>
+        </pc:spChg>
+        <pc:spChg chg="add mod">
+          <ac:chgData name="Maaike Vercauteren" userId="ebf6c57b-443c-4492-b592-ebdccbd79b0c" providerId="ADAL" clId="{6C085BFB-8188-41C0-9F99-678D7B597D20}" dt="2025-04-01T13:16:28.452" v="390" actId="207"/>
+          <ac:spMkLst>
+            <pc:docMk/>
+            <pc:sldMk cId="2937415096" sldId="283"/>
+            <ac:spMk id="5" creationId="{A84309BD-2516-4275-F9D2-DB8506304C1C}"/>
+          </ac:spMkLst>
+        </pc:spChg>
+        <pc:spChg chg="add del mod">
+          <ac:chgData name="Maaike Vercauteren" userId="ebf6c57b-443c-4492-b592-ebdccbd79b0c" providerId="ADAL" clId="{6C085BFB-8188-41C0-9F99-678D7B597D20}" dt="2025-04-01T13:27:03.152" v="440" actId="478"/>
+          <ac:spMkLst>
+            <pc:docMk/>
+            <pc:sldMk cId="2937415096" sldId="283"/>
+            <ac:spMk id="6" creationId="{BF5460FC-BB20-BB95-3115-1F0F1D6EE44D}"/>
+          </ac:spMkLst>
+        </pc:spChg>
+        <pc:spChg chg="add del mod">
+          <ac:chgData name="Maaike Vercauteren" userId="ebf6c57b-443c-4492-b592-ebdccbd79b0c" providerId="ADAL" clId="{6C085BFB-8188-41C0-9F99-678D7B597D20}" dt="2025-04-01T13:27:03.666" v="441" actId="478"/>
+          <ac:spMkLst>
+            <pc:docMk/>
+            <pc:sldMk cId="2937415096" sldId="283"/>
+            <ac:spMk id="7" creationId="{CDA81DF2-6793-A83F-66AF-8E15FA6F0881}"/>
+          </ac:spMkLst>
+        </pc:spChg>
+        <pc:spChg chg="add del mod">
+          <ac:chgData name="Maaike Vercauteren" userId="ebf6c57b-443c-4492-b592-ebdccbd79b0c" providerId="ADAL" clId="{6C085BFB-8188-41C0-9F99-678D7B597D20}" dt="2025-04-01T13:27:02.626" v="439" actId="478"/>
+          <ac:spMkLst>
+            <pc:docMk/>
+            <pc:sldMk cId="2937415096" sldId="283"/>
+            <ac:spMk id="8" creationId="{6BB0EF97-D094-FDA0-EB62-BD6D72CCAA53}"/>
+          </ac:spMkLst>
+        </pc:spChg>
+        <pc:spChg chg="add mod">
+          <ac:chgData name="Maaike Vercauteren" userId="ebf6c57b-443c-4492-b592-ebdccbd79b0c" providerId="ADAL" clId="{6C085BFB-8188-41C0-9F99-678D7B597D20}" dt="2025-04-01T13:23:23.225" v="418" actId="14100"/>
+          <ac:spMkLst>
+            <pc:docMk/>
+            <pc:sldMk cId="2937415096" sldId="283"/>
+            <ac:spMk id="9" creationId="{C9460854-2F95-92AA-FAA2-805D08B7F724}"/>
+          </ac:spMkLst>
+        </pc:spChg>
+        <pc:spChg chg="mod">
+          <ac:chgData name="Maaike Vercauteren" userId="ebf6c57b-443c-4492-b592-ebdccbd79b0c" providerId="ADAL" clId="{6C085BFB-8188-41C0-9F99-678D7B597D20}" dt="2025-04-01T13:24:11.897" v="429" actId="1076"/>
+          <ac:spMkLst>
+            <pc:docMk/>
+            <pc:sldMk cId="2937415096" sldId="283"/>
+            <ac:spMk id="10" creationId="{102EE4FD-C139-5513-FCD8-05891C2B9EC9}"/>
+          </ac:spMkLst>
+        </pc:spChg>
+        <pc:spChg chg="add mod">
+          <ac:chgData name="Maaike Vercauteren" userId="ebf6c57b-443c-4492-b592-ebdccbd79b0c" providerId="ADAL" clId="{6C085BFB-8188-41C0-9F99-678D7B597D20}" dt="2025-04-01T13:23:52.241" v="425" actId="1076"/>
+          <ac:spMkLst>
+            <pc:docMk/>
+            <pc:sldMk cId="2937415096" sldId="283"/>
+            <ac:spMk id="11" creationId="{35210764-46A1-4BEC-AF4C-6F0C4D9EAAAA}"/>
+          </ac:spMkLst>
+        </pc:spChg>
+        <pc:spChg chg="add mod">
+          <ac:chgData name="Maaike Vercauteren" userId="ebf6c57b-443c-4492-b592-ebdccbd79b0c" providerId="ADAL" clId="{6C085BFB-8188-41C0-9F99-678D7B597D20}" dt="2025-04-01T13:23:56.178" v="426" actId="1076"/>
+          <ac:spMkLst>
+            <pc:docMk/>
+            <pc:sldMk cId="2937415096" sldId="283"/>
+            <ac:spMk id="12" creationId="{3A33CA87-03C6-B843-7D3F-105AD4817EB1}"/>
+          </ac:spMkLst>
+        </pc:spChg>
+        <pc:spChg chg="add mod">
+          <ac:chgData name="Maaike Vercauteren" userId="ebf6c57b-443c-4492-b592-ebdccbd79b0c" providerId="ADAL" clId="{6C085BFB-8188-41C0-9F99-678D7B597D20}" dt="2025-04-01T13:24:03.185" v="427" actId="1076"/>
+          <ac:spMkLst>
+            <pc:docMk/>
+            <pc:sldMk cId="2937415096" sldId="283"/>
+            <ac:spMk id="13" creationId="{837C3C52-3E9C-E6C4-3947-996BB3B47F7D}"/>
+          </ac:spMkLst>
+        </pc:spChg>
+        <pc:spChg chg="add mod">
+          <ac:chgData name="Maaike Vercauteren" userId="ebf6c57b-443c-4492-b592-ebdccbd79b0c" providerId="ADAL" clId="{6C085BFB-8188-41C0-9F99-678D7B597D20}" dt="2025-04-01T13:22:14.874" v="397" actId="14100"/>
+          <ac:spMkLst>
+            <pc:docMk/>
+            <pc:sldMk cId="2937415096" sldId="283"/>
+            <ac:spMk id="14" creationId="{49643106-2787-CB93-8335-6D2625615D81}"/>
+          </ac:spMkLst>
+        </pc:spChg>
+        <pc:spChg chg="add mod">
+          <ac:chgData name="Maaike Vercauteren" userId="ebf6c57b-443c-4492-b592-ebdccbd79b0c" providerId="ADAL" clId="{6C085BFB-8188-41C0-9F99-678D7B597D20}" dt="2025-04-01T13:22:23.050" v="399" actId="14100"/>
+          <ac:spMkLst>
+            <pc:docMk/>
+            <pc:sldMk cId="2937415096" sldId="283"/>
+            <ac:spMk id="15" creationId="{8D7F08DA-C5CE-9807-0060-C34375F70428}"/>
+          </ac:spMkLst>
+        </pc:spChg>
+        <pc:spChg chg="add mod">
+          <ac:chgData name="Maaike Vercauteren" userId="ebf6c57b-443c-4492-b592-ebdccbd79b0c" providerId="ADAL" clId="{6C085BFB-8188-41C0-9F99-678D7B597D20}" dt="2025-04-01T13:22:34.865" v="403" actId="1076"/>
+          <ac:spMkLst>
+            <pc:docMk/>
+            <pc:sldMk cId="2937415096" sldId="283"/>
+            <ac:spMk id="16" creationId="{D5B57519-BACE-1150-B39F-0EBF214638B8}"/>
+          </ac:spMkLst>
+        </pc:spChg>
+        <pc:spChg chg="add mod">
+          <ac:chgData name="Maaike Vercauteren" userId="ebf6c57b-443c-4492-b592-ebdccbd79b0c" providerId="ADAL" clId="{6C085BFB-8188-41C0-9F99-678D7B597D20}" dt="2025-04-01T13:23:34.441" v="421" actId="14100"/>
+          <ac:spMkLst>
+            <pc:docMk/>
+            <pc:sldMk cId="2937415096" sldId="283"/>
+            <ac:spMk id="17" creationId="{6BE597C6-7E8A-A49E-2DA7-C5F525E5EE28}"/>
+          </ac:spMkLst>
+        </pc:spChg>
+        <pc:spChg chg="add mod">
+          <ac:chgData name="Maaike Vercauteren" userId="ebf6c57b-443c-4492-b592-ebdccbd79b0c" providerId="ADAL" clId="{6C085BFB-8188-41C0-9F99-678D7B597D20}" dt="2025-04-01T13:24:06.721" v="428" actId="1076"/>
+          <ac:spMkLst>
+            <pc:docMk/>
+            <pc:sldMk cId="2937415096" sldId="283"/>
+            <ac:spMk id="18" creationId="{3D79DF73-56ED-09DE-90DB-8797362603B1}"/>
+          </ac:spMkLst>
+        </pc:spChg>
+        <pc:picChg chg="add mod">
+          <ac:chgData name="Maaike Vercauteren" userId="ebf6c57b-443c-4492-b592-ebdccbd79b0c" providerId="ADAL" clId="{6C085BFB-8188-41C0-9F99-678D7B597D20}" dt="2025-04-01T13:23:09.174" v="415" actId="1076"/>
+          <ac:picMkLst>
+            <pc:docMk/>
+            <pc:sldMk cId="2937415096" sldId="283"/>
+            <ac:picMk id="2" creationId="{FBF857BE-41DC-AD83-0F1B-61B4171B4AFE}"/>
+          </ac:picMkLst>
+        </pc:picChg>
+      </pc:sldChg>
+      <pc:sldChg chg="addSp delSp modSp new mod">
+        <pc:chgData name="Maaike Vercauteren" userId="ebf6c57b-443c-4492-b592-ebdccbd79b0c" providerId="ADAL" clId="{6C085BFB-8188-41C0-9F99-678D7B597D20}" dt="2025-04-01T13:30:17.873" v="471" actId="732"/>
+        <pc:sldMkLst>
+          <pc:docMk/>
+          <pc:sldMk cId="112412351" sldId="284"/>
+        </pc:sldMkLst>
+        <pc:picChg chg="add del mod">
+          <ac:chgData name="Maaike Vercauteren" userId="ebf6c57b-443c-4492-b592-ebdccbd79b0c" providerId="ADAL" clId="{6C085BFB-8188-41C0-9F99-678D7B597D20}" dt="2025-04-01T13:29:47.471" v="466" actId="478"/>
+          <ac:picMkLst>
+            <pc:docMk/>
+            <pc:sldMk cId="112412351" sldId="284"/>
+            <ac:picMk id="2" creationId="{DAD27DD4-CD53-686D-DE10-8D7F290623EE}"/>
+          </ac:picMkLst>
+        </pc:picChg>
+        <pc:picChg chg="add mod modCrop">
+          <ac:chgData name="Maaike Vercauteren" userId="ebf6c57b-443c-4492-b592-ebdccbd79b0c" providerId="ADAL" clId="{6C085BFB-8188-41C0-9F99-678D7B597D20}" dt="2025-04-01T13:30:17.873" v="471" actId="732"/>
+          <ac:picMkLst>
+            <pc:docMk/>
+            <pc:sldMk cId="112412351" sldId="284"/>
+            <ac:picMk id="3" creationId="{02E0D670-4338-EC0A-EB80-19D7F95A851E}"/>
+          </ac:picMkLst>
+        </pc:picChg>
+      </pc:sldChg>
+      <pc:sldChg chg="addSp delSp modSp new mod">
+        <pc:chgData name="Maaike Vercauteren" userId="ebf6c57b-443c-4492-b592-ebdccbd79b0c" providerId="ADAL" clId="{6C085BFB-8188-41C0-9F99-678D7B597D20}" dt="2025-04-01T13:30:46.046" v="478"/>
+        <pc:sldMkLst>
+          <pc:docMk/>
+          <pc:sldMk cId="2770299113" sldId="285"/>
+        </pc:sldMkLst>
+        <pc:picChg chg="add del mod">
+          <ac:chgData name="Maaike Vercauteren" userId="ebf6c57b-443c-4492-b592-ebdccbd79b0c" providerId="ADAL" clId="{6C085BFB-8188-41C0-9F99-678D7B597D20}" dt="2025-04-01T13:25:51.467" v="431" actId="478"/>
+          <ac:picMkLst>
+            <pc:docMk/>
+            <pc:sldMk cId="2770299113" sldId="285"/>
+            <ac:picMk id="2" creationId="{B7F2CED5-82E2-B38C-939D-1263488F32EB}"/>
+          </ac:picMkLst>
+        </pc:picChg>
+        <pc:picChg chg="add del mod modCrop">
+          <ac:chgData name="Maaike Vercauteren" userId="ebf6c57b-443c-4492-b592-ebdccbd79b0c" providerId="ADAL" clId="{6C085BFB-8188-41C0-9F99-678D7B597D20}" dt="2025-04-01T13:29:36.627" v="462" actId="478"/>
+          <ac:picMkLst>
+            <pc:docMk/>
+            <pc:sldMk cId="2770299113" sldId="285"/>
+            <ac:picMk id="3" creationId="{192AE635-75E0-C1D3-1E22-180810A86E0D}"/>
+          </ac:picMkLst>
+        </pc:picChg>
+        <pc:picChg chg="add mod">
+          <ac:chgData name="Maaike Vercauteren" userId="ebf6c57b-443c-4492-b592-ebdccbd79b0c" providerId="ADAL" clId="{6C085BFB-8188-41C0-9F99-678D7B597D20}" dt="2025-04-01T13:29:44.378" v="465" actId="1076"/>
+          <ac:picMkLst>
+            <pc:docMk/>
+            <pc:sldMk cId="2770299113" sldId="285"/>
+            <ac:picMk id="4" creationId="{5C1B2AF7-BAEB-890F-A2DF-EC15C885BA3F}"/>
+          </ac:picMkLst>
+        </pc:picChg>
+        <pc:picChg chg="add mod">
+          <ac:chgData name="Maaike Vercauteren" userId="ebf6c57b-443c-4492-b592-ebdccbd79b0c" providerId="ADAL" clId="{6C085BFB-8188-41C0-9F99-678D7B597D20}" dt="2025-04-01T13:30:46.046" v="478"/>
+          <ac:picMkLst>
+            <pc:docMk/>
+            <pc:sldMk cId="2770299113" sldId="285"/>
+            <ac:picMk id="5" creationId="{24197221-D913-CAB0-6C35-FB5D50B5533E}"/>
+          </ac:picMkLst>
+        </pc:picChg>
+      </pc:sldChg>
+      <pc:sldChg chg="addSp delSp modSp add mod">
+        <pc:chgData name="Maaike Vercauteren" userId="ebf6c57b-443c-4492-b592-ebdccbd79b0c" providerId="ADAL" clId="{6C085BFB-8188-41C0-9F99-678D7B597D20}" dt="2025-04-01T13:31:45.960" v="489" actId="164"/>
+        <pc:sldMkLst>
+          <pc:docMk/>
+          <pc:sldMk cId="2798868901" sldId="286"/>
+        </pc:sldMkLst>
+        <pc:spChg chg="mod">
+          <ac:chgData name="Maaike Vercauteren" userId="ebf6c57b-443c-4492-b592-ebdccbd79b0c" providerId="ADAL" clId="{6C085BFB-8188-41C0-9F99-678D7B597D20}" dt="2025-04-01T13:31:45.960" v="489" actId="164"/>
+          <ac:spMkLst>
+            <pc:docMk/>
+            <pc:sldMk cId="2798868901" sldId="286"/>
+            <ac:spMk id="3" creationId="{B11E4FB1-959C-0F56-5D0E-7BDEA321F253}"/>
+          </ac:spMkLst>
+        </pc:spChg>
+        <pc:spChg chg="mod">
+          <ac:chgData name="Maaike Vercauteren" userId="ebf6c57b-443c-4492-b592-ebdccbd79b0c" providerId="ADAL" clId="{6C085BFB-8188-41C0-9F99-678D7B597D20}" dt="2025-04-01T13:31:45.960" v="489" actId="164"/>
+          <ac:spMkLst>
+            <pc:docMk/>
+            <pc:sldMk cId="2798868901" sldId="286"/>
+            <ac:spMk id="4" creationId="{4DA57C90-B997-7B1D-A8C2-B81EB8D76D54}"/>
+          </ac:spMkLst>
+        </pc:spChg>
+        <pc:spChg chg="mod">
+          <ac:chgData name="Maaike Vercauteren" userId="ebf6c57b-443c-4492-b592-ebdccbd79b0c" providerId="ADAL" clId="{6C085BFB-8188-41C0-9F99-678D7B597D20}" dt="2025-04-01T13:31:45.960" v="489" actId="164"/>
+          <ac:spMkLst>
+            <pc:docMk/>
+            <pc:sldMk cId="2798868901" sldId="286"/>
+            <ac:spMk id="5" creationId="{57DFCC00-AE50-143D-1DE0-F662B6401501}"/>
+          </ac:spMkLst>
+        </pc:spChg>
+        <pc:spChg chg="del">
+          <ac:chgData name="Maaike Vercauteren" userId="ebf6c57b-443c-4492-b592-ebdccbd79b0c" providerId="ADAL" clId="{6C085BFB-8188-41C0-9F99-678D7B597D20}" dt="2025-04-01T13:27:08.861" v="444" actId="478"/>
+          <ac:spMkLst>
+            <pc:docMk/>
+            <pc:sldMk cId="2798868901" sldId="286"/>
+            <ac:spMk id="6" creationId="{E1E8C312-B55F-271D-DF59-730D1963CCD8}"/>
+          </ac:spMkLst>
+        </pc:spChg>
+        <pc:spChg chg="del">
+          <ac:chgData name="Maaike Vercauteren" userId="ebf6c57b-443c-4492-b592-ebdccbd79b0c" providerId="ADAL" clId="{6C085BFB-8188-41C0-9F99-678D7B597D20}" dt="2025-04-01T13:27:07.516" v="443" actId="478"/>
+          <ac:spMkLst>
+            <pc:docMk/>
+            <pc:sldMk cId="2798868901" sldId="286"/>
+            <ac:spMk id="7" creationId="{A6787306-9CE6-6E6B-3AB5-7FD49D76BF02}"/>
+          </ac:spMkLst>
+        </pc:spChg>
+        <pc:spChg chg="del">
+          <ac:chgData name="Maaike Vercauteren" userId="ebf6c57b-443c-4492-b592-ebdccbd79b0c" providerId="ADAL" clId="{6C085BFB-8188-41C0-9F99-678D7B597D20}" dt="2025-04-01T13:27:09.685" v="445" actId="478"/>
+          <ac:spMkLst>
+            <pc:docMk/>
+            <pc:sldMk cId="2798868901" sldId="286"/>
+            <ac:spMk id="8" creationId="{5E251D36-3F17-002F-9F37-33446C5EE9BF}"/>
+          </ac:spMkLst>
+        </pc:spChg>
+        <pc:spChg chg="del">
+          <ac:chgData name="Maaike Vercauteren" userId="ebf6c57b-443c-4492-b592-ebdccbd79b0c" providerId="ADAL" clId="{6C085BFB-8188-41C0-9F99-678D7B597D20}" dt="2025-04-01T13:27:10.185" v="446" actId="478"/>
+          <ac:spMkLst>
+            <pc:docMk/>
+            <pc:sldMk cId="2798868901" sldId="286"/>
+            <ac:spMk id="9" creationId="{76571F4A-6184-6047-02C4-B417266D261B}"/>
+          </ac:spMkLst>
+        </pc:spChg>
+        <pc:spChg chg="mod">
+          <ac:chgData name="Maaike Vercauteren" userId="ebf6c57b-443c-4492-b592-ebdccbd79b0c" providerId="ADAL" clId="{6C085BFB-8188-41C0-9F99-678D7B597D20}" dt="2025-04-01T13:31:45.960" v="489" actId="164"/>
+          <ac:spMkLst>
+            <pc:docMk/>
+            <pc:sldMk cId="2798868901" sldId="286"/>
+            <ac:spMk id="10" creationId="{C8EC8BB4-7EE5-5738-6D78-7E8AAA134122}"/>
+          </ac:spMkLst>
+        </pc:spChg>
+        <pc:spChg chg="mod">
+          <ac:chgData name="Maaike Vercauteren" userId="ebf6c57b-443c-4492-b592-ebdccbd79b0c" providerId="ADAL" clId="{6C085BFB-8188-41C0-9F99-678D7B597D20}" dt="2025-04-01T13:31:45.960" v="489" actId="164"/>
+          <ac:spMkLst>
+            <pc:docMk/>
+            <pc:sldMk cId="2798868901" sldId="286"/>
+            <ac:spMk id="11" creationId="{43EF9C06-C110-BFF5-BB95-A915E7FC5E11}"/>
+          </ac:spMkLst>
+        </pc:spChg>
+        <pc:spChg chg="mod">
+          <ac:chgData name="Maaike Vercauteren" userId="ebf6c57b-443c-4492-b592-ebdccbd79b0c" providerId="ADAL" clId="{6C085BFB-8188-41C0-9F99-678D7B597D20}" dt="2025-04-01T13:31:45.960" v="489" actId="164"/>
+          <ac:spMkLst>
+            <pc:docMk/>
+            <pc:sldMk cId="2798868901" sldId="286"/>
+            <ac:spMk id="12" creationId="{44B50A86-7D06-B7CC-9949-92BE57684153}"/>
+          </ac:spMkLst>
+        </pc:spChg>
+        <pc:spChg chg="mod">
+          <ac:chgData name="Maaike Vercauteren" userId="ebf6c57b-443c-4492-b592-ebdccbd79b0c" providerId="ADAL" clId="{6C085BFB-8188-41C0-9F99-678D7B597D20}" dt="2025-04-01T13:31:45.960" v="489" actId="164"/>
+          <ac:spMkLst>
+            <pc:docMk/>
+            <pc:sldMk cId="2798868901" sldId="286"/>
+            <ac:spMk id="13" creationId="{F8A88B81-91BF-E28E-E5FE-BA16C3284CD4}"/>
+          </ac:spMkLst>
+        </pc:spChg>
+        <pc:spChg chg="mod">
+          <ac:chgData name="Maaike Vercauteren" userId="ebf6c57b-443c-4492-b592-ebdccbd79b0c" providerId="ADAL" clId="{6C085BFB-8188-41C0-9F99-678D7B597D20}" dt="2025-04-01T13:31:45.960" v="489" actId="164"/>
+          <ac:spMkLst>
+            <pc:docMk/>
+            <pc:sldMk cId="2798868901" sldId="286"/>
+            <ac:spMk id="14" creationId="{3CE9E66F-B40A-9AD7-4B4D-01FDBDF59394}"/>
+          </ac:spMkLst>
+        </pc:spChg>
+        <pc:spChg chg="mod">
+          <ac:chgData name="Maaike Vercauteren" userId="ebf6c57b-443c-4492-b592-ebdccbd79b0c" providerId="ADAL" clId="{6C085BFB-8188-41C0-9F99-678D7B597D20}" dt="2025-04-01T13:31:45.960" v="489" actId="164"/>
+          <ac:spMkLst>
+            <pc:docMk/>
+            <pc:sldMk cId="2798868901" sldId="286"/>
+            <ac:spMk id="15" creationId="{F63E2570-AB7A-4CD1-F501-90F0658E6723}"/>
+          </ac:spMkLst>
+        </pc:spChg>
+        <pc:spChg chg="mod">
+          <ac:chgData name="Maaike Vercauteren" userId="ebf6c57b-443c-4492-b592-ebdccbd79b0c" providerId="ADAL" clId="{6C085BFB-8188-41C0-9F99-678D7B597D20}" dt="2025-04-01T13:31:45.960" v="489" actId="164"/>
+          <ac:spMkLst>
+            <pc:docMk/>
+            <pc:sldMk cId="2798868901" sldId="286"/>
+            <ac:spMk id="16" creationId="{981C6DA1-00CF-88C7-DFC0-1D1F895BC1BD}"/>
+          </ac:spMkLst>
+        </pc:spChg>
+        <pc:spChg chg="del">
+          <ac:chgData name="Maaike Vercauteren" userId="ebf6c57b-443c-4492-b592-ebdccbd79b0c" providerId="ADAL" clId="{6C085BFB-8188-41C0-9F99-678D7B597D20}" dt="2025-04-01T13:27:13.928" v="449" actId="478"/>
+          <ac:spMkLst>
+            <pc:docMk/>
+            <pc:sldMk cId="2798868901" sldId="286"/>
+            <ac:spMk id="17" creationId="{8BE280EE-1F90-BC23-D062-8BAC8A24B479}"/>
+          </ac:spMkLst>
+        </pc:spChg>
+        <pc:spChg chg="mod">
+          <ac:chgData name="Maaike Vercauteren" userId="ebf6c57b-443c-4492-b592-ebdccbd79b0c" providerId="ADAL" clId="{6C085BFB-8188-41C0-9F99-678D7B597D20}" dt="2025-04-01T13:27:16.480" v="450" actId="1076"/>
+          <ac:spMkLst>
+            <pc:docMk/>
+            <pc:sldMk cId="2798868901" sldId="286"/>
+            <ac:spMk id="18" creationId="{3D783FF4-D7D8-AB62-2F02-76C85B71CA3E}"/>
+          </ac:spMkLst>
+        </pc:spChg>
+        <pc:picChg chg="add del">
+          <ac:chgData name="Maaike Vercauteren" userId="ebf6c57b-443c-4492-b592-ebdccbd79b0c" providerId="ADAL" clId="{6C085BFB-8188-41C0-9F99-678D7B597D20}" dt="2025-04-01T13:27:12.677" v="448" actId="478"/>
+          <ac:picMkLst>
+            <pc:docMk/>
+            <pc:sldMk cId="2798868901" sldId="286"/>
+            <ac:picMk id="2" creationId="{BC07511B-8DE3-067E-91B6-CDCC0416C99C}"/>
+          </ac:picMkLst>
+        </pc:picChg>
+      </pc:sldChg>
+      <pc:sldChg chg="addSp new">
+        <pc:chgData name="Maaike Vercauteren" userId="ebf6c57b-443c-4492-b592-ebdccbd79b0c" providerId="ADAL" clId="{6C085BFB-8188-41C0-9F99-678D7B597D20}" dt="2025-04-01T13:59:34.864" v="523"/>
+        <pc:sldMkLst>
+          <pc:docMk/>
+          <pc:sldMk cId="762415662" sldId="287"/>
+        </pc:sldMkLst>
+        <pc:picChg chg="add">
+          <ac:chgData name="Maaike Vercauteren" userId="ebf6c57b-443c-4492-b592-ebdccbd79b0c" providerId="ADAL" clId="{6C085BFB-8188-41C0-9F99-678D7B597D20}" dt="2025-04-01T13:59:34.864" v="523"/>
+          <ac:picMkLst>
+            <pc:docMk/>
+            <pc:sldMk cId="762415662" sldId="287"/>
+            <ac:picMk id="2" creationId="{05CE09CE-1335-C1D1-C44F-8DDC3EAA9C0B}"/>
+          </ac:picMkLst>
+        </pc:picChg>
+      </pc:sldChg>
+      <pc:sldChg chg="addSp modSp new mod ord modNotesTx">
+        <pc:chgData name="Maaike Vercauteren" userId="ebf6c57b-443c-4492-b592-ebdccbd79b0c" providerId="ADAL" clId="{6C085BFB-8188-41C0-9F99-678D7B597D20}" dt="2025-04-01T15:42:08.589" v="601" actId="1076"/>
+        <pc:sldMkLst>
+          <pc:docMk/>
+          <pc:sldMk cId="4154828214" sldId="288"/>
+        </pc:sldMkLst>
+        <pc:picChg chg="add mod">
+          <ac:chgData name="Maaike Vercauteren" userId="ebf6c57b-443c-4492-b592-ebdccbd79b0c" providerId="ADAL" clId="{6C085BFB-8188-41C0-9F99-678D7B597D20}" dt="2025-04-01T15:42:08.589" v="601" actId="1076"/>
+          <ac:picMkLst>
+            <pc:docMk/>
+            <pc:sldMk cId="4154828214" sldId="288"/>
+            <ac:picMk id="2" creationId="{72EFDD4A-887F-243B-5E13-24F379D722DD}"/>
+          </ac:picMkLst>
+        </pc:picChg>
+      </pc:sldChg>
+      <pc:sldChg chg="addSp new">
+        <pc:chgData name="Maaike Vercauteren" userId="ebf6c57b-443c-4492-b592-ebdccbd79b0c" providerId="ADAL" clId="{6C085BFB-8188-41C0-9F99-678D7B597D20}" dt="2025-04-01T15:34:47.225" v="591"/>
+        <pc:sldMkLst>
+          <pc:docMk/>
+          <pc:sldMk cId="3525278037" sldId="289"/>
+        </pc:sldMkLst>
+        <pc:picChg chg="add">
+          <ac:chgData name="Maaike Vercauteren" userId="ebf6c57b-443c-4492-b592-ebdccbd79b0c" providerId="ADAL" clId="{6C085BFB-8188-41C0-9F99-678D7B597D20}" dt="2025-04-01T15:34:47.225" v="591"/>
+          <ac:picMkLst>
+            <pc:docMk/>
+            <pc:sldMk cId="3525278037" sldId="289"/>
+            <ac:picMk id="2" creationId="{457D987D-05E7-0BA5-03F0-7904AAB24BE2}"/>
+          </ac:picMkLst>
+        </pc:picChg>
+      </pc:sldChg>
+      <pc:sldChg chg="addSp new">
+        <pc:chgData name="Maaike Vercauteren" userId="ebf6c57b-443c-4492-b592-ebdccbd79b0c" providerId="ADAL" clId="{6C085BFB-8188-41C0-9F99-678D7B597D20}" dt="2025-04-01T15:41:06.922" v="600"/>
+        <pc:sldMkLst>
+          <pc:docMk/>
+          <pc:sldMk cId="2122976636" sldId="290"/>
+        </pc:sldMkLst>
+        <pc:picChg chg="add">
+          <ac:chgData name="Maaike Vercauteren" userId="ebf6c57b-443c-4492-b592-ebdccbd79b0c" providerId="ADAL" clId="{6C085BFB-8188-41C0-9F99-678D7B597D20}" dt="2025-04-01T15:41:06.922" v="600"/>
+          <ac:picMkLst>
+            <pc:docMk/>
+            <pc:sldMk cId="2122976636" sldId="290"/>
+            <ac:picMk id="2" creationId="{FA5328C9-A0BC-1AC5-9004-5E23F2161BF0}"/>
           </ac:picMkLst>
         </pc:picChg>
       </pc:sldChg>
@@ -576,7 +1648,7 @@
         <p:spPr>
           <a:xfrm>
             <a:off x="0" y="0"/>
-            <a:ext cx="2971800" cy="458788"/>
+            <a:ext cx="2971800" cy="467311"/>
           </a:xfrm>
           <a:prstGeom prst="rect">
             <a:avLst/>
@@ -607,7 +1679,7 @@
         <p:spPr>
           <a:xfrm>
             <a:off x="3884613" y="0"/>
-            <a:ext cx="2971800" cy="458788"/>
+            <a:ext cx="2971800" cy="467311"/>
           </a:xfrm>
           <a:prstGeom prst="rect">
             <a:avLst/>
@@ -623,7 +1695,7 @@
           <a:p>
             <a:fld id="{1FA1A29C-9888-4C0D-AEA5-93452BD24CCF}" type="datetimeFigureOut">
               <a:rPr lang="en-US" smtClean="0"/>
-              <a:t>3/11/2025</a:t>
+              <a:t>4/1/2025</a:t>
             </a:fld>
             <a:endParaRPr lang="en-US"/>
           </a:p>
@@ -641,8 +1713,8 @@
         </p:nvSpPr>
         <p:spPr>
           <a:xfrm>
-            <a:off x="685800" y="1143000"/>
-            <a:ext cx="5486400" cy="3086100"/>
+            <a:off x="635000" y="1163638"/>
+            <a:ext cx="5588000" cy="3143250"/>
           </a:xfrm>
           <a:prstGeom prst="rect">
             <a:avLst/>
@@ -674,8 +1746,8 @@
         </p:nvSpPr>
         <p:spPr>
           <a:xfrm>
-            <a:off x="685800" y="4400550"/>
-            <a:ext cx="5486400" cy="3600450"/>
+            <a:off x="685800" y="4482296"/>
+            <a:ext cx="5486400" cy="3667334"/>
           </a:xfrm>
           <a:prstGeom prst="rect">
             <a:avLst/>
@@ -733,8 +1805,8 @@
         </p:nvSpPr>
         <p:spPr>
           <a:xfrm>
-            <a:off x="0" y="8685213"/>
-            <a:ext cx="2971800" cy="458787"/>
+            <a:off x="0" y="8846554"/>
+            <a:ext cx="2971800" cy="467310"/>
           </a:xfrm>
           <a:prstGeom prst="rect">
             <a:avLst/>
@@ -764,8 +1836,8 @@
         </p:nvSpPr>
         <p:spPr>
           <a:xfrm>
-            <a:off x="3884613" y="8685213"/>
-            <a:ext cx="2971800" cy="458787"/>
+            <a:off x="3884613" y="8846554"/>
+            <a:ext cx="2971800" cy="467310"/>
           </a:xfrm>
           <a:prstGeom prst="rect">
             <a:avLst/>
@@ -934,6 +2006,14 @@
           <a:bodyPr/>
           <a:lstStyle/>
           <a:p>
+            <a:r>
+              <a:rPr lang="nl-BE" dirty="0" err="1"/>
+              <a:t>Scaling</a:t>
+            </a:r>
+            <a:r>
+              <a:rPr lang="nl-BE" dirty="0"/>
+              <a:t> 2</a:t>
+            </a:r>
             <a:endParaRPr lang="en-US" dirty="0"/>
           </a:p>
         </p:txBody>
@@ -955,7 +2035,7 @@
           <a:p>
             <a:fld id="{27E24283-A4F9-45EC-ADED-AA9309878B68}" type="slidenum">
               <a:rPr lang="en-US" smtClean="0"/>
-              <a:t>2</a:t>
+              <a:t>8</a:t>
             </a:fld>
             <a:endParaRPr lang="en-US"/>
           </a:p>
@@ -964,7 +2044,99 @@
     </p:spTree>
     <p:extLst>
       <p:ext uri="{BB962C8B-B14F-4D97-AF65-F5344CB8AC3E}">
-        <p14:creationId xmlns:p14="http://schemas.microsoft.com/office/powerpoint/2010/main" val="471828669"/>
+        <p14:creationId xmlns:p14="http://schemas.microsoft.com/office/powerpoint/2010/main" val="2499392769"/>
+      </p:ext>
+    </p:extLst>
+  </p:cSld>
+  <p:clrMapOvr>
+    <a:masterClrMapping/>
+  </p:clrMapOvr>
+</p:notes>
+</file>
+
+<file path=ppt/notesSlides/notesSlide10.xml><?xml version="1.0" encoding="utf-8"?>
+<p:notes xmlns:a="http://schemas.openxmlformats.org/drawingml/2006/main" xmlns:r="http://schemas.openxmlformats.org/officeDocument/2006/relationships" xmlns:p="http://schemas.openxmlformats.org/presentationml/2006/main">
+  <p:cSld>
+    <p:spTree>
+      <p:nvGrpSpPr>
+        <p:cNvPr id="1" name=""/>
+        <p:cNvGrpSpPr/>
+        <p:nvPr/>
+      </p:nvGrpSpPr>
+      <p:grpSpPr>
+        <a:xfrm>
+          <a:off x="0" y="0"/>
+          <a:ext cx="0" cy="0"/>
+          <a:chOff x="0" y="0"/>
+          <a:chExt cx="0" cy="0"/>
+        </a:xfrm>
+      </p:grpSpPr>
+      <p:sp>
+        <p:nvSpPr>
+          <p:cNvPr id="2" name="Slide Image Placeholder 1"/>
+          <p:cNvSpPr>
+            <a:spLocks noGrp="1" noRot="1" noChangeAspect="1"/>
+          </p:cNvSpPr>
+          <p:nvPr>
+            <p:ph type="sldImg"/>
+          </p:nvPr>
+        </p:nvSpPr>
+        <p:spPr/>
+      </p:sp>
+      <p:sp>
+        <p:nvSpPr>
+          <p:cNvPr id="3" name="Notes Placeholder 2"/>
+          <p:cNvSpPr>
+            <a:spLocks noGrp="1"/>
+          </p:cNvSpPr>
+          <p:nvPr>
+            <p:ph type="body" idx="1"/>
+          </p:nvPr>
+        </p:nvSpPr>
+        <p:spPr/>
+        <p:txBody>
+          <a:bodyPr/>
+          <a:lstStyle/>
+          <a:p>
+            <a:r>
+              <a:rPr lang="nl-BE" dirty="0" err="1"/>
+              <a:t>Scaling</a:t>
+            </a:r>
+            <a:r>
+              <a:rPr lang="nl-BE" dirty="0"/>
+              <a:t> 2</a:t>
+            </a:r>
+            <a:endParaRPr lang="en-US" dirty="0"/>
+          </a:p>
+        </p:txBody>
+      </p:sp>
+      <p:sp>
+        <p:nvSpPr>
+          <p:cNvPr id="4" name="Slide Number Placeholder 3"/>
+          <p:cNvSpPr>
+            <a:spLocks noGrp="1"/>
+          </p:cNvSpPr>
+          <p:nvPr>
+            <p:ph type="sldNum" sz="quarter" idx="5"/>
+          </p:nvPr>
+        </p:nvSpPr>
+        <p:spPr/>
+        <p:txBody>
+          <a:bodyPr/>
+          <a:lstStyle/>
+          <a:p>
+            <a:fld id="{27E24283-A4F9-45EC-ADED-AA9309878B68}" type="slidenum">
+              <a:rPr lang="en-US" smtClean="0"/>
+              <a:t>32</a:t>
+            </a:fld>
+            <a:endParaRPr lang="en-US"/>
+          </a:p>
+        </p:txBody>
+      </p:sp>
+    </p:spTree>
+    <p:extLst>
+      <p:ext uri="{BB962C8B-B14F-4D97-AF65-F5344CB8AC3E}">
+        <p14:creationId xmlns:p14="http://schemas.microsoft.com/office/powerpoint/2010/main" val="2127871162"/>
       </p:ext>
     </p:extLst>
   </p:cSld>
@@ -1018,6 +2190,14 @@
           <a:bodyPr/>
           <a:lstStyle/>
           <a:p>
+            <a:r>
+              <a:rPr lang="nl-BE" dirty="0" err="1"/>
+              <a:t>Scaling</a:t>
+            </a:r>
+            <a:r>
+              <a:rPr lang="nl-BE" dirty="0"/>
+              <a:t> 1</a:t>
+            </a:r>
             <a:endParaRPr lang="en-US" dirty="0"/>
           </a:p>
         </p:txBody>
@@ -1039,7 +2219,7 @@
           <a:p>
             <a:fld id="{27E24283-A4F9-45EC-ADED-AA9309878B68}" type="slidenum">
               <a:rPr lang="en-US" smtClean="0"/>
-              <a:t>11</a:t>
+              <a:t>10</a:t>
             </a:fld>
             <a:endParaRPr lang="en-US"/>
           </a:p>
@@ -1048,7 +2228,7 @@
     </p:spTree>
     <p:extLst>
       <p:ext uri="{BB962C8B-B14F-4D97-AF65-F5344CB8AC3E}">
-        <p14:creationId xmlns:p14="http://schemas.microsoft.com/office/powerpoint/2010/main" val="1931374319"/>
+        <p14:creationId xmlns:p14="http://schemas.microsoft.com/office/powerpoint/2010/main" val="2681295485"/>
       </p:ext>
     </p:extLst>
   </p:cSld>
@@ -1102,6 +2282,14 @@
           <a:bodyPr/>
           <a:lstStyle/>
           <a:p>
+            <a:r>
+              <a:rPr lang="nl-BE" dirty="0" err="1"/>
+              <a:t>Scaling</a:t>
+            </a:r>
+            <a:r>
+              <a:rPr lang="nl-BE" dirty="0"/>
+              <a:t> 1 </a:t>
+            </a:r>
             <a:endParaRPr lang="en-US" dirty="0"/>
           </a:p>
         </p:txBody>
@@ -1123,7 +2311,7 @@
           <a:p>
             <a:fld id="{27E24283-A4F9-45EC-ADED-AA9309878B68}" type="slidenum">
               <a:rPr lang="en-US" smtClean="0"/>
-              <a:t>12</a:t>
+              <a:t>11</a:t>
             </a:fld>
             <a:endParaRPr lang="en-US"/>
           </a:p>
@@ -1132,7 +2320,7 @@
     </p:spTree>
     <p:extLst>
       <p:ext uri="{BB962C8B-B14F-4D97-AF65-F5344CB8AC3E}">
-        <p14:creationId xmlns:p14="http://schemas.microsoft.com/office/powerpoint/2010/main" val="2631307802"/>
+        <p14:creationId xmlns:p14="http://schemas.microsoft.com/office/powerpoint/2010/main" val="1798203352"/>
       </p:ext>
     </p:extLst>
   </p:cSld>
@@ -1188,11 +2376,19 @@
           <a:p>
             <a:r>
               <a:rPr lang="nl-BE" dirty="0" err="1"/>
-              <a:t>Scaling</a:t>
+              <a:t>With</a:t>
             </a:r>
             <a:r>
               <a:rPr lang="nl-BE" dirty="0"/>
-              <a:t> 1</a:t>
+              <a:t> </a:t>
+            </a:r>
+            <a:r>
+              <a:rPr lang="nl-BE" dirty="0" err="1"/>
+              <a:t>all</a:t>
+            </a:r>
+            <a:r>
+              <a:rPr lang="nl-BE" dirty="0"/>
+              <a:t> samples</a:t>
             </a:r>
             <a:endParaRPr lang="en-US" dirty="0"/>
           </a:p>
@@ -1215,7 +2411,7 @@
           <a:p>
             <a:fld id="{27E24283-A4F9-45EC-ADED-AA9309878B68}" type="slidenum">
               <a:rPr lang="en-US" smtClean="0"/>
-              <a:t>15</a:t>
+              <a:t>13</a:t>
             </a:fld>
             <a:endParaRPr lang="en-US"/>
           </a:p>
@@ -1224,7 +2420,7 @@
     </p:spTree>
     <p:extLst>
       <p:ext uri="{BB962C8B-B14F-4D97-AF65-F5344CB8AC3E}">
-        <p14:creationId xmlns:p14="http://schemas.microsoft.com/office/powerpoint/2010/main" val="1666611773"/>
+        <p14:creationId xmlns:p14="http://schemas.microsoft.com/office/powerpoint/2010/main" val="1825193420"/>
       </p:ext>
     </p:extLst>
   </p:cSld>
@@ -1278,10 +2474,6 @@
           <a:bodyPr/>
           <a:lstStyle/>
           <a:p>
-            <a:r>
-              <a:rPr lang="nl-BE" dirty="0"/>
-              <a:t>Scaling1</a:t>
-            </a:r>
             <a:endParaRPr lang="en-US" dirty="0"/>
           </a:p>
         </p:txBody>
@@ -1312,7 +2504,363 @@
     </p:spTree>
     <p:extLst>
       <p:ext uri="{BB962C8B-B14F-4D97-AF65-F5344CB8AC3E}">
+        <p14:creationId xmlns:p14="http://schemas.microsoft.com/office/powerpoint/2010/main" val="1931374319"/>
+      </p:ext>
+    </p:extLst>
+  </p:cSld>
+  <p:clrMapOvr>
+    <a:masterClrMapping/>
+  </p:clrMapOvr>
+</p:notes>
+</file>
+
+<file path=ppt/notesSlides/notesSlide6.xml><?xml version="1.0" encoding="utf-8"?>
+<p:notes xmlns:a="http://schemas.openxmlformats.org/drawingml/2006/main" xmlns:r="http://schemas.openxmlformats.org/officeDocument/2006/relationships" xmlns:p="http://schemas.openxmlformats.org/presentationml/2006/main">
+  <p:cSld>
+    <p:spTree>
+      <p:nvGrpSpPr>
+        <p:cNvPr id="1" name=""/>
+        <p:cNvGrpSpPr/>
+        <p:nvPr/>
+      </p:nvGrpSpPr>
+      <p:grpSpPr>
+        <a:xfrm>
+          <a:off x="0" y="0"/>
+          <a:ext cx="0" cy="0"/>
+          <a:chOff x="0" y="0"/>
+          <a:chExt cx="0" cy="0"/>
+        </a:xfrm>
+      </p:grpSpPr>
+      <p:sp>
+        <p:nvSpPr>
+          <p:cNvPr id="2" name="Slide Image Placeholder 1"/>
+          <p:cNvSpPr>
+            <a:spLocks noGrp="1" noRot="1" noChangeAspect="1"/>
+          </p:cNvSpPr>
+          <p:nvPr>
+            <p:ph type="sldImg"/>
+          </p:nvPr>
+        </p:nvSpPr>
+        <p:spPr/>
+      </p:sp>
+      <p:sp>
+        <p:nvSpPr>
+          <p:cNvPr id="3" name="Notes Placeholder 2"/>
+          <p:cNvSpPr>
+            <a:spLocks noGrp="1"/>
+          </p:cNvSpPr>
+          <p:nvPr>
+            <p:ph type="body" idx="1"/>
+          </p:nvPr>
+        </p:nvSpPr>
+        <p:spPr/>
+        <p:txBody>
+          <a:bodyPr/>
+          <a:lstStyle/>
+          <a:p>
+            <a:endParaRPr lang="en-US" dirty="0"/>
+          </a:p>
+        </p:txBody>
+      </p:sp>
+      <p:sp>
+        <p:nvSpPr>
+          <p:cNvPr id="4" name="Slide Number Placeholder 3"/>
+          <p:cNvSpPr>
+            <a:spLocks noGrp="1"/>
+          </p:cNvSpPr>
+          <p:nvPr>
+            <p:ph type="sldNum" sz="quarter" idx="5"/>
+          </p:nvPr>
+        </p:nvSpPr>
+        <p:spPr/>
+        <p:txBody>
+          <a:bodyPr/>
+          <a:lstStyle/>
+          <a:p>
+            <a:fld id="{27E24283-A4F9-45EC-ADED-AA9309878B68}" type="slidenum">
+              <a:rPr lang="en-US" smtClean="0"/>
+              <a:t>19</a:t>
+            </a:fld>
+            <a:endParaRPr lang="en-US"/>
+          </a:p>
+        </p:txBody>
+      </p:sp>
+    </p:spTree>
+    <p:extLst>
+      <p:ext uri="{BB962C8B-B14F-4D97-AF65-F5344CB8AC3E}">
+        <p14:creationId xmlns:p14="http://schemas.microsoft.com/office/powerpoint/2010/main" val="2631307802"/>
+      </p:ext>
+    </p:extLst>
+  </p:cSld>
+  <p:clrMapOvr>
+    <a:masterClrMapping/>
+  </p:clrMapOvr>
+</p:notes>
+</file>
+
+<file path=ppt/notesSlides/notesSlide7.xml><?xml version="1.0" encoding="utf-8"?>
+<p:notes xmlns:a="http://schemas.openxmlformats.org/drawingml/2006/main" xmlns:r="http://schemas.openxmlformats.org/officeDocument/2006/relationships" xmlns:p="http://schemas.openxmlformats.org/presentationml/2006/main">
+  <p:cSld>
+    <p:spTree>
+      <p:nvGrpSpPr>
+        <p:cNvPr id="1" name=""/>
+        <p:cNvGrpSpPr/>
+        <p:nvPr/>
+      </p:nvGrpSpPr>
+      <p:grpSpPr>
+        <a:xfrm>
+          <a:off x="0" y="0"/>
+          <a:ext cx="0" cy="0"/>
+          <a:chOff x="0" y="0"/>
+          <a:chExt cx="0" cy="0"/>
+        </a:xfrm>
+      </p:grpSpPr>
+      <p:sp>
+        <p:nvSpPr>
+          <p:cNvPr id="2" name="Slide Image Placeholder 1"/>
+          <p:cNvSpPr>
+            <a:spLocks noGrp="1" noRot="1" noChangeAspect="1"/>
+          </p:cNvSpPr>
+          <p:nvPr>
+            <p:ph type="sldImg"/>
+          </p:nvPr>
+        </p:nvSpPr>
+        <p:spPr/>
+      </p:sp>
+      <p:sp>
+        <p:nvSpPr>
+          <p:cNvPr id="3" name="Notes Placeholder 2"/>
+          <p:cNvSpPr>
+            <a:spLocks noGrp="1"/>
+          </p:cNvSpPr>
+          <p:nvPr>
+            <p:ph type="body" idx="1"/>
+          </p:nvPr>
+        </p:nvSpPr>
+        <p:spPr/>
+        <p:txBody>
+          <a:bodyPr/>
+          <a:lstStyle/>
+          <a:p>
+            <a:r>
+              <a:rPr lang="nl-BE" dirty="0" err="1"/>
+              <a:t>Scaling</a:t>
+            </a:r>
+            <a:r>
+              <a:rPr lang="nl-BE" dirty="0"/>
+              <a:t> 1</a:t>
+            </a:r>
+            <a:endParaRPr lang="en-US" dirty="0"/>
+          </a:p>
+        </p:txBody>
+      </p:sp>
+      <p:sp>
+        <p:nvSpPr>
+          <p:cNvPr id="4" name="Slide Number Placeholder 3"/>
+          <p:cNvSpPr>
+            <a:spLocks noGrp="1"/>
+          </p:cNvSpPr>
+          <p:nvPr>
+            <p:ph type="sldNum" sz="quarter" idx="5"/>
+          </p:nvPr>
+        </p:nvSpPr>
+        <p:spPr/>
+        <p:txBody>
+          <a:bodyPr/>
+          <a:lstStyle/>
+          <a:p>
+            <a:fld id="{27E24283-A4F9-45EC-ADED-AA9309878B68}" type="slidenum">
+              <a:rPr lang="en-US" smtClean="0"/>
+              <a:t>23</a:t>
+            </a:fld>
+            <a:endParaRPr lang="en-US"/>
+          </a:p>
+        </p:txBody>
+      </p:sp>
+    </p:spTree>
+    <p:extLst>
+      <p:ext uri="{BB962C8B-B14F-4D97-AF65-F5344CB8AC3E}">
+        <p14:creationId xmlns:p14="http://schemas.microsoft.com/office/powerpoint/2010/main" val="1666611773"/>
+      </p:ext>
+    </p:extLst>
+  </p:cSld>
+  <p:clrMapOvr>
+    <a:masterClrMapping/>
+  </p:clrMapOvr>
+</p:notes>
+</file>
+
+<file path=ppt/notesSlides/notesSlide8.xml><?xml version="1.0" encoding="utf-8"?>
+<p:notes xmlns:a="http://schemas.openxmlformats.org/drawingml/2006/main" xmlns:r="http://schemas.openxmlformats.org/officeDocument/2006/relationships" xmlns:p="http://schemas.openxmlformats.org/presentationml/2006/main">
+  <p:cSld>
+    <p:spTree>
+      <p:nvGrpSpPr>
+        <p:cNvPr id="1" name=""/>
+        <p:cNvGrpSpPr/>
+        <p:nvPr/>
+      </p:nvGrpSpPr>
+      <p:grpSpPr>
+        <a:xfrm>
+          <a:off x="0" y="0"/>
+          <a:ext cx="0" cy="0"/>
+          <a:chOff x="0" y="0"/>
+          <a:chExt cx="0" cy="0"/>
+        </a:xfrm>
+      </p:grpSpPr>
+      <p:sp>
+        <p:nvSpPr>
+          <p:cNvPr id="2" name="Slide Image Placeholder 1"/>
+          <p:cNvSpPr>
+            <a:spLocks noGrp="1" noRot="1" noChangeAspect="1"/>
+          </p:cNvSpPr>
+          <p:nvPr>
+            <p:ph type="sldImg"/>
+          </p:nvPr>
+        </p:nvSpPr>
+        <p:spPr/>
+      </p:sp>
+      <p:sp>
+        <p:nvSpPr>
+          <p:cNvPr id="3" name="Notes Placeholder 2"/>
+          <p:cNvSpPr>
+            <a:spLocks noGrp="1"/>
+          </p:cNvSpPr>
+          <p:nvPr>
+            <p:ph type="body" idx="1"/>
+          </p:nvPr>
+        </p:nvSpPr>
+        <p:spPr/>
+        <p:txBody>
+          <a:bodyPr/>
+          <a:lstStyle/>
+          <a:p>
+            <a:r>
+              <a:rPr lang="nl-BE" dirty="0"/>
+              <a:t>Scaling1</a:t>
+            </a:r>
+            <a:endParaRPr lang="en-US" dirty="0"/>
+          </a:p>
+        </p:txBody>
+      </p:sp>
+      <p:sp>
+        <p:nvSpPr>
+          <p:cNvPr id="4" name="Slide Number Placeholder 3"/>
+          <p:cNvSpPr>
+            <a:spLocks noGrp="1"/>
+          </p:cNvSpPr>
+          <p:nvPr>
+            <p:ph type="sldNum" sz="quarter" idx="5"/>
+          </p:nvPr>
+        </p:nvSpPr>
+        <p:spPr/>
+        <p:txBody>
+          <a:bodyPr/>
+          <a:lstStyle/>
+          <a:p>
+            <a:fld id="{27E24283-A4F9-45EC-ADED-AA9309878B68}" type="slidenum">
+              <a:rPr lang="en-US" smtClean="0"/>
+              <a:t>24</a:t>
+            </a:fld>
+            <a:endParaRPr lang="en-US"/>
+          </a:p>
+        </p:txBody>
+      </p:sp>
+    </p:spTree>
+    <p:extLst>
+      <p:ext uri="{BB962C8B-B14F-4D97-AF65-F5344CB8AC3E}">
         <p14:creationId xmlns:p14="http://schemas.microsoft.com/office/powerpoint/2010/main" val="2938705286"/>
+      </p:ext>
+    </p:extLst>
+  </p:cSld>
+  <p:clrMapOvr>
+    <a:masterClrMapping/>
+  </p:clrMapOvr>
+</p:notes>
+</file>
+
+<file path=ppt/notesSlides/notesSlide9.xml><?xml version="1.0" encoding="utf-8"?>
+<p:notes xmlns:a="http://schemas.openxmlformats.org/drawingml/2006/main" xmlns:r="http://schemas.openxmlformats.org/officeDocument/2006/relationships" xmlns:p="http://schemas.openxmlformats.org/presentationml/2006/main">
+  <p:cSld>
+    <p:spTree>
+      <p:nvGrpSpPr>
+        <p:cNvPr id="1" name=""/>
+        <p:cNvGrpSpPr/>
+        <p:nvPr/>
+      </p:nvGrpSpPr>
+      <p:grpSpPr>
+        <a:xfrm>
+          <a:off x="0" y="0"/>
+          <a:ext cx="0" cy="0"/>
+          <a:chOff x="0" y="0"/>
+          <a:chExt cx="0" cy="0"/>
+        </a:xfrm>
+      </p:grpSpPr>
+      <p:sp>
+        <p:nvSpPr>
+          <p:cNvPr id="2" name="Slide Image Placeholder 1"/>
+          <p:cNvSpPr>
+            <a:spLocks noGrp="1" noRot="1" noChangeAspect="1"/>
+          </p:cNvSpPr>
+          <p:nvPr>
+            <p:ph type="sldImg"/>
+          </p:nvPr>
+        </p:nvSpPr>
+        <p:spPr/>
+      </p:sp>
+      <p:sp>
+        <p:nvSpPr>
+          <p:cNvPr id="3" name="Notes Placeholder 2"/>
+          <p:cNvSpPr>
+            <a:spLocks noGrp="1"/>
+          </p:cNvSpPr>
+          <p:nvPr>
+            <p:ph type="body" idx="1"/>
+          </p:nvPr>
+        </p:nvSpPr>
+        <p:spPr/>
+        <p:txBody>
+          <a:bodyPr/>
+          <a:lstStyle/>
+          <a:p>
+            <a:r>
+              <a:rPr lang="nl-BE" dirty="0" err="1"/>
+              <a:t>Scaling</a:t>
+            </a:r>
+            <a:r>
+              <a:rPr lang="nl-BE" dirty="0"/>
+              <a:t> 1</a:t>
+            </a:r>
+            <a:endParaRPr lang="en-US" dirty="0"/>
+          </a:p>
+        </p:txBody>
+      </p:sp>
+      <p:sp>
+        <p:nvSpPr>
+          <p:cNvPr id="4" name="Slide Number Placeholder 3"/>
+          <p:cNvSpPr>
+            <a:spLocks noGrp="1"/>
+          </p:cNvSpPr>
+          <p:nvPr>
+            <p:ph type="sldNum" sz="quarter" idx="5"/>
+          </p:nvPr>
+        </p:nvSpPr>
+        <p:spPr/>
+        <p:txBody>
+          <a:bodyPr/>
+          <a:lstStyle/>
+          <a:p>
+            <a:fld id="{27E24283-A4F9-45EC-ADED-AA9309878B68}" type="slidenum">
+              <a:rPr lang="en-US" smtClean="0"/>
+              <a:t>31</a:t>
+            </a:fld>
+            <a:endParaRPr lang="en-US"/>
+          </a:p>
+        </p:txBody>
+      </p:sp>
+    </p:spTree>
+    <p:extLst>
+      <p:ext uri="{BB962C8B-B14F-4D97-AF65-F5344CB8AC3E}">
+        <p14:creationId xmlns:p14="http://schemas.microsoft.com/office/powerpoint/2010/main" val="239394406"/>
       </p:ext>
     </p:extLst>
   </p:cSld>
@@ -1469,7 +3017,7 @@
           <a:p>
             <a:fld id="{6E352906-D548-4D17-8848-0C5DDA2AFE35}" type="datetimeFigureOut">
               <a:rPr lang="en-US" smtClean="0"/>
-              <a:t>3/11/2025</a:t>
+              <a:t>4/1/2025</a:t>
             </a:fld>
             <a:endParaRPr lang="en-US"/>
           </a:p>
@@ -1667,7 +3215,7 @@
           <a:p>
             <a:fld id="{6E352906-D548-4D17-8848-0C5DDA2AFE35}" type="datetimeFigureOut">
               <a:rPr lang="en-US" smtClean="0"/>
-              <a:t>3/11/2025</a:t>
+              <a:t>4/1/2025</a:t>
             </a:fld>
             <a:endParaRPr lang="en-US"/>
           </a:p>
@@ -1875,7 +3423,7 @@
           <a:p>
             <a:fld id="{6E352906-D548-4D17-8848-0C5DDA2AFE35}" type="datetimeFigureOut">
               <a:rPr lang="en-US" smtClean="0"/>
-              <a:t>3/11/2025</a:t>
+              <a:t>4/1/2025</a:t>
             </a:fld>
             <a:endParaRPr lang="en-US"/>
           </a:p>
@@ -2073,7 +3621,7 @@
           <a:p>
             <a:fld id="{6E352906-D548-4D17-8848-0C5DDA2AFE35}" type="datetimeFigureOut">
               <a:rPr lang="en-US" smtClean="0"/>
-              <a:t>3/11/2025</a:t>
+              <a:t>4/1/2025</a:t>
             </a:fld>
             <a:endParaRPr lang="en-US"/>
           </a:p>
@@ -2348,7 +3896,7 @@
           <a:p>
             <a:fld id="{6E352906-D548-4D17-8848-0C5DDA2AFE35}" type="datetimeFigureOut">
               <a:rPr lang="en-US" smtClean="0"/>
-              <a:t>3/11/2025</a:t>
+              <a:t>4/1/2025</a:t>
             </a:fld>
             <a:endParaRPr lang="en-US"/>
           </a:p>
@@ -2613,7 +4161,7 @@
           <a:p>
             <a:fld id="{6E352906-D548-4D17-8848-0C5DDA2AFE35}" type="datetimeFigureOut">
               <a:rPr lang="en-US" smtClean="0"/>
-              <a:t>3/11/2025</a:t>
+              <a:t>4/1/2025</a:t>
             </a:fld>
             <a:endParaRPr lang="en-US"/>
           </a:p>
@@ -3025,7 +4573,7 @@
           <a:p>
             <a:fld id="{6E352906-D548-4D17-8848-0C5DDA2AFE35}" type="datetimeFigureOut">
               <a:rPr lang="en-US" smtClean="0"/>
-              <a:t>3/11/2025</a:t>
+              <a:t>4/1/2025</a:t>
             </a:fld>
             <a:endParaRPr lang="en-US"/>
           </a:p>
@@ -3166,7 +4714,7 @@
           <a:p>
             <a:fld id="{6E352906-D548-4D17-8848-0C5DDA2AFE35}" type="datetimeFigureOut">
               <a:rPr lang="en-US" smtClean="0"/>
-              <a:t>3/11/2025</a:t>
+              <a:t>4/1/2025</a:t>
             </a:fld>
             <a:endParaRPr lang="en-US"/>
           </a:p>
@@ -3279,7 +4827,7 @@
           <a:p>
             <a:fld id="{6E352906-D548-4D17-8848-0C5DDA2AFE35}" type="datetimeFigureOut">
               <a:rPr lang="en-US" smtClean="0"/>
-              <a:t>3/11/2025</a:t>
+              <a:t>4/1/2025</a:t>
             </a:fld>
             <a:endParaRPr lang="en-US"/>
           </a:p>
@@ -3590,7 +5138,7 @@
           <a:p>
             <a:fld id="{6E352906-D548-4D17-8848-0C5DDA2AFE35}" type="datetimeFigureOut">
               <a:rPr lang="en-US" smtClean="0"/>
-              <a:t>3/11/2025</a:t>
+              <a:t>4/1/2025</a:t>
             </a:fld>
             <a:endParaRPr lang="en-US"/>
           </a:p>
@@ -3878,7 +5426,7 @@
           <a:p>
             <a:fld id="{6E352906-D548-4D17-8848-0C5DDA2AFE35}" type="datetimeFigureOut">
               <a:rPr lang="en-US" smtClean="0"/>
-              <a:t>3/11/2025</a:t>
+              <a:t>4/1/2025</a:t>
             </a:fld>
             <a:endParaRPr lang="en-US"/>
           </a:p>
@@ -4119,7 +5667,7 @@
           <a:p>
             <a:fld id="{6E352906-D548-4D17-8848-0C5DDA2AFE35}" type="datetimeFigureOut">
               <a:rPr lang="en-US" smtClean="0"/>
-              <a:t>3/11/2025</a:t>
+              <a:t>4/1/2025</a:t>
             </a:fld>
             <a:endParaRPr lang="en-US"/>
           </a:p>
@@ -4625,7 +6173,7 @@
           <p:cNvPr id="2" name="Picture 1">
             <a:extLst>
               <a:ext uri="{FF2B5EF4-FFF2-40B4-BE49-F238E27FC236}">
-                <a16:creationId xmlns:a16="http://schemas.microsoft.com/office/drawing/2014/main" id="{C1010345-E88A-3D4D-7EEF-128893B385E4}"/>
+                <a16:creationId xmlns:a16="http://schemas.microsoft.com/office/drawing/2014/main" id="{4C1EAA87-9E8C-A954-61B6-E44EDB570F56}"/>
               </a:ext>
             </a:extLst>
           </p:cNvPr>
@@ -4635,15 +6183,20 @@
           <p:nvPr/>
         </p:nvPicPr>
         <p:blipFill>
-          <a:blip r:embed="rId2"/>
-          <a:stretch>
-            <a:fillRect/>
-          </a:stretch>
+          <a:blip r:embed="rId3">
+            <a:extLst>
+              <a:ext uri="{28A0092B-C50C-407E-A947-70E740481C1C}">
+                <a14:useLocalDpi xmlns:a14="http://schemas.microsoft.com/office/drawing/2010/main" val="0"/>
+              </a:ext>
+            </a:extLst>
+          </a:blip>
+          <a:srcRect/>
+          <a:stretch/>
         </p:blipFill>
         <p:spPr>
           <a:xfrm>
-            <a:off x="651216" y="0"/>
-            <a:ext cx="10889568" cy="6858000"/>
+            <a:off x="223150" y="392753"/>
+            <a:ext cx="11745700" cy="6072494"/>
           </a:xfrm>
           <a:prstGeom prst="rect">
             <a:avLst/>
@@ -4653,7 +6206,7 @@
     </p:spTree>
     <p:extLst>
       <p:ext uri="{BB962C8B-B14F-4D97-AF65-F5344CB8AC3E}">
-        <p14:creationId xmlns:p14="http://schemas.microsoft.com/office/powerpoint/2010/main" val="3400665824"/>
+        <p14:creationId xmlns:p14="http://schemas.microsoft.com/office/powerpoint/2010/main" val="3309135196"/>
       </p:ext>
     </p:extLst>
   </p:cSld>
@@ -4682,10 +6235,159 @@
       </p:grpSpPr>
       <p:pic>
         <p:nvPicPr>
-          <p:cNvPr id="5" name="Picture 4">
+          <p:cNvPr id="2" name="Picture 1">
             <a:extLst>
               <a:ext uri="{FF2B5EF4-FFF2-40B4-BE49-F238E27FC236}">
-                <a16:creationId xmlns:a16="http://schemas.microsoft.com/office/drawing/2014/main" id="{E1A46BD3-894E-2C8F-DFE9-1554DB0F9A99}"/>
+                <a16:creationId xmlns:a16="http://schemas.microsoft.com/office/drawing/2014/main" id="{B40C30F4-1CD0-11A3-2728-1FCD2CC8D748}"/>
+              </a:ext>
+            </a:extLst>
+          </p:cNvPr>
+          <p:cNvPicPr>
+            <a:picLocks noChangeAspect="1"/>
+          </p:cNvPicPr>
+          <p:nvPr/>
+        </p:nvPicPr>
+        <p:blipFill>
+          <a:blip r:embed="rId3">
+            <a:extLst>
+              <a:ext uri="{28A0092B-C50C-407E-A947-70E740481C1C}">
+                <a14:useLocalDpi xmlns:a14="http://schemas.microsoft.com/office/drawing/2010/main" val="0"/>
+              </a:ext>
+            </a:extLst>
+          </a:blip>
+          <a:srcRect/>
+          <a:stretch/>
+        </p:blipFill>
+        <p:spPr>
+          <a:xfrm>
+            <a:off x="971268" y="779528"/>
+            <a:ext cx="10249464" cy="5298944"/>
+          </a:xfrm>
+          <a:prstGeom prst="rect">
+            <a:avLst/>
+          </a:prstGeom>
+        </p:spPr>
+      </p:pic>
+    </p:spTree>
+    <p:extLst>
+      <p:ext uri="{BB962C8B-B14F-4D97-AF65-F5344CB8AC3E}">
+        <p14:creationId xmlns:p14="http://schemas.microsoft.com/office/powerpoint/2010/main" val="624012253"/>
+      </p:ext>
+    </p:extLst>
+  </p:cSld>
+  <p:clrMapOvr>
+    <a:masterClrMapping/>
+  </p:clrMapOvr>
+</p:sld>
+</file>
+
+<file path=ppt/slides/slide12.xml><?xml version="1.0" encoding="utf-8"?>
+<p:sld xmlns:a="http://schemas.openxmlformats.org/drawingml/2006/main" xmlns:r="http://schemas.openxmlformats.org/officeDocument/2006/relationships" xmlns:p="http://schemas.openxmlformats.org/presentationml/2006/main">
+  <p:cSld>
+    <p:spTree>
+      <p:nvGrpSpPr>
+        <p:cNvPr id="1" name=""/>
+        <p:cNvGrpSpPr/>
+        <p:nvPr/>
+      </p:nvGrpSpPr>
+      <p:grpSpPr>
+        <a:xfrm>
+          <a:off x="0" y="0"/>
+          <a:ext cx="0" cy="0"/>
+          <a:chOff x="0" y="0"/>
+          <a:chExt cx="0" cy="0"/>
+        </a:xfrm>
+      </p:grpSpPr>
+      <p:sp>
+        <p:nvSpPr>
+          <p:cNvPr id="2" name="Title 1">
+            <a:extLst>
+              <a:ext uri="{FF2B5EF4-FFF2-40B4-BE49-F238E27FC236}">
+                <a16:creationId xmlns:a16="http://schemas.microsoft.com/office/drawing/2014/main" id="{4EBD8E55-BBB8-0018-2052-A58FC50F2B1A}"/>
+              </a:ext>
+            </a:extLst>
+          </p:cNvPr>
+          <p:cNvSpPr>
+            <a:spLocks noGrp="1"/>
+          </p:cNvSpPr>
+          <p:nvPr>
+            <p:ph type="title"/>
+          </p:nvPr>
+        </p:nvSpPr>
+        <p:spPr/>
+        <p:txBody>
+          <a:bodyPr/>
+          <a:lstStyle/>
+          <a:p>
+            <a:r>
+              <a:rPr lang="nl-BE" dirty="0" err="1"/>
+              <a:t>Macro_WAT</a:t>
+            </a:r>
+            <a:endParaRPr lang="en-US" dirty="0"/>
+          </a:p>
+        </p:txBody>
+      </p:sp>
+      <p:sp>
+        <p:nvSpPr>
+          <p:cNvPr id="3" name="Text Placeholder 2">
+            <a:extLst>
+              <a:ext uri="{FF2B5EF4-FFF2-40B4-BE49-F238E27FC236}">
+                <a16:creationId xmlns:a16="http://schemas.microsoft.com/office/drawing/2014/main" id="{C47C39F4-C682-6248-24BE-BED55C1ED1BA}"/>
+              </a:ext>
+            </a:extLst>
+          </p:cNvPr>
+          <p:cNvSpPr>
+            <a:spLocks noGrp="1"/>
+          </p:cNvSpPr>
+          <p:nvPr>
+            <p:ph type="body" idx="1"/>
+          </p:nvPr>
+        </p:nvSpPr>
+        <p:spPr/>
+        <p:txBody>
+          <a:bodyPr/>
+          <a:lstStyle/>
+          <a:p>
+            <a:endParaRPr lang="en-US"/>
+          </a:p>
+        </p:txBody>
+      </p:sp>
+    </p:spTree>
+    <p:extLst>
+      <p:ext uri="{BB962C8B-B14F-4D97-AF65-F5344CB8AC3E}">
+        <p14:creationId xmlns:p14="http://schemas.microsoft.com/office/powerpoint/2010/main" val="1797133414"/>
+      </p:ext>
+    </p:extLst>
+  </p:cSld>
+  <p:clrMapOvr>
+    <a:masterClrMapping/>
+  </p:clrMapOvr>
+</p:sld>
+</file>
+
+<file path=ppt/slides/slide13.xml><?xml version="1.0" encoding="utf-8"?>
+<p:sld xmlns:a="http://schemas.openxmlformats.org/drawingml/2006/main" xmlns:r="http://schemas.openxmlformats.org/officeDocument/2006/relationships" xmlns:p="http://schemas.openxmlformats.org/presentationml/2006/main">
+  <p:cSld>
+    <p:spTree>
+      <p:nvGrpSpPr>
+        <p:cNvPr id="1" name=""/>
+        <p:cNvGrpSpPr/>
+        <p:nvPr/>
+      </p:nvGrpSpPr>
+      <p:grpSpPr>
+        <a:xfrm>
+          <a:off x="0" y="0"/>
+          <a:ext cx="0" cy="0"/>
+          <a:chOff x="0" y="0"/>
+          <a:chExt cx="0" cy="0"/>
+        </a:xfrm>
+      </p:grpSpPr>
+      <p:pic>
+        <p:nvPicPr>
+          <p:cNvPr id="2" name="Picture 1">
+            <a:extLst>
+              <a:ext uri="{FF2B5EF4-FFF2-40B4-BE49-F238E27FC236}">
+                <a16:creationId xmlns:a16="http://schemas.microsoft.com/office/drawing/2014/main" id="{72EFDD4A-887F-243B-5E13-24F379D722DD}"/>
               </a:ext>
             </a:extLst>
           </p:cNvPr>
@@ -4702,8 +6404,188 @@
         </p:blipFill>
         <p:spPr>
           <a:xfrm>
-            <a:off x="0" y="2629592"/>
-            <a:ext cx="12192000" cy="1598816"/>
+            <a:off x="0" y="-564721"/>
+            <a:ext cx="12192000" cy="6463442"/>
+          </a:xfrm>
+          <a:prstGeom prst="rect">
+            <a:avLst/>
+          </a:prstGeom>
+        </p:spPr>
+      </p:pic>
+    </p:spTree>
+    <p:extLst>
+      <p:ext uri="{BB962C8B-B14F-4D97-AF65-F5344CB8AC3E}">
+        <p14:creationId xmlns:p14="http://schemas.microsoft.com/office/powerpoint/2010/main" val="4154828214"/>
+      </p:ext>
+    </p:extLst>
+  </p:cSld>
+  <p:clrMapOvr>
+    <a:masterClrMapping/>
+  </p:clrMapOvr>
+</p:sld>
+</file>
+
+<file path=ppt/slides/slide14.xml><?xml version="1.0" encoding="utf-8"?>
+<p:sld xmlns:a="http://schemas.openxmlformats.org/drawingml/2006/main" xmlns:r="http://schemas.openxmlformats.org/officeDocument/2006/relationships" xmlns:p="http://schemas.openxmlformats.org/presentationml/2006/main">
+  <p:cSld>
+    <p:spTree>
+      <p:nvGrpSpPr>
+        <p:cNvPr id="1" name=""/>
+        <p:cNvGrpSpPr/>
+        <p:nvPr/>
+      </p:nvGrpSpPr>
+      <p:grpSpPr>
+        <a:xfrm>
+          <a:off x="0" y="0"/>
+          <a:ext cx="0" cy="0"/>
+          <a:chOff x="0" y="0"/>
+          <a:chExt cx="0" cy="0"/>
+        </a:xfrm>
+      </p:grpSpPr>
+      <p:pic>
+        <p:nvPicPr>
+          <p:cNvPr id="2" name="Picture 1">
+            <a:extLst>
+              <a:ext uri="{FF2B5EF4-FFF2-40B4-BE49-F238E27FC236}">
+                <a16:creationId xmlns:a16="http://schemas.microsoft.com/office/drawing/2014/main" id="{1E78AD4F-CA12-DC71-DDC1-920BB16329EF}"/>
+              </a:ext>
+            </a:extLst>
+          </p:cNvPr>
+          <p:cNvPicPr>
+            <a:picLocks noChangeAspect="1"/>
+          </p:cNvPicPr>
+          <p:nvPr/>
+        </p:nvPicPr>
+        <p:blipFill>
+          <a:blip r:embed="rId2"/>
+          <a:stretch>
+            <a:fillRect/>
+          </a:stretch>
+        </p:blipFill>
+        <p:spPr>
+          <a:xfrm>
+            <a:off x="729038" y="0"/>
+            <a:ext cx="10889568" cy="6858000"/>
+          </a:xfrm>
+          <a:prstGeom prst="rect">
+            <a:avLst/>
+          </a:prstGeom>
+        </p:spPr>
+      </p:pic>
+    </p:spTree>
+    <p:extLst>
+      <p:ext uri="{BB962C8B-B14F-4D97-AF65-F5344CB8AC3E}">
+        <p14:creationId xmlns:p14="http://schemas.microsoft.com/office/powerpoint/2010/main" val="556799258"/>
+      </p:ext>
+    </p:extLst>
+  </p:cSld>
+  <p:clrMapOvr>
+    <a:masterClrMapping/>
+  </p:clrMapOvr>
+</p:sld>
+</file>
+
+<file path=ppt/slides/slide15.xml><?xml version="1.0" encoding="utf-8"?>
+<p:sld xmlns:a="http://schemas.openxmlformats.org/drawingml/2006/main" xmlns:r="http://schemas.openxmlformats.org/officeDocument/2006/relationships" xmlns:p="http://schemas.openxmlformats.org/presentationml/2006/main">
+  <p:cSld>
+    <p:spTree>
+      <p:nvGrpSpPr>
+        <p:cNvPr id="1" name=""/>
+        <p:cNvGrpSpPr/>
+        <p:nvPr/>
+      </p:nvGrpSpPr>
+      <p:grpSpPr>
+        <a:xfrm>
+          <a:off x="0" y="0"/>
+          <a:ext cx="0" cy="0"/>
+          <a:chOff x="0" y="0"/>
+          <a:chExt cx="0" cy="0"/>
+        </a:xfrm>
+      </p:grpSpPr>
+      <p:pic>
+        <p:nvPicPr>
+          <p:cNvPr id="2" name="Picture 1">
+            <a:extLst>
+              <a:ext uri="{FF2B5EF4-FFF2-40B4-BE49-F238E27FC236}">
+                <a16:creationId xmlns:a16="http://schemas.microsoft.com/office/drawing/2014/main" id="{457D987D-05E7-0BA5-03F0-7904AAB24BE2}"/>
+              </a:ext>
+            </a:extLst>
+          </p:cNvPr>
+          <p:cNvPicPr>
+            <a:picLocks noChangeAspect="1"/>
+          </p:cNvPicPr>
+          <p:nvPr/>
+        </p:nvPicPr>
+        <p:blipFill>
+          <a:blip r:embed="rId2"/>
+          <a:stretch>
+            <a:fillRect/>
+          </a:stretch>
+        </p:blipFill>
+        <p:spPr>
+          <a:xfrm>
+            <a:off x="323067" y="0"/>
+            <a:ext cx="11545866" cy="6858000"/>
+          </a:xfrm>
+          <a:prstGeom prst="rect">
+            <a:avLst/>
+          </a:prstGeom>
+        </p:spPr>
+      </p:pic>
+    </p:spTree>
+    <p:extLst>
+      <p:ext uri="{BB962C8B-B14F-4D97-AF65-F5344CB8AC3E}">
+        <p14:creationId xmlns:p14="http://schemas.microsoft.com/office/powerpoint/2010/main" val="3525278037"/>
+      </p:ext>
+    </p:extLst>
+  </p:cSld>
+  <p:clrMapOvr>
+    <a:masterClrMapping/>
+  </p:clrMapOvr>
+</p:sld>
+</file>
+
+<file path=ppt/slides/slide16.xml><?xml version="1.0" encoding="utf-8"?>
+<p:sld xmlns:a="http://schemas.openxmlformats.org/drawingml/2006/main" xmlns:r="http://schemas.openxmlformats.org/officeDocument/2006/relationships" xmlns:p="http://schemas.openxmlformats.org/presentationml/2006/main">
+  <p:cSld>
+    <p:spTree>
+      <p:nvGrpSpPr>
+        <p:cNvPr id="1" name=""/>
+        <p:cNvGrpSpPr/>
+        <p:nvPr/>
+      </p:nvGrpSpPr>
+      <p:grpSpPr>
+        <a:xfrm>
+          <a:off x="0" y="0"/>
+          <a:ext cx="0" cy="0"/>
+          <a:chOff x="0" y="0"/>
+          <a:chExt cx="0" cy="0"/>
+        </a:xfrm>
+      </p:grpSpPr>
+      <p:pic>
+        <p:nvPicPr>
+          <p:cNvPr id="2" name="Picture 1">
+            <a:extLst>
+              <a:ext uri="{FF2B5EF4-FFF2-40B4-BE49-F238E27FC236}">
+                <a16:creationId xmlns:a16="http://schemas.microsoft.com/office/drawing/2014/main" id="{41544A76-1C86-67DA-7532-3D2F7574200A}"/>
+              </a:ext>
+            </a:extLst>
+          </p:cNvPr>
+          <p:cNvPicPr>
+            <a:picLocks noChangeAspect="1"/>
+          </p:cNvPicPr>
+          <p:nvPr/>
+        </p:nvPicPr>
+        <p:blipFill>
+          <a:blip r:embed="rId3"/>
+          <a:stretch>
+            <a:fillRect/>
+          </a:stretch>
+        </p:blipFill>
+        <p:spPr>
+          <a:xfrm>
+            <a:off x="242887" y="3361267"/>
+            <a:ext cx="11706225" cy="1358370"/>
           </a:xfrm>
           <a:prstGeom prst="rect">
             <a:avLst/>
@@ -4723,7 +6605,127 @@
 </p:sld>
 </file>
 
-<file path=ppt/slides/slide12.xml><?xml version="1.0" encoding="utf-8"?>
+<file path=ppt/slides/slide17.xml><?xml version="1.0" encoding="utf-8"?>
+<p:sld xmlns:a="http://schemas.openxmlformats.org/drawingml/2006/main" xmlns:r="http://schemas.openxmlformats.org/officeDocument/2006/relationships" xmlns:p="http://schemas.openxmlformats.org/presentationml/2006/main">
+  <p:cSld>
+    <p:spTree>
+      <p:nvGrpSpPr>
+        <p:cNvPr id="1" name=""/>
+        <p:cNvGrpSpPr/>
+        <p:nvPr/>
+      </p:nvGrpSpPr>
+      <p:grpSpPr>
+        <a:xfrm>
+          <a:off x="0" y="0"/>
+          <a:ext cx="0" cy="0"/>
+          <a:chOff x="0" y="0"/>
+          <a:chExt cx="0" cy="0"/>
+        </a:xfrm>
+      </p:grpSpPr>
+      <p:pic>
+        <p:nvPicPr>
+          <p:cNvPr id="3" name="Picture 2">
+            <a:extLst>
+              <a:ext uri="{FF2B5EF4-FFF2-40B4-BE49-F238E27FC236}">
+                <a16:creationId xmlns:a16="http://schemas.microsoft.com/office/drawing/2014/main" id="{532CB25F-AACA-D704-6864-F7592B4D0D87}"/>
+              </a:ext>
+            </a:extLst>
+          </p:cNvPr>
+          <p:cNvPicPr>
+            <a:picLocks noChangeAspect="1"/>
+          </p:cNvPicPr>
+          <p:nvPr/>
+        </p:nvPicPr>
+        <p:blipFill>
+          <a:blip r:embed="rId2"/>
+          <a:stretch>
+            <a:fillRect/>
+          </a:stretch>
+        </p:blipFill>
+        <p:spPr>
+          <a:xfrm>
+            <a:off x="0" y="477962"/>
+            <a:ext cx="12192000" cy="5902075"/>
+          </a:xfrm>
+          <a:prstGeom prst="rect">
+            <a:avLst/>
+          </a:prstGeom>
+        </p:spPr>
+      </p:pic>
+    </p:spTree>
+    <p:extLst>
+      <p:ext uri="{BB962C8B-B14F-4D97-AF65-F5344CB8AC3E}">
+        <p14:creationId xmlns:p14="http://schemas.microsoft.com/office/powerpoint/2010/main" val="3400665824"/>
+      </p:ext>
+    </p:extLst>
+  </p:cSld>
+  <p:clrMapOvr>
+    <a:masterClrMapping/>
+  </p:clrMapOvr>
+</p:sld>
+</file>
+
+<file path=ppt/slides/slide18.xml><?xml version="1.0" encoding="utf-8"?>
+<p:sld xmlns:a="http://schemas.openxmlformats.org/drawingml/2006/main" xmlns:r="http://schemas.openxmlformats.org/officeDocument/2006/relationships" xmlns:p="http://schemas.openxmlformats.org/presentationml/2006/main">
+  <p:cSld>
+    <p:spTree>
+      <p:nvGrpSpPr>
+        <p:cNvPr id="1" name=""/>
+        <p:cNvGrpSpPr/>
+        <p:nvPr/>
+      </p:nvGrpSpPr>
+      <p:grpSpPr>
+        <a:xfrm>
+          <a:off x="0" y="0"/>
+          <a:ext cx="0" cy="0"/>
+          <a:chOff x="0" y="0"/>
+          <a:chExt cx="0" cy="0"/>
+        </a:xfrm>
+      </p:grpSpPr>
+      <p:pic>
+        <p:nvPicPr>
+          <p:cNvPr id="2" name="Picture 1">
+            <a:extLst>
+              <a:ext uri="{FF2B5EF4-FFF2-40B4-BE49-F238E27FC236}">
+                <a16:creationId xmlns:a16="http://schemas.microsoft.com/office/drawing/2014/main" id="{FA5328C9-A0BC-1AC5-9004-5E23F2161BF0}"/>
+              </a:ext>
+            </a:extLst>
+          </p:cNvPr>
+          <p:cNvPicPr>
+            <a:picLocks noChangeAspect="1"/>
+          </p:cNvPicPr>
+          <p:nvPr/>
+        </p:nvPicPr>
+        <p:blipFill>
+          <a:blip r:embed="rId2"/>
+          <a:stretch>
+            <a:fillRect/>
+          </a:stretch>
+        </p:blipFill>
+        <p:spPr>
+          <a:xfrm>
+            <a:off x="0" y="2202211"/>
+            <a:ext cx="12192000" cy="2453577"/>
+          </a:xfrm>
+          <a:prstGeom prst="rect">
+            <a:avLst/>
+          </a:prstGeom>
+        </p:spPr>
+      </p:pic>
+    </p:spTree>
+    <p:extLst>
+      <p:ext uri="{BB962C8B-B14F-4D97-AF65-F5344CB8AC3E}">
+        <p14:creationId xmlns:p14="http://schemas.microsoft.com/office/powerpoint/2010/main" val="2122976636"/>
+      </p:ext>
+    </p:extLst>
+  </p:cSld>
+  <p:clrMapOvr>
+    <a:masterClrMapping/>
+  </p:clrMapOvr>
+</p:sld>
+</file>
+
+<file path=ppt/slides/slide19.xml><?xml version="1.0" encoding="utf-8"?>
 <p:sld xmlns:a="http://schemas.openxmlformats.org/drawingml/2006/main" xmlns:r="http://schemas.openxmlformats.org/officeDocument/2006/relationships" xmlns:p="http://schemas.openxmlformats.org/presentationml/2006/main">
   <p:cSld>
     <p:spTree>
@@ -5547,7 +7549,724 @@
 </p:sld>
 </file>
 
-<file path=ppt/slides/slide13.xml><?xml version="1.0" encoding="utf-8"?>
+<file path=ppt/slides/slide2.xml><?xml version="1.0" encoding="utf-8"?>
+<p:sld xmlns:a="http://schemas.openxmlformats.org/drawingml/2006/main" xmlns:r="http://schemas.openxmlformats.org/officeDocument/2006/relationships" xmlns:p="http://schemas.openxmlformats.org/presentationml/2006/main">
+  <p:cSld>
+    <p:spTree>
+      <p:nvGrpSpPr>
+        <p:cNvPr id="1" name="">
+          <a:extLst>
+            <a:ext uri="{FF2B5EF4-FFF2-40B4-BE49-F238E27FC236}">
+              <a16:creationId xmlns:a16="http://schemas.microsoft.com/office/drawing/2014/main" id="{D1D64BEB-5CCB-EBCE-89D8-81E654E43C21}"/>
+            </a:ext>
+          </a:extLst>
+        </p:cNvPr>
+        <p:cNvGrpSpPr/>
+        <p:nvPr/>
+      </p:nvGrpSpPr>
+      <p:grpSpPr>
+        <a:xfrm>
+          <a:off x="0" y="0"/>
+          <a:ext cx="0" cy="0"/>
+          <a:chOff x="0" y="0"/>
+          <a:chExt cx="0" cy="0"/>
+        </a:xfrm>
+      </p:grpSpPr>
+      <p:grpSp>
+        <p:nvGrpSpPr>
+          <p:cNvPr id="19" name="Group 18">
+            <a:extLst>
+              <a:ext uri="{FF2B5EF4-FFF2-40B4-BE49-F238E27FC236}">
+                <a16:creationId xmlns:a16="http://schemas.microsoft.com/office/drawing/2014/main" id="{99FF79C4-9561-E029-DEC6-16CEE08632F6}"/>
+              </a:ext>
+            </a:extLst>
+          </p:cNvPr>
+          <p:cNvGrpSpPr/>
+          <p:nvPr/>
+        </p:nvGrpSpPr>
+        <p:grpSpPr>
+          <a:xfrm>
+            <a:off x="400454" y="-291697"/>
+            <a:ext cx="11375881" cy="6384219"/>
+            <a:chOff x="400454" y="-291697"/>
+            <a:chExt cx="11375881" cy="6384219"/>
+          </a:xfrm>
+        </p:grpSpPr>
+        <p:pic>
+          <p:nvPicPr>
+            <p:cNvPr id="2" name="Picture 1">
+              <a:extLst>
+                <a:ext uri="{FF2B5EF4-FFF2-40B4-BE49-F238E27FC236}">
+                  <a16:creationId xmlns:a16="http://schemas.microsoft.com/office/drawing/2014/main" id="{BC07511B-8DE3-067E-91B6-CDCC0416C99C}"/>
+                </a:ext>
+              </a:extLst>
+            </p:cNvPr>
+            <p:cNvPicPr>
+              <a:picLocks noChangeAspect="1"/>
+            </p:cNvPicPr>
+            <p:nvPr/>
+          </p:nvPicPr>
+          <p:blipFill>
+            <a:blip r:embed="rId2">
+              <a:extLst>
+                <a:ext uri="{28A0092B-C50C-407E-A947-70E740481C1C}">
+                  <a14:useLocalDpi xmlns:a14="http://schemas.microsoft.com/office/drawing/2010/main" val="0"/>
+                </a:ext>
+              </a:extLst>
+            </a:blip>
+            <a:srcRect/>
+            <a:stretch/>
+          </p:blipFill>
+          <p:spPr>
+            <a:xfrm>
+              <a:off x="400454" y="-291697"/>
+              <a:ext cx="11068456" cy="5996134"/>
+            </a:xfrm>
+            <a:prstGeom prst="rect">
+              <a:avLst/>
+            </a:prstGeom>
+          </p:spPr>
+        </p:pic>
+        <p:sp>
+          <p:nvSpPr>
+            <p:cNvPr id="3" name="TextBox 2">
+              <a:extLst>
+                <a:ext uri="{FF2B5EF4-FFF2-40B4-BE49-F238E27FC236}">
+                  <a16:creationId xmlns:a16="http://schemas.microsoft.com/office/drawing/2014/main" id="{B11E4FB1-959C-0F56-5D0E-7BDEA321F253}"/>
+                </a:ext>
+              </a:extLst>
+            </p:cNvPr>
+            <p:cNvSpPr txBox="1"/>
+            <p:nvPr/>
+          </p:nvSpPr>
+          <p:spPr>
+            <a:xfrm>
+              <a:off x="1230246" y="5688888"/>
+              <a:ext cx="1855959" cy="369332"/>
+            </a:xfrm>
+            <a:prstGeom prst="rect">
+              <a:avLst/>
+            </a:prstGeom>
+            <a:noFill/>
+          </p:spPr>
+          <p:txBody>
+            <a:bodyPr wrap="square" rtlCol="0">
+              <a:spAutoFit/>
+            </a:bodyPr>
+            <a:lstStyle/>
+            <a:p>
+              <a:pPr algn="ctr"/>
+              <a:r>
+                <a:rPr lang="nl-BE" dirty="0"/>
+                <a:t>Cluster 3</a:t>
+              </a:r>
+              <a:endParaRPr lang="en-US" dirty="0"/>
+            </a:p>
+          </p:txBody>
+        </p:sp>
+        <p:sp>
+          <p:nvSpPr>
+            <p:cNvPr id="4" name="TextBox 3">
+              <a:extLst>
+                <a:ext uri="{FF2B5EF4-FFF2-40B4-BE49-F238E27FC236}">
+                  <a16:creationId xmlns:a16="http://schemas.microsoft.com/office/drawing/2014/main" id="{4DA57C90-B997-7B1D-A8C2-B81EB8D76D54}"/>
+                </a:ext>
+              </a:extLst>
+            </p:cNvPr>
+            <p:cNvSpPr txBox="1"/>
+            <p:nvPr/>
+          </p:nvSpPr>
+          <p:spPr>
+            <a:xfrm>
+              <a:off x="9920376" y="5723190"/>
+              <a:ext cx="1855959" cy="369332"/>
+            </a:xfrm>
+            <a:prstGeom prst="rect">
+              <a:avLst/>
+            </a:prstGeom>
+            <a:noFill/>
+          </p:spPr>
+          <p:txBody>
+            <a:bodyPr wrap="square" rtlCol="0">
+              <a:spAutoFit/>
+            </a:bodyPr>
+            <a:lstStyle/>
+            <a:p>
+              <a:pPr algn="ctr"/>
+              <a:r>
+                <a:rPr lang="nl-BE" dirty="0"/>
+                <a:t>Cluster 2</a:t>
+              </a:r>
+              <a:endParaRPr lang="en-US" dirty="0"/>
+            </a:p>
+          </p:txBody>
+        </p:sp>
+        <p:sp>
+          <p:nvSpPr>
+            <p:cNvPr id="5" name="TextBox 4">
+              <a:extLst>
+                <a:ext uri="{FF2B5EF4-FFF2-40B4-BE49-F238E27FC236}">
+                  <a16:creationId xmlns:a16="http://schemas.microsoft.com/office/drawing/2014/main" id="{57DFCC00-AE50-143D-1DE0-F662B6401501}"/>
+                </a:ext>
+              </a:extLst>
+            </p:cNvPr>
+            <p:cNvSpPr txBox="1"/>
+            <p:nvPr/>
+          </p:nvSpPr>
+          <p:spPr>
+            <a:xfrm>
+              <a:off x="3472774" y="5692431"/>
+              <a:ext cx="7120648" cy="369332"/>
+            </a:xfrm>
+            <a:prstGeom prst="rect">
+              <a:avLst/>
+            </a:prstGeom>
+            <a:noFill/>
+          </p:spPr>
+          <p:txBody>
+            <a:bodyPr wrap="square" rtlCol="0">
+              <a:spAutoFit/>
+            </a:bodyPr>
+            <a:lstStyle/>
+            <a:p>
+              <a:pPr algn="ctr"/>
+              <a:r>
+                <a:rPr lang="nl-BE" dirty="0"/>
+                <a:t>Cluster 1</a:t>
+              </a:r>
+              <a:endParaRPr lang="en-US" dirty="0"/>
+            </a:p>
+          </p:txBody>
+        </p:sp>
+        <p:sp>
+          <p:nvSpPr>
+            <p:cNvPr id="10" name="TextBox 9">
+              <a:extLst>
+                <a:ext uri="{FF2B5EF4-FFF2-40B4-BE49-F238E27FC236}">
+                  <a16:creationId xmlns:a16="http://schemas.microsoft.com/office/drawing/2014/main" id="{C8EC8BB4-7EE5-5738-6D78-7E8AAA134122}"/>
+                </a:ext>
+              </a:extLst>
+            </p:cNvPr>
+            <p:cNvSpPr txBox="1"/>
+            <p:nvPr/>
+          </p:nvSpPr>
+          <p:spPr>
+            <a:xfrm>
+              <a:off x="2161468" y="3880282"/>
+              <a:ext cx="2544024" cy="276999"/>
+            </a:xfrm>
+            <a:prstGeom prst="rect">
+              <a:avLst/>
+            </a:prstGeom>
+            <a:noFill/>
+          </p:spPr>
+          <p:txBody>
+            <a:bodyPr wrap="square" rtlCol="0">
+              <a:spAutoFit/>
+            </a:bodyPr>
+            <a:lstStyle/>
+            <a:p>
+              <a:pPr algn="ctr"/>
+              <a:r>
+                <a:rPr lang="nl-BE" sz="1200" dirty="0" err="1">
+                  <a:solidFill>
+                    <a:schemeClr val="bg1">
+                      <a:lumMod val="50000"/>
+                    </a:schemeClr>
+                  </a:solidFill>
+                </a:rPr>
+                <a:t>Subcluster</a:t>
+              </a:r>
+              <a:r>
+                <a:rPr lang="nl-BE" sz="1200" dirty="0">
+                  <a:solidFill>
+                    <a:schemeClr val="bg1">
+                      <a:lumMod val="50000"/>
+                    </a:schemeClr>
+                  </a:solidFill>
+                </a:rPr>
+                <a:t> 1</a:t>
+              </a:r>
+              <a:endParaRPr lang="en-US" sz="1200" dirty="0">
+                <a:solidFill>
+                  <a:schemeClr val="bg1">
+                    <a:lumMod val="50000"/>
+                  </a:schemeClr>
+                </a:solidFill>
+              </a:endParaRPr>
+            </a:p>
+          </p:txBody>
+        </p:sp>
+        <p:sp>
+          <p:nvSpPr>
+            <p:cNvPr id="11" name="TextBox 10">
+              <a:extLst>
+                <a:ext uri="{FF2B5EF4-FFF2-40B4-BE49-F238E27FC236}">
+                  <a16:creationId xmlns:a16="http://schemas.microsoft.com/office/drawing/2014/main" id="{43EF9C06-C110-BFF5-BB95-A915E7FC5E11}"/>
+                </a:ext>
+              </a:extLst>
+            </p:cNvPr>
+            <p:cNvSpPr txBox="1"/>
+            <p:nvPr/>
+          </p:nvSpPr>
+          <p:spPr>
+            <a:xfrm>
+              <a:off x="3416063" y="4180347"/>
+              <a:ext cx="1050200" cy="276999"/>
+            </a:xfrm>
+            <a:prstGeom prst="rect">
+              <a:avLst/>
+            </a:prstGeom>
+            <a:noFill/>
+          </p:spPr>
+          <p:txBody>
+            <a:bodyPr wrap="square" rtlCol="0">
+              <a:spAutoFit/>
+            </a:bodyPr>
+            <a:lstStyle/>
+            <a:p>
+              <a:pPr algn="ctr"/>
+              <a:r>
+                <a:rPr lang="nl-BE" sz="1200" dirty="0" err="1">
+                  <a:solidFill>
+                    <a:schemeClr val="bg1">
+                      <a:lumMod val="50000"/>
+                    </a:schemeClr>
+                  </a:solidFill>
+                </a:rPr>
+                <a:t>Subcluster</a:t>
+              </a:r>
+              <a:r>
+                <a:rPr lang="nl-BE" sz="1200" dirty="0">
+                  <a:solidFill>
+                    <a:schemeClr val="bg1">
+                      <a:lumMod val="50000"/>
+                    </a:schemeClr>
+                  </a:solidFill>
+                </a:rPr>
+                <a:t> 2</a:t>
+              </a:r>
+              <a:endParaRPr lang="en-US" sz="1200" dirty="0">
+                <a:solidFill>
+                  <a:schemeClr val="bg1">
+                    <a:lumMod val="50000"/>
+                  </a:schemeClr>
+                </a:solidFill>
+              </a:endParaRPr>
+            </a:p>
+          </p:txBody>
+        </p:sp>
+        <p:sp>
+          <p:nvSpPr>
+            <p:cNvPr id="12" name="TextBox 11">
+              <a:extLst>
+                <a:ext uri="{FF2B5EF4-FFF2-40B4-BE49-F238E27FC236}">
+                  <a16:creationId xmlns:a16="http://schemas.microsoft.com/office/drawing/2014/main" id="{44B50A86-7D06-B7CC-9949-92BE57684153}"/>
+                </a:ext>
+              </a:extLst>
+            </p:cNvPr>
+            <p:cNvSpPr txBox="1"/>
+            <p:nvPr/>
+          </p:nvSpPr>
+          <p:spPr>
+            <a:xfrm>
+              <a:off x="3901438" y="4393554"/>
+              <a:ext cx="1383672" cy="276999"/>
+            </a:xfrm>
+            <a:prstGeom prst="rect">
+              <a:avLst/>
+            </a:prstGeom>
+            <a:noFill/>
+          </p:spPr>
+          <p:txBody>
+            <a:bodyPr wrap="square" rtlCol="0">
+              <a:spAutoFit/>
+            </a:bodyPr>
+            <a:lstStyle/>
+            <a:p>
+              <a:pPr algn="ctr"/>
+              <a:r>
+                <a:rPr lang="nl-BE" sz="1200" dirty="0" err="1">
+                  <a:solidFill>
+                    <a:schemeClr val="bg1">
+                      <a:lumMod val="50000"/>
+                    </a:schemeClr>
+                  </a:solidFill>
+                </a:rPr>
+                <a:t>Subcluster</a:t>
+              </a:r>
+              <a:r>
+                <a:rPr lang="nl-BE" sz="1200" dirty="0">
+                  <a:solidFill>
+                    <a:schemeClr val="bg1">
+                      <a:lumMod val="50000"/>
+                    </a:schemeClr>
+                  </a:solidFill>
+                </a:rPr>
+                <a:t> 3</a:t>
+              </a:r>
+              <a:endParaRPr lang="en-US" sz="1200" dirty="0">
+                <a:solidFill>
+                  <a:schemeClr val="bg1">
+                    <a:lumMod val="50000"/>
+                  </a:schemeClr>
+                </a:solidFill>
+              </a:endParaRPr>
+            </a:p>
+          </p:txBody>
+        </p:sp>
+        <p:sp>
+          <p:nvSpPr>
+            <p:cNvPr id="13" name="TextBox 12">
+              <a:extLst>
+                <a:ext uri="{FF2B5EF4-FFF2-40B4-BE49-F238E27FC236}">
+                  <a16:creationId xmlns:a16="http://schemas.microsoft.com/office/drawing/2014/main" id="{F8A88B81-91BF-E28E-E5FE-BA16C3284CD4}"/>
+                </a:ext>
+              </a:extLst>
+            </p:cNvPr>
+            <p:cNvSpPr txBox="1"/>
+            <p:nvPr/>
+          </p:nvSpPr>
+          <p:spPr>
+            <a:xfrm>
+              <a:off x="4428006" y="4427321"/>
+              <a:ext cx="3482502" cy="276999"/>
+            </a:xfrm>
+            <a:prstGeom prst="rect">
+              <a:avLst/>
+            </a:prstGeom>
+            <a:noFill/>
+          </p:spPr>
+          <p:txBody>
+            <a:bodyPr wrap="square" rtlCol="0">
+              <a:spAutoFit/>
+            </a:bodyPr>
+            <a:lstStyle/>
+            <a:p>
+              <a:pPr algn="ctr"/>
+              <a:r>
+                <a:rPr lang="nl-BE" sz="1200" dirty="0" err="1">
+                  <a:solidFill>
+                    <a:schemeClr val="bg1">
+                      <a:lumMod val="50000"/>
+                    </a:schemeClr>
+                  </a:solidFill>
+                </a:rPr>
+                <a:t>Subcluster</a:t>
+              </a:r>
+              <a:r>
+                <a:rPr lang="nl-BE" sz="1200" dirty="0">
+                  <a:solidFill>
+                    <a:schemeClr val="bg1">
+                      <a:lumMod val="50000"/>
+                    </a:schemeClr>
+                  </a:solidFill>
+                </a:rPr>
+                <a:t> 4</a:t>
+              </a:r>
+              <a:endParaRPr lang="en-US" sz="1200" dirty="0">
+                <a:solidFill>
+                  <a:schemeClr val="bg1">
+                    <a:lumMod val="50000"/>
+                  </a:schemeClr>
+                </a:solidFill>
+              </a:endParaRPr>
+            </a:p>
+          </p:txBody>
+        </p:sp>
+        <p:sp>
+          <p:nvSpPr>
+            <p:cNvPr id="14" name="Rectangle 13">
+              <a:extLst>
+                <a:ext uri="{FF2B5EF4-FFF2-40B4-BE49-F238E27FC236}">
+                  <a16:creationId xmlns:a16="http://schemas.microsoft.com/office/drawing/2014/main" id="{3CE9E66F-B40A-9AD7-4B4D-01FDBDF59394}"/>
+                </a:ext>
+              </a:extLst>
+            </p:cNvPr>
+            <p:cNvSpPr/>
+            <p:nvPr/>
+          </p:nvSpPr>
+          <p:spPr>
+            <a:xfrm>
+              <a:off x="1141253" y="3239868"/>
+              <a:ext cx="1748242" cy="2464569"/>
+            </a:xfrm>
+            <a:prstGeom prst="rect">
+              <a:avLst/>
+            </a:prstGeom>
+            <a:noFill/>
+            <a:ln w="19050">
+              <a:solidFill>
+                <a:schemeClr val="tx1"/>
+              </a:solidFill>
+              <a:prstDash val="dash"/>
+            </a:ln>
+          </p:spPr>
+          <p:style>
+            <a:lnRef idx="2">
+              <a:schemeClr val="accent1">
+                <a:shade val="15000"/>
+              </a:schemeClr>
+            </a:lnRef>
+            <a:fillRef idx="1">
+              <a:schemeClr val="accent1"/>
+            </a:fillRef>
+            <a:effectRef idx="0">
+              <a:schemeClr val="accent1"/>
+            </a:effectRef>
+            <a:fontRef idx="minor">
+              <a:schemeClr val="lt1"/>
+            </a:fontRef>
+          </p:style>
+          <p:txBody>
+            <a:bodyPr rtlCol="0" anchor="ctr"/>
+            <a:lstStyle/>
+            <a:p>
+              <a:pPr algn="ctr"/>
+              <a:endParaRPr lang="en-US"/>
+            </a:p>
+          </p:txBody>
+        </p:sp>
+        <p:sp>
+          <p:nvSpPr>
+            <p:cNvPr id="15" name="Rectangle 14">
+              <a:extLst>
+                <a:ext uri="{FF2B5EF4-FFF2-40B4-BE49-F238E27FC236}">
+                  <a16:creationId xmlns:a16="http://schemas.microsoft.com/office/drawing/2014/main" id="{F63E2570-AB7A-4CD1-F501-90F0658E6723}"/>
+                </a:ext>
+              </a:extLst>
+            </p:cNvPr>
+            <p:cNvSpPr/>
+            <p:nvPr/>
+          </p:nvSpPr>
+          <p:spPr>
+            <a:xfrm>
+              <a:off x="10535907" y="3272183"/>
+              <a:ext cx="510409" cy="2464569"/>
+            </a:xfrm>
+            <a:prstGeom prst="rect">
+              <a:avLst/>
+            </a:prstGeom>
+            <a:noFill/>
+            <a:ln w="19050">
+              <a:solidFill>
+                <a:schemeClr val="tx1"/>
+              </a:solidFill>
+              <a:prstDash val="dash"/>
+            </a:ln>
+          </p:spPr>
+          <p:style>
+            <a:lnRef idx="2">
+              <a:schemeClr val="accent1">
+                <a:shade val="15000"/>
+              </a:schemeClr>
+            </a:lnRef>
+            <a:fillRef idx="1">
+              <a:schemeClr val="accent1"/>
+            </a:fillRef>
+            <a:effectRef idx="0">
+              <a:schemeClr val="accent1"/>
+            </a:effectRef>
+            <a:fontRef idx="minor">
+              <a:schemeClr val="lt1"/>
+            </a:fontRef>
+          </p:style>
+          <p:txBody>
+            <a:bodyPr rtlCol="0" anchor="ctr"/>
+            <a:lstStyle/>
+            <a:p>
+              <a:pPr algn="ctr"/>
+              <a:endParaRPr lang="en-US"/>
+            </a:p>
+          </p:txBody>
+        </p:sp>
+        <p:sp>
+          <p:nvSpPr>
+            <p:cNvPr id="16" name="Rectangle 15">
+              <a:extLst>
+                <a:ext uri="{FF2B5EF4-FFF2-40B4-BE49-F238E27FC236}">
+                  <a16:creationId xmlns:a16="http://schemas.microsoft.com/office/drawing/2014/main" id="{981C6DA1-00CF-88C7-DFC0-1D1F895BC1BD}"/>
+                </a:ext>
+              </a:extLst>
+            </p:cNvPr>
+            <p:cNvSpPr/>
+            <p:nvPr/>
+          </p:nvSpPr>
+          <p:spPr>
+            <a:xfrm>
+              <a:off x="2889495" y="3240425"/>
+              <a:ext cx="7646411" cy="2473261"/>
+            </a:xfrm>
+            <a:prstGeom prst="rect">
+              <a:avLst/>
+            </a:prstGeom>
+            <a:noFill/>
+            <a:ln w="19050">
+              <a:solidFill>
+                <a:schemeClr val="tx1"/>
+              </a:solidFill>
+              <a:prstDash val="dash"/>
+            </a:ln>
+          </p:spPr>
+          <p:style>
+            <a:lnRef idx="2">
+              <a:schemeClr val="accent1">
+                <a:shade val="15000"/>
+              </a:schemeClr>
+            </a:lnRef>
+            <a:fillRef idx="1">
+              <a:schemeClr val="accent1"/>
+            </a:fillRef>
+            <a:effectRef idx="0">
+              <a:schemeClr val="accent1"/>
+            </a:effectRef>
+            <a:fontRef idx="minor">
+              <a:schemeClr val="lt1"/>
+            </a:fontRef>
+          </p:style>
+          <p:txBody>
+            <a:bodyPr rtlCol="0" anchor="ctr"/>
+            <a:lstStyle/>
+            <a:p>
+              <a:pPr algn="ctr"/>
+              <a:endParaRPr lang="en-US"/>
+            </a:p>
+          </p:txBody>
+        </p:sp>
+        <p:sp>
+          <p:nvSpPr>
+            <p:cNvPr id="18" name="TextBox 17">
+              <a:extLst>
+                <a:ext uri="{FF2B5EF4-FFF2-40B4-BE49-F238E27FC236}">
+                  <a16:creationId xmlns:a16="http://schemas.microsoft.com/office/drawing/2014/main" id="{3D783FF4-D7D8-AB62-2F02-76C85B71CA3E}"/>
+                </a:ext>
+              </a:extLst>
+            </p:cNvPr>
+            <p:cNvSpPr txBox="1"/>
+            <p:nvPr/>
+          </p:nvSpPr>
+          <p:spPr>
+            <a:xfrm>
+              <a:off x="7643765" y="4334559"/>
+              <a:ext cx="2386757" cy="276999"/>
+            </a:xfrm>
+            <a:prstGeom prst="rect">
+              <a:avLst/>
+            </a:prstGeom>
+            <a:noFill/>
+          </p:spPr>
+          <p:txBody>
+            <a:bodyPr wrap="square" rtlCol="0">
+              <a:spAutoFit/>
+            </a:bodyPr>
+            <a:lstStyle/>
+            <a:p>
+              <a:pPr algn="ctr"/>
+              <a:r>
+                <a:rPr lang="nl-BE" sz="1200" dirty="0" err="1">
+                  <a:solidFill>
+                    <a:schemeClr val="bg1">
+                      <a:lumMod val="50000"/>
+                    </a:schemeClr>
+                  </a:solidFill>
+                </a:rPr>
+                <a:t>Subcluster</a:t>
+              </a:r>
+              <a:r>
+                <a:rPr lang="nl-BE" sz="1200" dirty="0">
+                  <a:solidFill>
+                    <a:schemeClr val="bg1">
+                      <a:lumMod val="50000"/>
+                    </a:schemeClr>
+                  </a:solidFill>
+                </a:rPr>
+                <a:t> 5</a:t>
+              </a:r>
+              <a:endParaRPr lang="en-US" sz="1200" dirty="0">
+                <a:solidFill>
+                  <a:schemeClr val="bg1">
+                    <a:lumMod val="50000"/>
+                  </a:schemeClr>
+                </a:solidFill>
+              </a:endParaRPr>
+            </a:p>
+          </p:txBody>
+        </p:sp>
+      </p:grpSp>
+    </p:spTree>
+    <p:extLst>
+      <p:ext uri="{BB962C8B-B14F-4D97-AF65-F5344CB8AC3E}">
+        <p14:creationId xmlns:p14="http://schemas.microsoft.com/office/powerpoint/2010/main" val="2798868901"/>
+      </p:ext>
+    </p:extLst>
+  </p:cSld>
+  <p:clrMapOvr>
+    <a:masterClrMapping/>
+  </p:clrMapOvr>
+</p:sld>
+</file>
+
+<file path=ppt/slides/slide20.xml><?xml version="1.0" encoding="utf-8"?>
+<p:sld xmlns:a="http://schemas.openxmlformats.org/drawingml/2006/main" xmlns:r="http://schemas.openxmlformats.org/officeDocument/2006/relationships" xmlns:p="http://schemas.openxmlformats.org/presentationml/2006/main">
+  <p:cSld>
+    <p:spTree>
+      <p:nvGrpSpPr>
+        <p:cNvPr id="1" name=""/>
+        <p:cNvGrpSpPr/>
+        <p:nvPr/>
+      </p:nvGrpSpPr>
+      <p:grpSpPr>
+        <a:xfrm>
+          <a:off x="0" y="0"/>
+          <a:ext cx="0" cy="0"/>
+          <a:chOff x="0" y="0"/>
+          <a:chExt cx="0" cy="0"/>
+        </a:xfrm>
+      </p:grpSpPr>
+      <p:pic>
+        <p:nvPicPr>
+          <p:cNvPr id="4" name="Picture 3">
+            <a:extLst>
+              <a:ext uri="{FF2B5EF4-FFF2-40B4-BE49-F238E27FC236}">
+                <a16:creationId xmlns:a16="http://schemas.microsoft.com/office/drawing/2014/main" id="{0F865C4A-CB7A-EEE7-5F46-6119BBE075EA}"/>
+              </a:ext>
+            </a:extLst>
+          </p:cNvPr>
+          <p:cNvPicPr>
+            <a:picLocks noChangeAspect="1"/>
+          </p:cNvPicPr>
+          <p:nvPr/>
+        </p:nvPicPr>
+        <p:blipFill>
+          <a:blip r:embed="rId2"/>
+          <a:stretch>
+            <a:fillRect/>
+          </a:stretch>
+        </p:blipFill>
+        <p:spPr>
+          <a:xfrm>
+            <a:off x="0" y="38046"/>
+            <a:ext cx="12192000" cy="6781907"/>
+          </a:xfrm>
+          <a:prstGeom prst="rect">
+            <a:avLst/>
+          </a:prstGeom>
+        </p:spPr>
+      </p:pic>
+    </p:spTree>
+    <p:extLst>
+      <p:ext uri="{BB962C8B-B14F-4D97-AF65-F5344CB8AC3E}">
+        <p14:creationId xmlns:p14="http://schemas.microsoft.com/office/powerpoint/2010/main" val="3035554453"/>
+      </p:ext>
+    </p:extLst>
+  </p:cSld>
+  <p:clrMapOvr>
+    <a:masterClrMapping/>
+  </p:clrMapOvr>
+</p:sld>
+</file>
+
+<file path=ppt/slides/slide21.xml><?xml version="1.0" encoding="utf-8"?>
 <p:sld xmlns:a="http://schemas.openxmlformats.org/drawingml/2006/main" xmlns:r="http://schemas.openxmlformats.org/officeDocument/2006/relationships" xmlns:p="http://schemas.openxmlformats.org/presentationml/2006/main">
   <p:cSld>
     <p:spTree>
@@ -5607,7 +8326,7 @@
 </p:sld>
 </file>
 
-<file path=ppt/slides/slide14.xml><?xml version="1.0" encoding="utf-8"?>
+<file path=ppt/slides/slide22.xml><?xml version="1.0" encoding="utf-8"?>
 <p:sld xmlns:a="http://schemas.openxmlformats.org/drawingml/2006/main" xmlns:r="http://schemas.openxmlformats.org/officeDocument/2006/relationships" xmlns:p="http://schemas.openxmlformats.org/presentationml/2006/main">
   <p:cSld>
     <p:spTree>
@@ -5667,7 +8386,7 @@
 </p:sld>
 </file>
 
-<file path=ppt/slides/slide15.xml><?xml version="1.0" encoding="utf-8"?>
+<file path=ppt/slides/slide23.xml><?xml version="1.0" encoding="utf-8"?>
 <p:sld xmlns:a="http://schemas.openxmlformats.org/drawingml/2006/main" xmlns:r="http://schemas.openxmlformats.org/officeDocument/2006/relationships" xmlns:p="http://schemas.openxmlformats.org/presentationml/2006/main">
   <p:cSld>
     <p:spTree>
@@ -5727,7 +8446,7 @@
 </p:sld>
 </file>
 
-<file path=ppt/slides/slide16.xml><?xml version="1.0" encoding="utf-8"?>
+<file path=ppt/slides/slide24.xml><?xml version="1.0" encoding="utf-8"?>
 <p:sld xmlns:a="http://schemas.openxmlformats.org/drawingml/2006/main" xmlns:r="http://schemas.openxmlformats.org/officeDocument/2006/relationships" xmlns:p="http://schemas.openxmlformats.org/presentationml/2006/main">
   <p:cSld>
     <p:spTree>
@@ -5787,7 +8506,435 @@
 </p:sld>
 </file>
 
-<file path=ppt/slides/slide2.xml><?xml version="1.0" encoding="utf-8"?>
+<file path=ppt/slides/slide25.xml><?xml version="1.0" encoding="utf-8"?>
+<p:sld xmlns:a="http://schemas.openxmlformats.org/drawingml/2006/main" xmlns:r="http://schemas.openxmlformats.org/officeDocument/2006/relationships" xmlns:p="http://schemas.openxmlformats.org/presentationml/2006/main">
+  <p:cSld>
+    <p:spTree>
+      <p:nvGrpSpPr>
+        <p:cNvPr id="1" name=""/>
+        <p:cNvGrpSpPr/>
+        <p:nvPr/>
+      </p:nvGrpSpPr>
+      <p:grpSpPr>
+        <a:xfrm>
+          <a:off x="0" y="0"/>
+          <a:ext cx="0" cy="0"/>
+          <a:chOff x="0" y="0"/>
+          <a:chExt cx="0" cy="0"/>
+        </a:xfrm>
+      </p:grpSpPr>
+      <p:sp>
+        <p:nvSpPr>
+          <p:cNvPr id="2" name="Title 1">
+            <a:extLst>
+              <a:ext uri="{FF2B5EF4-FFF2-40B4-BE49-F238E27FC236}">
+                <a16:creationId xmlns:a16="http://schemas.microsoft.com/office/drawing/2014/main" id="{B88CE779-0998-79CA-DA43-205F555DE38F}"/>
+              </a:ext>
+            </a:extLst>
+          </p:cNvPr>
+          <p:cNvSpPr>
+            <a:spLocks noGrp="1"/>
+          </p:cNvSpPr>
+          <p:nvPr>
+            <p:ph type="title"/>
+          </p:nvPr>
+        </p:nvSpPr>
+        <p:spPr/>
+        <p:txBody>
+          <a:bodyPr/>
+          <a:lstStyle/>
+          <a:p>
+            <a:r>
+              <a:rPr lang="nl-BE" dirty="0" err="1"/>
+              <a:t>Micro_SED</a:t>
+            </a:r>
+            <a:endParaRPr lang="en-US" dirty="0"/>
+          </a:p>
+        </p:txBody>
+      </p:sp>
+      <p:sp>
+        <p:nvSpPr>
+          <p:cNvPr id="3" name="Text Placeholder 2">
+            <a:extLst>
+              <a:ext uri="{FF2B5EF4-FFF2-40B4-BE49-F238E27FC236}">
+                <a16:creationId xmlns:a16="http://schemas.microsoft.com/office/drawing/2014/main" id="{316A7277-C782-16A1-BB9C-1866022BE742}"/>
+              </a:ext>
+            </a:extLst>
+          </p:cNvPr>
+          <p:cNvSpPr>
+            <a:spLocks noGrp="1"/>
+          </p:cNvSpPr>
+          <p:nvPr>
+            <p:ph type="body" idx="1"/>
+          </p:nvPr>
+        </p:nvSpPr>
+        <p:spPr/>
+        <p:txBody>
+          <a:bodyPr/>
+          <a:lstStyle/>
+          <a:p>
+            <a:endParaRPr lang="en-US"/>
+          </a:p>
+        </p:txBody>
+      </p:sp>
+    </p:spTree>
+    <p:extLst>
+      <p:ext uri="{BB962C8B-B14F-4D97-AF65-F5344CB8AC3E}">
+        <p14:creationId xmlns:p14="http://schemas.microsoft.com/office/powerpoint/2010/main" val="2901655223"/>
+      </p:ext>
+    </p:extLst>
+  </p:cSld>
+  <p:clrMapOvr>
+    <a:masterClrMapping/>
+  </p:clrMapOvr>
+</p:sld>
+</file>
+
+<file path=ppt/slides/slide26.xml><?xml version="1.0" encoding="utf-8"?>
+<p:sld xmlns:a="http://schemas.openxmlformats.org/drawingml/2006/main" xmlns:r="http://schemas.openxmlformats.org/officeDocument/2006/relationships" xmlns:p="http://schemas.openxmlformats.org/presentationml/2006/main">
+  <p:cSld>
+    <p:spTree>
+      <p:nvGrpSpPr>
+        <p:cNvPr id="1" name=""/>
+        <p:cNvGrpSpPr/>
+        <p:nvPr/>
+      </p:nvGrpSpPr>
+      <p:grpSpPr>
+        <a:xfrm>
+          <a:off x="0" y="0"/>
+          <a:ext cx="0" cy="0"/>
+          <a:chOff x="0" y="0"/>
+          <a:chExt cx="0" cy="0"/>
+        </a:xfrm>
+      </p:grpSpPr>
+      <p:pic>
+        <p:nvPicPr>
+          <p:cNvPr id="2" name="Picture 1">
+            <a:extLst>
+              <a:ext uri="{FF2B5EF4-FFF2-40B4-BE49-F238E27FC236}">
+                <a16:creationId xmlns:a16="http://schemas.microsoft.com/office/drawing/2014/main" id="{B4E2DA13-59D0-ACBC-9CE0-DFFCD1F948FA}"/>
+              </a:ext>
+            </a:extLst>
+          </p:cNvPr>
+          <p:cNvPicPr>
+            <a:picLocks noChangeAspect="1"/>
+          </p:cNvPicPr>
+          <p:nvPr/>
+        </p:nvPicPr>
+        <p:blipFill>
+          <a:blip r:embed="rId2"/>
+          <a:stretch>
+            <a:fillRect/>
+          </a:stretch>
+        </p:blipFill>
+        <p:spPr>
+          <a:xfrm>
+            <a:off x="0" y="197139"/>
+            <a:ext cx="12192000" cy="6463721"/>
+          </a:xfrm>
+          <a:prstGeom prst="rect">
+            <a:avLst/>
+          </a:prstGeom>
+        </p:spPr>
+      </p:pic>
+    </p:spTree>
+    <p:extLst>
+      <p:ext uri="{BB962C8B-B14F-4D97-AF65-F5344CB8AC3E}">
+        <p14:creationId xmlns:p14="http://schemas.microsoft.com/office/powerpoint/2010/main" val="653595572"/>
+      </p:ext>
+    </p:extLst>
+  </p:cSld>
+  <p:clrMapOvr>
+    <a:masterClrMapping/>
+  </p:clrMapOvr>
+</p:sld>
+</file>
+
+<file path=ppt/slides/slide27.xml><?xml version="1.0" encoding="utf-8"?>
+<p:sld xmlns:a="http://schemas.openxmlformats.org/drawingml/2006/main" xmlns:r="http://schemas.openxmlformats.org/officeDocument/2006/relationships" xmlns:p="http://schemas.openxmlformats.org/presentationml/2006/main">
+  <p:cSld>
+    <p:spTree>
+      <p:nvGrpSpPr>
+        <p:cNvPr id="1" name=""/>
+        <p:cNvGrpSpPr/>
+        <p:nvPr/>
+      </p:nvGrpSpPr>
+      <p:grpSpPr>
+        <a:xfrm>
+          <a:off x="0" y="0"/>
+          <a:ext cx="0" cy="0"/>
+          <a:chOff x="0" y="0"/>
+          <a:chExt cx="0" cy="0"/>
+        </a:xfrm>
+      </p:grpSpPr>
+      <p:sp>
+        <p:nvSpPr>
+          <p:cNvPr id="2" name="AutoShape 2">
+            <a:extLst>
+              <a:ext uri="{FF2B5EF4-FFF2-40B4-BE49-F238E27FC236}">
+                <a16:creationId xmlns:a16="http://schemas.microsoft.com/office/drawing/2014/main" id="{40EAA3F3-5CFD-F5BA-0104-2259FF64E40A}"/>
+              </a:ext>
+            </a:extLst>
+          </p:cNvPr>
+          <p:cNvSpPr>
+            <a:spLocks noChangeAspect="1" noChangeArrowheads="1"/>
+          </p:cNvSpPr>
+          <p:nvPr/>
+        </p:nvSpPr>
+        <p:spPr bwMode="auto">
+          <a:xfrm>
+            <a:off x="5943600" y="3276600"/>
+            <a:ext cx="304800" cy="304800"/>
+          </a:xfrm>
+          <a:prstGeom prst="rect">
+            <a:avLst/>
+          </a:prstGeom>
+          <a:noFill/>
+          <a:extLst>
+            <a:ext uri="{909E8E84-426E-40DD-AFC4-6F175D3DCCD1}">
+              <a14:hiddenFill xmlns:a14="http://schemas.microsoft.com/office/drawing/2010/main">
+                <a:solidFill>
+                  <a:srgbClr val="FFFFFF"/>
+                </a:solidFill>
+              </a14:hiddenFill>
+            </a:ext>
+          </a:extLst>
+        </p:spPr>
+        <p:txBody>
+          <a:bodyPr vert="horz" wrap="square" lIns="91440" tIns="45720" rIns="91440" bIns="45720" numCol="1" anchor="t" anchorCtr="0" compatLnSpc="1">
+            <a:prstTxWarp prst="textNoShape">
+              <a:avLst/>
+            </a:prstTxWarp>
+          </a:bodyPr>
+          <a:lstStyle/>
+          <a:p>
+            <a:endParaRPr lang="en-US"/>
+          </a:p>
+        </p:txBody>
+      </p:sp>
+      <p:pic>
+        <p:nvPicPr>
+          <p:cNvPr id="3" name="Picture 2">
+            <a:extLst>
+              <a:ext uri="{FF2B5EF4-FFF2-40B4-BE49-F238E27FC236}">
+                <a16:creationId xmlns:a16="http://schemas.microsoft.com/office/drawing/2014/main" id="{E4635759-54DB-9D45-1F9B-ED578C4A50AE}"/>
+              </a:ext>
+            </a:extLst>
+          </p:cNvPr>
+          <p:cNvPicPr>
+            <a:picLocks noChangeAspect="1"/>
+          </p:cNvPicPr>
+          <p:nvPr/>
+        </p:nvPicPr>
+        <p:blipFill>
+          <a:blip r:embed="rId2"/>
+          <a:stretch>
+            <a:fillRect/>
+          </a:stretch>
+        </p:blipFill>
+        <p:spPr>
+          <a:xfrm>
+            <a:off x="1522555" y="0"/>
+            <a:ext cx="9146890" cy="6858000"/>
+          </a:xfrm>
+          <a:prstGeom prst="rect">
+            <a:avLst/>
+          </a:prstGeom>
+        </p:spPr>
+      </p:pic>
+    </p:spTree>
+    <p:extLst>
+      <p:ext uri="{BB962C8B-B14F-4D97-AF65-F5344CB8AC3E}">
+        <p14:creationId xmlns:p14="http://schemas.microsoft.com/office/powerpoint/2010/main" val="1017550823"/>
+      </p:ext>
+    </p:extLst>
+  </p:cSld>
+  <p:clrMapOvr>
+    <a:masterClrMapping/>
+  </p:clrMapOvr>
+</p:sld>
+</file>
+
+<file path=ppt/slides/slide28.xml><?xml version="1.0" encoding="utf-8"?>
+<p:sld xmlns:a="http://schemas.openxmlformats.org/drawingml/2006/main" xmlns:r="http://schemas.openxmlformats.org/officeDocument/2006/relationships" xmlns:p="http://schemas.openxmlformats.org/presentationml/2006/main">
+  <p:cSld>
+    <p:spTree>
+      <p:nvGrpSpPr>
+        <p:cNvPr id="1" name=""/>
+        <p:cNvGrpSpPr/>
+        <p:nvPr/>
+      </p:nvGrpSpPr>
+      <p:grpSpPr>
+        <a:xfrm>
+          <a:off x="0" y="0"/>
+          <a:ext cx="0" cy="0"/>
+          <a:chOff x="0" y="0"/>
+          <a:chExt cx="0" cy="0"/>
+        </a:xfrm>
+      </p:grpSpPr>
+      <p:pic>
+        <p:nvPicPr>
+          <p:cNvPr id="2" name="Picture 1">
+            <a:extLst>
+              <a:ext uri="{FF2B5EF4-FFF2-40B4-BE49-F238E27FC236}">
+                <a16:creationId xmlns:a16="http://schemas.microsoft.com/office/drawing/2014/main" id="{F79C3D27-8396-9D3C-A8DC-F53A6448442A}"/>
+              </a:ext>
+            </a:extLst>
+          </p:cNvPr>
+          <p:cNvPicPr>
+            <a:picLocks noChangeAspect="1"/>
+          </p:cNvPicPr>
+          <p:nvPr/>
+        </p:nvPicPr>
+        <p:blipFill>
+          <a:blip r:embed="rId2"/>
+          <a:stretch>
+            <a:fillRect/>
+          </a:stretch>
+        </p:blipFill>
+        <p:spPr>
+          <a:xfrm>
+            <a:off x="733581" y="0"/>
+            <a:ext cx="10724837" cy="6858000"/>
+          </a:xfrm>
+          <a:prstGeom prst="rect">
+            <a:avLst/>
+          </a:prstGeom>
+        </p:spPr>
+      </p:pic>
+    </p:spTree>
+    <p:extLst>
+      <p:ext uri="{BB962C8B-B14F-4D97-AF65-F5344CB8AC3E}">
+        <p14:creationId xmlns:p14="http://schemas.microsoft.com/office/powerpoint/2010/main" val="3367009107"/>
+      </p:ext>
+    </p:extLst>
+  </p:cSld>
+  <p:clrMapOvr>
+    <a:masterClrMapping/>
+  </p:clrMapOvr>
+</p:sld>
+</file>
+
+<file path=ppt/slides/slide29.xml><?xml version="1.0" encoding="utf-8"?>
+<p:sld xmlns:a="http://schemas.openxmlformats.org/drawingml/2006/main" xmlns:r="http://schemas.openxmlformats.org/officeDocument/2006/relationships" xmlns:p="http://schemas.openxmlformats.org/presentationml/2006/main">
+  <p:cSld>
+    <p:spTree>
+      <p:nvGrpSpPr>
+        <p:cNvPr id="1" name=""/>
+        <p:cNvGrpSpPr/>
+        <p:nvPr/>
+      </p:nvGrpSpPr>
+      <p:grpSpPr>
+        <a:xfrm>
+          <a:off x="0" y="0"/>
+          <a:ext cx="0" cy="0"/>
+          <a:chOff x="0" y="0"/>
+          <a:chExt cx="0" cy="0"/>
+        </a:xfrm>
+      </p:grpSpPr>
+      <p:pic>
+        <p:nvPicPr>
+          <p:cNvPr id="2" name="Picture 1">
+            <a:extLst>
+              <a:ext uri="{FF2B5EF4-FFF2-40B4-BE49-F238E27FC236}">
+                <a16:creationId xmlns:a16="http://schemas.microsoft.com/office/drawing/2014/main" id="{843C835B-8BD7-4C3D-FB20-7BB07BD79C1F}"/>
+              </a:ext>
+            </a:extLst>
+          </p:cNvPr>
+          <p:cNvPicPr>
+            <a:picLocks noChangeAspect="1"/>
+          </p:cNvPicPr>
+          <p:nvPr/>
+        </p:nvPicPr>
+        <p:blipFill>
+          <a:blip r:embed="rId2"/>
+          <a:stretch>
+            <a:fillRect/>
+          </a:stretch>
+        </p:blipFill>
+        <p:spPr>
+          <a:xfrm>
+            <a:off x="719988" y="0"/>
+            <a:ext cx="10752023" cy="6858000"/>
+          </a:xfrm>
+          <a:prstGeom prst="rect">
+            <a:avLst/>
+          </a:prstGeom>
+        </p:spPr>
+      </p:pic>
+    </p:spTree>
+    <p:extLst>
+      <p:ext uri="{BB962C8B-B14F-4D97-AF65-F5344CB8AC3E}">
+        <p14:creationId xmlns:p14="http://schemas.microsoft.com/office/powerpoint/2010/main" val="3642722863"/>
+      </p:ext>
+    </p:extLst>
+  </p:cSld>
+  <p:clrMapOvr>
+    <a:masterClrMapping/>
+  </p:clrMapOvr>
+</p:sld>
+</file>
+
+<file path=ppt/slides/slide3.xml><?xml version="1.0" encoding="utf-8"?>
+<p:sld xmlns:a="http://schemas.openxmlformats.org/drawingml/2006/main" xmlns:r="http://schemas.openxmlformats.org/officeDocument/2006/relationships" xmlns:p="http://schemas.openxmlformats.org/presentationml/2006/main">
+  <p:cSld>
+    <p:spTree>
+      <p:nvGrpSpPr>
+        <p:cNvPr id="1" name=""/>
+        <p:cNvGrpSpPr/>
+        <p:nvPr/>
+      </p:nvGrpSpPr>
+      <p:grpSpPr>
+        <a:xfrm>
+          <a:off x="0" y="0"/>
+          <a:ext cx="0" cy="0"/>
+          <a:chOff x="0" y="0"/>
+          <a:chExt cx="0" cy="0"/>
+        </a:xfrm>
+      </p:grpSpPr>
+      <p:pic>
+        <p:nvPicPr>
+          <p:cNvPr id="3" name="Picture 2">
+            <a:extLst>
+              <a:ext uri="{FF2B5EF4-FFF2-40B4-BE49-F238E27FC236}">
+                <a16:creationId xmlns:a16="http://schemas.microsoft.com/office/drawing/2014/main" id="{02E0D670-4338-EC0A-EB80-19D7F95A851E}"/>
+              </a:ext>
+            </a:extLst>
+          </p:cNvPr>
+          <p:cNvPicPr>
+            <a:picLocks noChangeAspect="1"/>
+          </p:cNvPicPr>
+          <p:nvPr/>
+        </p:nvPicPr>
+        <p:blipFill>
+          <a:blip r:embed="rId2"/>
+          <a:srcRect t="18876"/>
+          <a:stretch/>
+        </p:blipFill>
+        <p:spPr>
+          <a:xfrm>
+            <a:off x="415858" y="2762654"/>
+            <a:ext cx="11049000" cy="4095345"/>
+          </a:xfrm>
+          <a:prstGeom prst="rect">
+            <a:avLst/>
+          </a:prstGeom>
+        </p:spPr>
+      </p:pic>
+    </p:spTree>
+    <p:extLst>
+      <p:ext uri="{BB962C8B-B14F-4D97-AF65-F5344CB8AC3E}">
+        <p14:creationId xmlns:p14="http://schemas.microsoft.com/office/powerpoint/2010/main" val="112412351"/>
+      </p:ext>
+    </p:extLst>
+  </p:cSld>
+  <p:clrMapOvr>
+    <a:masterClrMapping/>
+  </p:clrMapOvr>
+</p:sld>
+</file>
+
+<file path=ppt/slides/slide30.xml><?xml version="1.0" encoding="utf-8"?>
 <p:sld xmlns:a="http://schemas.openxmlformats.org/drawingml/2006/main" xmlns:r="http://schemas.openxmlformats.org/officeDocument/2006/relationships" xmlns:p="http://schemas.openxmlformats.org/presentationml/2006/main">
   <p:cSld>
     <p:spTree>
@@ -5806,10 +8953,10 @@
       </p:grpSpPr>
       <p:grpSp>
         <p:nvGrpSpPr>
-          <p:cNvPr id="20" name="Group 19">
+          <p:cNvPr id="16" name="Group 15">
             <a:extLst>
               <a:ext uri="{FF2B5EF4-FFF2-40B4-BE49-F238E27FC236}">
-                <a16:creationId xmlns:a16="http://schemas.microsoft.com/office/drawing/2014/main" id="{CC87E8FA-9E4D-A0A6-FB95-C48418F2BEEE}"/>
+                <a16:creationId xmlns:a16="http://schemas.microsoft.com/office/drawing/2014/main" id="{A50099FE-A2EA-F208-C09C-8EF90140C885}"/>
               </a:ext>
             </a:extLst>
           </p:cNvPr>
@@ -5818,93 +8965,205 @@
         </p:nvGrpSpPr>
         <p:grpSpPr>
           <a:xfrm>
-            <a:off x="0" y="45661"/>
-            <a:ext cx="12329310" cy="6812339"/>
-            <a:chOff x="0" y="45661"/>
-            <a:chExt cx="12329310" cy="6812339"/>
+            <a:off x="788080" y="0"/>
+            <a:ext cx="9420923" cy="8734429"/>
+            <a:chOff x="788080" y="0"/>
+            <a:chExt cx="9420923" cy="8734429"/>
           </a:xfrm>
         </p:grpSpPr>
-        <p:sp>
-          <p:nvSpPr>
-            <p:cNvPr id="5" name="AutoShape 2">
+        <p:grpSp>
+          <p:nvGrpSpPr>
+            <p:cNvPr id="8" name="Group 7">
               <a:extLst>
                 <a:ext uri="{FF2B5EF4-FFF2-40B4-BE49-F238E27FC236}">
-                  <a16:creationId xmlns:a16="http://schemas.microsoft.com/office/drawing/2014/main" id="{FE152EE9-23B5-15A6-C325-31BDF3BC7597}"/>
+                  <a16:creationId xmlns:a16="http://schemas.microsoft.com/office/drawing/2014/main" id="{C1B0D54A-6A01-7479-558C-DD08982961AF}"/>
                 </a:ext>
               </a:extLst>
             </p:cNvPr>
-            <p:cNvSpPr>
-              <a:spLocks noChangeAspect="1" noChangeArrowheads="1"/>
-            </p:cNvSpPr>
+            <p:cNvGrpSpPr/>
             <p:nvPr/>
-          </p:nvSpPr>
-          <p:spPr bwMode="auto">
+          </p:nvGrpSpPr>
+          <p:grpSpPr>
             <a:xfrm>
-              <a:off x="5943600" y="3276600"/>
-              <a:ext cx="304800" cy="304800"/>
+              <a:off x="788080" y="0"/>
+              <a:ext cx="9420923" cy="8734429"/>
+              <a:chOff x="788080" y="0"/>
+              <a:chExt cx="9420923" cy="8734429"/>
             </a:xfrm>
-            <a:prstGeom prst="rect">
-              <a:avLst/>
-            </a:prstGeom>
-            <a:noFill/>
-            <a:extLst>
-              <a:ext uri="{909E8E84-426E-40DD-AFC4-6F175D3DCCD1}">
-                <a14:hiddenFill xmlns:a14="http://schemas.microsoft.com/office/drawing/2010/main">
-                  <a:solidFill>
-                    <a:srgbClr val="FFFFFF"/>
-                  </a:solidFill>
-                </a14:hiddenFill>
-              </a:ext>
-            </a:extLst>
-          </p:spPr>
-          <p:txBody>
-            <a:bodyPr vert="horz" wrap="square" lIns="91440" tIns="45720" rIns="91440" bIns="45720" numCol="1" anchor="t" anchorCtr="0" compatLnSpc="1">
-              <a:prstTxWarp prst="textNoShape">
+          </p:grpSpPr>
+          <p:grpSp>
+            <p:nvGrpSpPr>
+              <p:cNvPr id="4" name="Group 3">
+                <a:extLst>
+                  <a:ext uri="{FF2B5EF4-FFF2-40B4-BE49-F238E27FC236}">
+                    <a16:creationId xmlns:a16="http://schemas.microsoft.com/office/drawing/2014/main" id="{13E83B2D-2379-A4A0-E999-4BD95C33113E}"/>
+                  </a:ext>
+                </a:extLst>
+              </p:cNvPr>
+              <p:cNvGrpSpPr/>
+              <p:nvPr/>
+            </p:nvGrpSpPr>
+            <p:grpSpPr>
+              <a:xfrm>
+                <a:off x="1536969" y="0"/>
+                <a:ext cx="8672034" cy="3647873"/>
+                <a:chOff x="1536969" y="0"/>
+                <a:chExt cx="8672034" cy="3647873"/>
+              </a:xfrm>
+            </p:grpSpPr>
+            <p:pic>
+              <p:nvPicPr>
+                <p:cNvPr id="2" name="Picture 1">
+                  <a:extLst>
+                    <a:ext uri="{FF2B5EF4-FFF2-40B4-BE49-F238E27FC236}">
+                      <a16:creationId xmlns:a16="http://schemas.microsoft.com/office/drawing/2014/main" id="{CDC66E1A-9662-0ED9-F07E-A0CAEDE935A6}"/>
+                    </a:ext>
+                  </a:extLst>
+                </p:cNvPr>
+                <p:cNvPicPr>
+                  <a:picLocks noChangeAspect="1"/>
+                </p:cNvPicPr>
+                <p:nvPr/>
+              </p:nvPicPr>
+              <p:blipFill>
+                <a:blip r:embed="rId2"/>
+                <a:srcRect l="6361" t="59716"/>
+                <a:stretch/>
+              </p:blipFill>
+              <p:spPr>
+                <a:xfrm>
+                  <a:off x="1643975" y="1394299"/>
+                  <a:ext cx="8565028" cy="2253574"/>
+                </a:xfrm>
+                <a:prstGeom prst="rect">
+                  <a:avLst/>
+                </a:prstGeom>
+              </p:spPr>
+            </p:pic>
+            <p:pic>
+              <p:nvPicPr>
+                <p:cNvPr id="3" name="Picture 2">
+                  <a:extLst>
+                    <a:ext uri="{FF2B5EF4-FFF2-40B4-BE49-F238E27FC236}">
+                      <a16:creationId xmlns:a16="http://schemas.microsoft.com/office/drawing/2014/main" id="{2C111F46-1F72-FBB1-4EBE-B207D718ED2E}"/>
+                    </a:ext>
+                  </a:extLst>
+                </p:cNvPr>
+                <p:cNvPicPr>
+                  <a:picLocks noChangeAspect="1"/>
+                </p:cNvPicPr>
+                <p:nvPr/>
+              </p:nvPicPr>
+              <p:blipFill>
+                <a:blip r:embed="rId2"/>
+                <a:srcRect l="5192" b="40520"/>
+                <a:stretch/>
+              </p:blipFill>
+              <p:spPr>
+                <a:xfrm>
+                  <a:off x="1536969" y="0"/>
+                  <a:ext cx="8672033" cy="1394298"/>
+                </a:xfrm>
+                <a:prstGeom prst="rect">
+                  <a:avLst/>
+                </a:prstGeom>
+              </p:spPr>
+            </p:pic>
+          </p:grpSp>
+          <p:pic>
+            <p:nvPicPr>
+              <p:cNvPr id="5" name="Picture 4">
+                <a:extLst>
+                  <a:ext uri="{FF2B5EF4-FFF2-40B4-BE49-F238E27FC236}">
+                    <a16:creationId xmlns:a16="http://schemas.microsoft.com/office/drawing/2014/main" id="{1A8F3A03-751A-92C3-22AB-BDC5E46E82A1}"/>
+                  </a:ext>
+                </a:extLst>
+              </p:cNvPr>
+              <p:cNvPicPr>
+                <a:picLocks noChangeAspect="1"/>
+              </p:cNvPicPr>
+              <p:nvPr/>
+            </p:nvPicPr>
+            <p:blipFill>
+              <a:blip r:embed="rId3"/>
+              <a:srcRect t="22553"/>
+              <a:stretch/>
+            </p:blipFill>
+            <p:spPr>
+              <a:xfrm>
+                <a:off x="788080" y="4981571"/>
+                <a:ext cx="9299501" cy="3752858"/>
+              </a:xfrm>
+              <a:prstGeom prst="rect">
                 <a:avLst/>
-              </a:prstTxWarp>
-            </a:bodyPr>
-            <a:lstStyle/>
-            <a:p>
-              <a:endParaRPr lang="en-US"/>
-            </a:p>
-          </p:txBody>
-        </p:sp>
-        <p:pic>
-          <p:nvPicPr>
-            <p:cNvPr id="7" name="Picture 6">
+              </a:prstGeom>
+            </p:spPr>
+          </p:pic>
+          <p:pic>
+            <p:nvPicPr>
+              <p:cNvPr id="6" name="Picture 5">
+                <a:extLst>
+                  <a:ext uri="{FF2B5EF4-FFF2-40B4-BE49-F238E27FC236}">
+                    <a16:creationId xmlns:a16="http://schemas.microsoft.com/office/drawing/2014/main" id="{24C225C3-A78E-588C-A466-04706D4B4719}"/>
+                  </a:ext>
+                </a:extLst>
+              </p:cNvPr>
+              <p:cNvPicPr>
+                <a:picLocks noChangeAspect="1"/>
+              </p:cNvPicPr>
+              <p:nvPr/>
+            </p:nvPicPr>
+            <p:blipFill>
+              <a:blip r:embed="rId4"/>
+              <a:srcRect t="92382"/>
+              <a:stretch/>
+            </p:blipFill>
+            <p:spPr>
+              <a:xfrm>
+                <a:off x="893091" y="4589899"/>
+                <a:ext cx="9194489" cy="434158"/>
+              </a:xfrm>
+              <a:prstGeom prst="rect">
+                <a:avLst/>
+              </a:prstGeom>
+            </p:spPr>
+          </p:pic>
+          <p:pic>
+            <p:nvPicPr>
+              <p:cNvPr id="7" name="Picture 6">
+                <a:extLst>
+                  <a:ext uri="{FF2B5EF4-FFF2-40B4-BE49-F238E27FC236}">
+                    <a16:creationId xmlns:a16="http://schemas.microsoft.com/office/drawing/2014/main" id="{A4E4F849-9F86-BFC8-2777-64559E70A4C1}"/>
+                  </a:ext>
+                </a:extLst>
+              </p:cNvPr>
+              <p:cNvPicPr>
+                <a:picLocks noChangeAspect="1"/>
+              </p:cNvPicPr>
+              <p:nvPr/>
+            </p:nvPicPr>
+            <p:blipFill>
+              <a:blip r:embed="rId4"/>
+              <a:srcRect t="1" b="78157"/>
+              <a:stretch/>
+            </p:blipFill>
+            <p:spPr>
+              <a:xfrm>
+                <a:off x="788081" y="3360554"/>
+                <a:ext cx="9299500" cy="1271830"/>
+              </a:xfrm>
+              <a:prstGeom prst="rect">
+                <a:avLst/>
+              </a:prstGeom>
+            </p:spPr>
+          </p:pic>
+        </p:grpSp>
+        <p:sp>
+          <p:nvSpPr>
+            <p:cNvPr id="10" name="TextBox 9">
               <a:extLst>
                 <a:ext uri="{FF2B5EF4-FFF2-40B4-BE49-F238E27FC236}">
-                  <a16:creationId xmlns:a16="http://schemas.microsoft.com/office/drawing/2014/main" id="{D03CE7A1-AED1-F994-0DB4-F1818DC61E57}"/>
-                </a:ext>
-              </a:extLst>
-            </p:cNvPr>
-            <p:cNvPicPr>
-              <a:picLocks noChangeAspect="1"/>
-            </p:cNvPicPr>
-            <p:nvPr/>
-          </p:nvPicPr>
-          <p:blipFill>
-            <a:blip r:embed="rId3"/>
-            <a:stretch>
-              <a:fillRect/>
-            </a:stretch>
-          </p:blipFill>
-          <p:spPr>
-            <a:xfrm>
-              <a:off x="0" y="45661"/>
-              <a:ext cx="12192000" cy="6812339"/>
-            </a:xfrm>
-            <a:prstGeom prst="rect">
-              <a:avLst/>
-            </a:prstGeom>
-          </p:spPr>
-        </p:pic>
-        <p:sp>
-          <p:nvSpPr>
-            <p:cNvPr id="8" name="TextBox 7">
-              <a:extLst>
-                <a:ext uri="{FF2B5EF4-FFF2-40B4-BE49-F238E27FC236}">
-                  <a16:creationId xmlns:a16="http://schemas.microsoft.com/office/drawing/2014/main" id="{ADBAF2E4-C0BF-5441-63B7-E51CA0FDF460}"/>
+                  <a16:creationId xmlns:a16="http://schemas.microsoft.com/office/drawing/2014/main" id="{E9B9654C-E601-C668-0764-A1537B14D2AB}"/>
                 </a:ext>
               </a:extLst>
             </p:cNvPr>
@@ -5913,7 +9172,203 @@
           </p:nvSpPr>
           <p:spPr>
             <a:xfrm>
-              <a:off x="1004935" y="6097706"/>
+              <a:off x="1028973" y="1323568"/>
+              <a:ext cx="1855959" cy="369332"/>
+            </a:xfrm>
+            <a:prstGeom prst="rect">
+              <a:avLst/>
+            </a:prstGeom>
+            <a:noFill/>
+          </p:spPr>
+          <p:txBody>
+            <a:bodyPr wrap="square" rtlCol="0">
+              <a:spAutoFit/>
+            </a:bodyPr>
+            <a:lstStyle/>
+            <a:p>
+              <a:pPr algn="ctr"/>
+              <a:r>
+                <a:rPr lang="nl-BE" dirty="0">
+                  <a:solidFill>
+                    <a:schemeClr val="bg1">
+                      <a:lumMod val="50000"/>
+                    </a:schemeClr>
+                  </a:solidFill>
+                </a:rPr>
+                <a:t>Cluster 6</a:t>
+              </a:r>
+              <a:endParaRPr lang="en-US" dirty="0">
+                <a:solidFill>
+                  <a:schemeClr val="bg1">
+                    <a:lumMod val="50000"/>
+                  </a:schemeClr>
+                </a:solidFill>
+              </a:endParaRPr>
+            </a:p>
+          </p:txBody>
+        </p:sp>
+        <p:sp>
+          <p:nvSpPr>
+            <p:cNvPr id="11" name="TextBox 10">
+              <a:extLst>
+                <a:ext uri="{FF2B5EF4-FFF2-40B4-BE49-F238E27FC236}">
+                  <a16:creationId xmlns:a16="http://schemas.microsoft.com/office/drawing/2014/main" id="{3C57C436-EDB7-A8DF-1A55-C38800A43750}"/>
+                </a:ext>
+              </a:extLst>
+            </p:cNvPr>
+            <p:cNvSpPr txBox="1"/>
+            <p:nvPr/>
+          </p:nvSpPr>
+          <p:spPr>
+            <a:xfrm>
+              <a:off x="2200466" y="1291302"/>
+              <a:ext cx="1855959" cy="369332"/>
+            </a:xfrm>
+            <a:prstGeom prst="rect">
+              <a:avLst/>
+            </a:prstGeom>
+            <a:noFill/>
+          </p:spPr>
+          <p:txBody>
+            <a:bodyPr wrap="square" rtlCol="0">
+              <a:spAutoFit/>
+            </a:bodyPr>
+            <a:lstStyle/>
+            <a:p>
+              <a:pPr algn="ctr"/>
+              <a:r>
+                <a:rPr lang="nl-BE" dirty="0">
+                  <a:solidFill>
+                    <a:schemeClr val="bg1">
+                      <a:lumMod val="50000"/>
+                    </a:schemeClr>
+                  </a:solidFill>
+                </a:rPr>
+                <a:t>Cluster 1</a:t>
+              </a:r>
+              <a:endParaRPr lang="en-US" dirty="0">
+                <a:solidFill>
+                  <a:schemeClr val="bg1">
+                    <a:lumMod val="50000"/>
+                  </a:schemeClr>
+                </a:solidFill>
+              </a:endParaRPr>
+            </a:p>
+          </p:txBody>
+        </p:sp>
+        <p:sp>
+          <p:nvSpPr>
+            <p:cNvPr id="12" name="TextBox 11">
+              <a:extLst>
+                <a:ext uri="{FF2B5EF4-FFF2-40B4-BE49-F238E27FC236}">
+                  <a16:creationId xmlns:a16="http://schemas.microsoft.com/office/drawing/2014/main" id="{CB6C43D3-BD26-F01D-B04E-1244A1C871B2}"/>
+                </a:ext>
+              </a:extLst>
+            </p:cNvPr>
+            <p:cNvSpPr txBox="1"/>
+            <p:nvPr/>
+          </p:nvSpPr>
+          <p:spPr>
+            <a:xfrm>
+              <a:off x="5480003" y="1291302"/>
+              <a:ext cx="1855959" cy="369332"/>
+            </a:xfrm>
+            <a:prstGeom prst="rect">
+              <a:avLst/>
+            </a:prstGeom>
+            <a:noFill/>
+          </p:spPr>
+          <p:txBody>
+            <a:bodyPr wrap="square" rtlCol="0">
+              <a:spAutoFit/>
+            </a:bodyPr>
+            <a:lstStyle/>
+            <a:p>
+              <a:pPr algn="ctr"/>
+              <a:r>
+                <a:rPr lang="nl-BE" dirty="0">
+                  <a:solidFill>
+                    <a:schemeClr val="bg1">
+                      <a:lumMod val="50000"/>
+                    </a:schemeClr>
+                  </a:solidFill>
+                </a:rPr>
+                <a:t>Cluster 2</a:t>
+              </a:r>
+              <a:endParaRPr lang="en-US" dirty="0">
+                <a:solidFill>
+                  <a:schemeClr val="bg1">
+                    <a:lumMod val="50000"/>
+                  </a:schemeClr>
+                </a:solidFill>
+              </a:endParaRPr>
+            </a:p>
+          </p:txBody>
+        </p:sp>
+        <p:sp>
+          <p:nvSpPr>
+            <p:cNvPr id="13" name="TextBox 12">
+              <a:extLst>
+                <a:ext uri="{FF2B5EF4-FFF2-40B4-BE49-F238E27FC236}">
+                  <a16:creationId xmlns:a16="http://schemas.microsoft.com/office/drawing/2014/main" id="{3023AC3F-4C93-5029-F803-26FBBBDB1FF0}"/>
+                </a:ext>
+              </a:extLst>
+            </p:cNvPr>
+            <p:cNvSpPr txBox="1"/>
+            <p:nvPr/>
+          </p:nvSpPr>
+          <p:spPr>
+            <a:xfrm>
+              <a:off x="7054819" y="1024965"/>
+              <a:ext cx="1855959" cy="369332"/>
+            </a:xfrm>
+            <a:prstGeom prst="rect">
+              <a:avLst/>
+            </a:prstGeom>
+            <a:noFill/>
+          </p:spPr>
+          <p:txBody>
+            <a:bodyPr wrap="square" rtlCol="0">
+              <a:spAutoFit/>
+            </a:bodyPr>
+            <a:lstStyle/>
+            <a:p>
+              <a:pPr algn="ctr"/>
+              <a:r>
+                <a:rPr lang="nl-BE" dirty="0">
+                  <a:solidFill>
+                    <a:schemeClr val="bg1">
+                      <a:lumMod val="50000"/>
+                    </a:schemeClr>
+                  </a:solidFill>
+                </a:rPr>
+                <a:t>Cluster 5</a:t>
+              </a:r>
+              <a:endParaRPr lang="en-US" dirty="0">
+                <a:solidFill>
+                  <a:schemeClr val="bg1">
+                    <a:lumMod val="50000"/>
+                  </a:schemeClr>
+                </a:solidFill>
+              </a:endParaRPr>
+            </a:p>
+          </p:txBody>
+        </p:sp>
+        <p:sp>
+          <p:nvSpPr>
+            <p:cNvPr id="14" name="TextBox 13">
+              <a:extLst>
+                <a:ext uri="{FF2B5EF4-FFF2-40B4-BE49-F238E27FC236}">
+                  <a16:creationId xmlns:a16="http://schemas.microsoft.com/office/drawing/2014/main" id="{710E39F1-4D2C-BECD-B45F-30EAA109107F}"/>
+                </a:ext>
+              </a:extLst>
+            </p:cNvPr>
+            <p:cNvSpPr txBox="1"/>
+            <p:nvPr/>
+          </p:nvSpPr>
+          <p:spPr>
+            <a:xfrm>
+              <a:off x="7617105" y="1323568"/>
               <a:ext cx="1855959" cy="369332"/>
             </a:xfrm>
             <a:prstGeom prst="rect">
@@ -5950,10 +9405,10 @@
         </p:sp>
         <p:sp>
           <p:nvSpPr>
-            <p:cNvPr id="9" name="TextBox 8">
+            <p:cNvPr id="15" name="TextBox 14">
               <a:extLst>
                 <a:ext uri="{FF2B5EF4-FFF2-40B4-BE49-F238E27FC236}">
-                  <a16:creationId xmlns:a16="http://schemas.microsoft.com/office/drawing/2014/main" id="{6CEFA57A-4628-8BA0-913B-0B4AF6759DD9}"/>
+                  <a16:creationId xmlns:a16="http://schemas.microsoft.com/office/drawing/2014/main" id="{B8280DDD-CDE4-4E32-9205-775ADE0BD713}"/>
                 </a:ext>
               </a:extLst>
             </p:cNvPr>
@@ -5962,7 +9417,7 @@
           </p:nvSpPr>
           <p:spPr>
             <a:xfrm>
-              <a:off x="10473351" y="6145794"/>
+              <a:off x="8231621" y="1628368"/>
               <a:ext cx="1855959" cy="369332"/>
             </a:xfrm>
             <a:prstGeom prst="rect">
@@ -5985,518 +9440,9 @@
                     </a:schemeClr>
                   </a:solidFill>
                 </a:rPr>
-                <a:t>Cluster 2</a:t>
+                <a:t>Cluster 4</a:t>
               </a:r>
               <a:endParaRPr lang="en-US" dirty="0">
-                <a:solidFill>
-                  <a:schemeClr val="bg1">
-                    <a:lumMod val="50000"/>
-                  </a:schemeClr>
-                </a:solidFill>
-              </a:endParaRPr>
-            </a:p>
-          </p:txBody>
-        </p:sp>
-        <p:sp>
-          <p:nvSpPr>
-            <p:cNvPr id="10" name="TextBox 9">
-              <a:extLst>
-                <a:ext uri="{FF2B5EF4-FFF2-40B4-BE49-F238E27FC236}">
-                  <a16:creationId xmlns:a16="http://schemas.microsoft.com/office/drawing/2014/main" id="{736F8240-5CB7-ACE7-6D56-D2B93671462A}"/>
-                </a:ext>
-              </a:extLst>
-            </p:cNvPr>
-            <p:cNvSpPr txBox="1"/>
-            <p:nvPr/>
-          </p:nvSpPr>
-          <p:spPr>
-            <a:xfrm>
-              <a:off x="2860894" y="6168625"/>
-              <a:ext cx="8238655" cy="369332"/>
-            </a:xfrm>
-            <a:prstGeom prst="rect">
-              <a:avLst/>
-            </a:prstGeom>
-            <a:noFill/>
-          </p:spPr>
-          <p:txBody>
-            <a:bodyPr wrap="square" rtlCol="0">
-              <a:spAutoFit/>
-            </a:bodyPr>
-            <a:lstStyle/>
-            <a:p>
-              <a:pPr algn="ctr"/>
-              <a:r>
-                <a:rPr lang="nl-BE" dirty="0">
-                  <a:solidFill>
-                    <a:schemeClr val="bg1">
-                      <a:lumMod val="50000"/>
-                    </a:schemeClr>
-                  </a:solidFill>
-                </a:rPr>
-                <a:t>Cluster 1</a:t>
-              </a:r>
-              <a:endParaRPr lang="en-US" dirty="0">
-                <a:solidFill>
-                  <a:schemeClr val="bg1">
-                    <a:lumMod val="50000"/>
-                  </a:schemeClr>
-                </a:solidFill>
-              </a:endParaRPr>
-            </a:p>
-          </p:txBody>
-        </p:sp>
-        <p:sp>
-          <p:nvSpPr>
-            <p:cNvPr id="11" name="Rectangle 10">
-              <a:extLst>
-                <a:ext uri="{FF2B5EF4-FFF2-40B4-BE49-F238E27FC236}">
-                  <a16:creationId xmlns:a16="http://schemas.microsoft.com/office/drawing/2014/main" id="{1A0C8B67-0A6F-3337-7292-31F9EA7D8C04}"/>
-                </a:ext>
-              </a:extLst>
-            </p:cNvPr>
-            <p:cNvSpPr/>
-            <p:nvPr/>
-          </p:nvSpPr>
-          <p:spPr>
-            <a:xfrm>
-              <a:off x="2906162" y="4137434"/>
-              <a:ext cx="2544024" cy="2008360"/>
-            </a:xfrm>
-            <a:prstGeom prst="rect">
-              <a:avLst/>
-            </a:prstGeom>
-            <a:noFill/>
-            <a:ln w="19050">
-              <a:solidFill>
-                <a:schemeClr val="tx1">
-                  <a:lumMod val="50000"/>
-                  <a:lumOff val="50000"/>
-                </a:schemeClr>
-              </a:solidFill>
-              <a:prstDash val="dash"/>
-            </a:ln>
-          </p:spPr>
-          <p:style>
-            <a:lnRef idx="2">
-              <a:schemeClr val="accent1">
-                <a:shade val="15000"/>
-              </a:schemeClr>
-            </a:lnRef>
-            <a:fillRef idx="1">
-              <a:schemeClr val="accent1"/>
-            </a:fillRef>
-            <a:effectRef idx="0">
-              <a:schemeClr val="accent1"/>
-            </a:effectRef>
-            <a:fontRef idx="minor">
-              <a:schemeClr val="lt1"/>
-            </a:fontRef>
-          </p:style>
-          <p:txBody>
-            <a:bodyPr rtlCol="0" anchor="ctr"/>
-            <a:lstStyle/>
-            <a:p>
-              <a:pPr algn="ctr"/>
-              <a:endParaRPr lang="en-US"/>
-            </a:p>
-          </p:txBody>
-        </p:sp>
-        <p:sp>
-          <p:nvSpPr>
-            <p:cNvPr id="13" name="Rectangle 12">
-              <a:extLst>
-                <a:ext uri="{FF2B5EF4-FFF2-40B4-BE49-F238E27FC236}">
-                  <a16:creationId xmlns:a16="http://schemas.microsoft.com/office/drawing/2014/main" id="{2824C5FC-C992-9A4C-618B-978DEDC2DD96}"/>
-                </a:ext>
-              </a:extLst>
-            </p:cNvPr>
-            <p:cNvSpPr/>
-            <p:nvPr/>
-          </p:nvSpPr>
-          <p:spPr>
-            <a:xfrm>
-              <a:off x="5450186" y="4137434"/>
-              <a:ext cx="1050202" cy="2008360"/>
-            </a:xfrm>
-            <a:prstGeom prst="rect">
-              <a:avLst/>
-            </a:prstGeom>
-            <a:noFill/>
-            <a:ln w="19050">
-              <a:solidFill>
-                <a:schemeClr val="tx1">
-                  <a:lumMod val="50000"/>
-                  <a:lumOff val="50000"/>
-                </a:schemeClr>
-              </a:solidFill>
-              <a:prstDash val="dash"/>
-            </a:ln>
-          </p:spPr>
-          <p:style>
-            <a:lnRef idx="2">
-              <a:schemeClr val="accent1">
-                <a:shade val="15000"/>
-              </a:schemeClr>
-            </a:lnRef>
-            <a:fillRef idx="1">
-              <a:schemeClr val="accent1"/>
-            </a:fillRef>
-            <a:effectRef idx="0">
-              <a:schemeClr val="accent1"/>
-            </a:effectRef>
-            <a:fontRef idx="minor">
-              <a:schemeClr val="lt1"/>
-            </a:fontRef>
-          </p:style>
-          <p:txBody>
-            <a:bodyPr rtlCol="0" anchor="ctr"/>
-            <a:lstStyle/>
-            <a:p>
-              <a:pPr algn="ctr"/>
-              <a:endParaRPr lang="en-US"/>
-            </a:p>
-          </p:txBody>
-        </p:sp>
-        <p:sp>
-          <p:nvSpPr>
-            <p:cNvPr id="14" name="Rectangle 13">
-              <a:extLst>
-                <a:ext uri="{FF2B5EF4-FFF2-40B4-BE49-F238E27FC236}">
-                  <a16:creationId xmlns:a16="http://schemas.microsoft.com/office/drawing/2014/main" id="{9D08AD6D-1B60-8ADB-6B48-B37A89324092}"/>
-                </a:ext>
-              </a:extLst>
-            </p:cNvPr>
-            <p:cNvSpPr/>
-            <p:nvPr/>
-          </p:nvSpPr>
-          <p:spPr>
-            <a:xfrm>
-              <a:off x="6500388" y="4137434"/>
-              <a:ext cx="1383671" cy="2008360"/>
-            </a:xfrm>
-            <a:prstGeom prst="rect">
-              <a:avLst/>
-            </a:prstGeom>
-            <a:noFill/>
-            <a:ln w="19050">
-              <a:solidFill>
-                <a:schemeClr val="tx1">
-                  <a:lumMod val="50000"/>
-                  <a:lumOff val="50000"/>
-                </a:schemeClr>
-              </a:solidFill>
-              <a:prstDash val="dash"/>
-            </a:ln>
-          </p:spPr>
-          <p:style>
-            <a:lnRef idx="2">
-              <a:schemeClr val="accent1">
-                <a:shade val="15000"/>
-              </a:schemeClr>
-            </a:lnRef>
-            <a:fillRef idx="1">
-              <a:schemeClr val="accent1"/>
-            </a:fillRef>
-            <a:effectRef idx="0">
-              <a:schemeClr val="accent1"/>
-            </a:effectRef>
-            <a:fontRef idx="minor">
-              <a:schemeClr val="lt1"/>
-            </a:fontRef>
-          </p:style>
-          <p:txBody>
-            <a:bodyPr rtlCol="0" anchor="ctr"/>
-            <a:lstStyle/>
-            <a:p>
-              <a:pPr algn="ctr"/>
-              <a:endParaRPr lang="en-US"/>
-            </a:p>
-          </p:txBody>
-        </p:sp>
-        <p:sp>
-          <p:nvSpPr>
-            <p:cNvPr id="15" name="Rectangle 14">
-              <a:extLst>
-                <a:ext uri="{FF2B5EF4-FFF2-40B4-BE49-F238E27FC236}">
-                  <a16:creationId xmlns:a16="http://schemas.microsoft.com/office/drawing/2014/main" id="{52E74963-778A-AD99-A804-B8DF629E9D21}"/>
-                </a:ext>
-              </a:extLst>
-            </p:cNvPr>
-            <p:cNvSpPr/>
-            <p:nvPr/>
-          </p:nvSpPr>
-          <p:spPr>
-            <a:xfrm>
-              <a:off x="7884059" y="4160265"/>
-              <a:ext cx="3184081" cy="2008360"/>
-            </a:xfrm>
-            <a:prstGeom prst="rect">
-              <a:avLst/>
-            </a:prstGeom>
-            <a:noFill/>
-            <a:ln w="19050">
-              <a:solidFill>
-                <a:schemeClr val="tx1">
-                  <a:lumMod val="50000"/>
-                  <a:lumOff val="50000"/>
-                </a:schemeClr>
-              </a:solidFill>
-              <a:prstDash val="dash"/>
-            </a:ln>
-          </p:spPr>
-          <p:style>
-            <a:lnRef idx="2">
-              <a:schemeClr val="accent1">
-                <a:shade val="15000"/>
-              </a:schemeClr>
-            </a:lnRef>
-            <a:fillRef idx="1">
-              <a:schemeClr val="accent1"/>
-            </a:fillRef>
-            <a:effectRef idx="0">
-              <a:schemeClr val="accent1"/>
-            </a:effectRef>
-            <a:fontRef idx="minor">
-              <a:schemeClr val="lt1"/>
-            </a:fontRef>
-          </p:style>
-          <p:txBody>
-            <a:bodyPr rtlCol="0" anchor="ctr"/>
-            <a:lstStyle/>
-            <a:p>
-              <a:pPr algn="ctr"/>
-              <a:endParaRPr lang="en-US"/>
-            </a:p>
-          </p:txBody>
-        </p:sp>
-        <p:sp>
-          <p:nvSpPr>
-            <p:cNvPr id="16" name="TextBox 15">
-              <a:extLst>
-                <a:ext uri="{FF2B5EF4-FFF2-40B4-BE49-F238E27FC236}">
-                  <a16:creationId xmlns:a16="http://schemas.microsoft.com/office/drawing/2014/main" id="{31DD3E44-6143-E91E-2F69-5F13C19C18AF}"/>
-                </a:ext>
-              </a:extLst>
-            </p:cNvPr>
-            <p:cNvSpPr txBox="1"/>
-            <p:nvPr/>
-          </p:nvSpPr>
-          <p:spPr>
-            <a:xfrm>
-              <a:off x="2906160" y="5856616"/>
-              <a:ext cx="2544024" cy="276999"/>
-            </a:xfrm>
-            <a:prstGeom prst="rect">
-              <a:avLst/>
-            </a:prstGeom>
-            <a:noFill/>
-          </p:spPr>
-          <p:txBody>
-            <a:bodyPr wrap="square" rtlCol="0">
-              <a:spAutoFit/>
-            </a:bodyPr>
-            <a:lstStyle/>
-            <a:p>
-              <a:pPr algn="ctr"/>
-              <a:r>
-                <a:rPr lang="nl-BE" sz="1200" dirty="0" err="1">
-                  <a:solidFill>
-                    <a:schemeClr val="bg1">
-                      <a:lumMod val="50000"/>
-                    </a:schemeClr>
-                  </a:solidFill>
-                </a:rPr>
-                <a:t>Subcluster</a:t>
-              </a:r>
-              <a:r>
-                <a:rPr lang="nl-BE" sz="1200" dirty="0">
-                  <a:solidFill>
-                    <a:schemeClr val="bg1">
-                      <a:lumMod val="50000"/>
-                    </a:schemeClr>
-                  </a:solidFill>
-                </a:rPr>
-                <a:t> 1</a:t>
-              </a:r>
-              <a:endParaRPr lang="en-US" sz="1200" dirty="0">
-                <a:solidFill>
-                  <a:schemeClr val="bg1">
-                    <a:lumMod val="50000"/>
-                  </a:schemeClr>
-                </a:solidFill>
-              </a:endParaRPr>
-            </a:p>
-          </p:txBody>
-        </p:sp>
-        <p:sp>
-          <p:nvSpPr>
-            <p:cNvPr id="17" name="TextBox 16">
-              <a:extLst>
-                <a:ext uri="{FF2B5EF4-FFF2-40B4-BE49-F238E27FC236}">
-                  <a16:creationId xmlns:a16="http://schemas.microsoft.com/office/drawing/2014/main" id="{B6748D67-C540-189F-05B5-E2FA5023B297}"/>
-                </a:ext>
-              </a:extLst>
-            </p:cNvPr>
-            <p:cNvSpPr txBox="1"/>
-            <p:nvPr/>
-          </p:nvSpPr>
-          <p:spPr>
-            <a:xfrm>
-              <a:off x="5450186" y="5847273"/>
-              <a:ext cx="1050200" cy="276999"/>
-            </a:xfrm>
-            <a:prstGeom prst="rect">
-              <a:avLst/>
-            </a:prstGeom>
-            <a:noFill/>
-          </p:spPr>
-          <p:txBody>
-            <a:bodyPr wrap="square" rtlCol="0">
-              <a:spAutoFit/>
-            </a:bodyPr>
-            <a:lstStyle/>
-            <a:p>
-              <a:pPr algn="ctr"/>
-              <a:r>
-                <a:rPr lang="nl-BE" sz="1200" dirty="0" err="1">
-                  <a:solidFill>
-                    <a:schemeClr val="bg1">
-                      <a:lumMod val="50000"/>
-                    </a:schemeClr>
-                  </a:solidFill>
-                </a:rPr>
-                <a:t>Subcluster</a:t>
-              </a:r>
-              <a:r>
-                <a:rPr lang="nl-BE" sz="1200" dirty="0">
-                  <a:solidFill>
-                    <a:schemeClr val="bg1">
-                      <a:lumMod val="50000"/>
-                    </a:schemeClr>
-                  </a:solidFill>
-                </a:rPr>
-                <a:t> 2</a:t>
-              </a:r>
-              <a:endParaRPr lang="en-US" sz="1200" dirty="0">
-                <a:solidFill>
-                  <a:schemeClr val="bg1">
-                    <a:lumMod val="50000"/>
-                  </a:schemeClr>
-                </a:solidFill>
-              </a:endParaRPr>
-            </a:p>
-          </p:txBody>
-        </p:sp>
-        <p:sp>
-          <p:nvSpPr>
-            <p:cNvPr id="18" name="TextBox 17">
-              <a:extLst>
-                <a:ext uri="{FF2B5EF4-FFF2-40B4-BE49-F238E27FC236}">
-                  <a16:creationId xmlns:a16="http://schemas.microsoft.com/office/drawing/2014/main" id="{D0BE79D5-DE12-F250-3735-A0F831ED9C87}"/>
-                </a:ext>
-              </a:extLst>
-            </p:cNvPr>
-            <p:cNvSpPr txBox="1"/>
-            <p:nvPr/>
-          </p:nvSpPr>
-          <p:spPr>
-            <a:xfrm>
-              <a:off x="6500387" y="5856616"/>
-              <a:ext cx="1383672" cy="276999"/>
-            </a:xfrm>
-            <a:prstGeom prst="rect">
-              <a:avLst/>
-            </a:prstGeom>
-            <a:noFill/>
-          </p:spPr>
-          <p:txBody>
-            <a:bodyPr wrap="square" rtlCol="0">
-              <a:spAutoFit/>
-            </a:bodyPr>
-            <a:lstStyle/>
-            <a:p>
-              <a:pPr algn="ctr"/>
-              <a:r>
-                <a:rPr lang="nl-BE" sz="1200" dirty="0" err="1">
-                  <a:solidFill>
-                    <a:schemeClr val="bg1">
-                      <a:lumMod val="50000"/>
-                    </a:schemeClr>
-                  </a:solidFill>
-                </a:rPr>
-                <a:t>Subcluster</a:t>
-              </a:r>
-              <a:r>
-                <a:rPr lang="nl-BE" sz="1200" dirty="0">
-                  <a:solidFill>
-                    <a:schemeClr val="bg1">
-                      <a:lumMod val="50000"/>
-                    </a:schemeClr>
-                  </a:solidFill>
-                </a:rPr>
-                <a:t> 3</a:t>
-              </a:r>
-              <a:endParaRPr lang="en-US" sz="1200" dirty="0">
-                <a:solidFill>
-                  <a:schemeClr val="bg1">
-                    <a:lumMod val="50000"/>
-                  </a:schemeClr>
-                </a:solidFill>
-              </a:endParaRPr>
-            </a:p>
-          </p:txBody>
-        </p:sp>
-        <p:sp>
-          <p:nvSpPr>
-            <p:cNvPr id="19" name="TextBox 18">
-              <a:extLst>
-                <a:ext uri="{FF2B5EF4-FFF2-40B4-BE49-F238E27FC236}">
-                  <a16:creationId xmlns:a16="http://schemas.microsoft.com/office/drawing/2014/main" id="{F47CF5A1-1433-17B1-8B5E-457583DD7EED}"/>
-                </a:ext>
-              </a:extLst>
-            </p:cNvPr>
-            <p:cNvSpPr txBox="1"/>
-            <p:nvPr/>
-          </p:nvSpPr>
-          <p:spPr>
-            <a:xfrm>
-              <a:off x="7884060" y="5870104"/>
-              <a:ext cx="3215490" cy="276999"/>
-            </a:xfrm>
-            <a:prstGeom prst="rect">
-              <a:avLst/>
-            </a:prstGeom>
-            <a:noFill/>
-          </p:spPr>
-          <p:txBody>
-            <a:bodyPr wrap="square" rtlCol="0">
-              <a:spAutoFit/>
-            </a:bodyPr>
-            <a:lstStyle/>
-            <a:p>
-              <a:pPr algn="ctr"/>
-              <a:r>
-                <a:rPr lang="nl-BE" sz="1200" dirty="0" err="1">
-                  <a:solidFill>
-                    <a:schemeClr val="bg1">
-                      <a:lumMod val="50000"/>
-                    </a:schemeClr>
-                  </a:solidFill>
-                </a:rPr>
-                <a:t>Subcluster</a:t>
-              </a:r>
-              <a:r>
-                <a:rPr lang="nl-BE" sz="1200" dirty="0">
-                  <a:solidFill>
-                    <a:schemeClr val="bg1">
-                      <a:lumMod val="50000"/>
-                    </a:schemeClr>
-                  </a:solidFill>
-                </a:rPr>
-                <a:t> 4</a:t>
-              </a:r>
-              <a:endParaRPr lang="en-US" sz="1200" dirty="0">
                 <a:solidFill>
                   <a:schemeClr val="bg1">
                     <a:lumMod val="50000"/>
@@ -6510,7 +9456,7 @@
     </p:spTree>
     <p:extLst>
       <p:ext uri="{BB962C8B-B14F-4D97-AF65-F5344CB8AC3E}">
-        <p14:creationId xmlns:p14="http://schemas.microsoft.com/office/powerpoint/2010/main" val="279204721"/>
+        <p14:creationId xmlns:p14="http://schemas.microsoft.com/office/powerpoint/2010/main" val="3827089126"/>
       </p:ext>
     </p:extLst>
   </p:cSld>
@@ -6520,7 +9466,7 @@
 </p:sld>
 </file>
 
-<file path=ppt/slides/slide3.xml><?xml version="1.0" encoding="utf-8"?>
+<file path=ppt/slides/slide31.xml><?xml version="1.0" encoding="utf-8"?>
 <p:sld xmlns:a="http://schemas.openxmlformats.org/drawingml/2006/main" xmlns:r="http://schemas.openxmlformats.org/officeDocument/2006/relationships" xmlns:p="http://schemas.openxmlformats.org/presentationml/2006/main">
   <p:cSld>
     <p:spTree>
@@ -6537,628 +9483,100 @@
           <a:chExt cx="0" cy="0"/>
         </a:xfrm>
       </p:grpSpPr>
-      <p:grpSp>
-        <p:nvGrpSpPr>
-          <p:cNvPr id="20" name="Group 19">
+      <p:pic>
+        <p:nvPicPr>
+          <p:cNvPr id="2" name="Picture 1">
             <a:extLst>
               <a:ext uri="{FF2B5EF4-FFF2-40B4-BE49-F238E27FC236}">
-                <a16:creationId xmlns:a16="http://schemas.microsoft.com/office/drawing/2014/main" id="{9748C1A8-FD63-FEF0-EBC4-5B6E7BDE84E7}"/>
+                <a16:creationId xmlns:a16="http://schemas.microsoft.com/office/drawing/2014/main" id="{9C7BCDBC-0CB1-E433-469B-3CAADD740DEC}"/>
               </a:ext>
             </a:extLst>
           </p:cNvPr>
-          <p:cNvGrpSpPr/>
+          <p:cNvPicPr>
+            <a:picLocks noChangeAspect="1"/>
+          </p:cNvPicPr>
           <p:nvPr/>
-        </p:nvGrpSpPr>
-        <p:grpSpPr>
+        </p:nvPicPr>
+        <p:blipFill>
+          <a:blip r:embed="rId3"/>
+          <a:stretch>
+            <a:fillRect/>
+          </a:stretch>
+        </p:blipFill>
+        <p:spPr>
           <a:xfrm>
-            <a:off x="1685652" y="814041"/>
-            <a:ext cx="8651422" cy="6043959"/>
-            <a:chOff x="1685652" y="814041"/>
-            <a:chExt cx="8651422" cy="6043959"/>
+            <a:off x="0" y="557090"/>
+            <a:ext cx="12192000" cy="5743819"/>
           </a:xfrm>
-        </p:grpSpPr>
-        <p:grpSp>
-          <p:nvGrpSpPr>
-            <p:cNvPr id="19" name="Group 18">
-              <a:extLst>
-                <a:ext uri="{FF2B5EF4-FFF2-40B4-BE49-F238E27FC236}">
-                  <a16:creationId xmlns:a16="http://schemas.microsoft.com/office/drawing/2014/main" id="{B7799CCD-D791-3337-CACE-305C212D8EC9}"/>
-                </a:ext>
-              </a:extLst>
-            </p:cNvPr>
-            <p:cNvGrpSpPr/>
-            <p:nvPr/>
-          </p:nvGrpSpPr>
-          <p:grpSpPr>
-            <a:xfrm>
-              <a:off x="1685652" y="814041"/>
-              <a:ext cx="8651422" cy="6043959"/>
-              <a:chOff x="1685652" y="814041"/>
-              <a:chExt cx="8651422" cy="6043959"/>
-            </a:xfrm>
-          </p:grpSpPr>
-          <p:pic>
-            <p:nvPicPr>
-              <p:cNvPr id="2" name="Picture 1">
-                <a:extLst>
-                  <a:ext uri="{FF2B5EF4-FFF2-40B4-BE49-F238E27FC236}">
-                    <a16:creationId xmlns:a16="http://schemas.microsoft.com/office/drawing/2014/main" id="{C51B3A69-2814-9600-8A9F-BC4DC8FD115C}"/>
-                  </a:ext>
-                </a:extLst>
-              </p:cNvPr>
-              <p:cNvPicPr>
-                <a:picLocks noChangeAspect="1"/>
-              </p:cNvPicPr>
-              <p:nvPr/>
-            </p:nvPicPr>
-            <p:blipFill>
-              <a:blip r:embed="rId2"/>
-              <a:srcRect t="18325"/>
-              <a:stretch/>
-            </p:blipFill>
-            <p:spPr>
-              <a:xfrm>
-                <a:off x="1685653" y="2407614"/>
-                <a:ext cx="8651421" cy="4450386"/>
-              </a:xfrm>
-              <a:prstGeom prst="rect">
-                <a:avLst/>
-              </a:prstGeom>
-            </p:spPr>
-          </p:pic>
-          <p:grpSp>
-            <p:nvGrpSpPr>
-              <p:cNvPr id="5" name="Group 4">
-                <a:extLst>
-                  <a:ext uri="{FF2B5EF4-FFF2-40B4-BE49-F238E27FC236}">
-                    <a16:creationId xmlns:a16="http://schemas.microsoft.com/office/drawing/2014/main" id="{BC0BA221-A253-794D-9A3C-4247663E35FC}"/>
-                  </a:ext>
-                </a:extLst>
-              </p:cNvPr>
-              <p:cNvGrpSpPr/>
-              <p:nvPr/>
-            </p:nvGrpSpPr>
-            <p:grpSpPr>
-              <a:xfrm>
-                <a:off x="1685652" y="814041"/>
-                <a:ext cx="8651421" cy="1593573"/>
-                <a:chOff x="-3099706" y="1418545"/>
-                <a:chExt cx="10858500" cy="2010455"/>
-              </a:xfrm>
-            </p:grpSpPr>
-            <p:pic>
-              <p:nvPicPr>
-                <p:cNvPr id="3" name="Picture 2">
-                  <a:extLst>
-                    <a:ext uri="{FF2B5EF4-FFF2-40B4-BE49-F238E27FC236}">
-                      <a16:creationId xmlns:a16="http://schemas.microsoft.com/office/drawing/2014/main" id="{86DF322A-BA72-4CCE-D86F-AB32EA10093C}"/>
-                    </a:ext>
-                  </a:extLst>
-                </p:cNvPr>
-                <p:cNvPicPr>
-                  <a:picLocks noChangeAspect="1"/>
-                </p:cNvPicPr>
-                <p:nvPr/>
-              </p:nvPicPr>
-              <p:blipFill>
-                <a:blip r:embed="rId3"/>
-                <a:srcRect t="90080"/>
-                <a:stretch/>
-              </p:blipFill>
-              <p:spPr>
-                <a:xfrm>
-                  <a:off x="-3099706" y="2750548"/>
-                  <a:ext cx="10858500" cy="678452"/>
-                </a:xfrm>
-                <a:prstGeom prst="rect">
-                  <a:avLst/>
-                </a:prstGeom>
-              </p:spPr>
-            </p:pic>
-            <p:pic>
-              <p:nvPicPr>
-                <p:cNvPr id="4" name="Picture 3">
-                  <a:extLst>
-                    <a:ext uri="{FF2B5EF4-FFF2-40B4-BE49-F238E27FC236}">
-                      <a16:creationId xmlns:a16="http://schemas.microsoft.com/office/drawing/2014/main" id="{9644C86B-3EF3-D178-47DC-5F9CECE887B1}"/>
-                    </a:ext>
-                  </a:extLst>
-                </p:cNvPr>
-                <p:cNvPicPr>
-                  <a:picLocks noChangeAspect="1"/>
-                </p:cNvPicPr>
-                <p:nvPr/>
-              </p:nvPicPr>
-              <p:blipFill>
-                <a:blip r:embed="rId3"/>
-                <a:srcRect b="80523"/>
-                <a:stretch/>
-              </p:blipFill>
-              <p:spPr>
-                <a:xfrm>
-                  <a:off x="-3099706" y="1418545"/>
-                  <a:ext cx="10858500" cy="1332003"/>
-                </a:xfrm>
-                <a:prstGeom prst="rect">
-                  <a:avLst/>
-                </a:prstGeom>
-              </p:spPr>
-            </p:pic>
-          </p:grpSp>
-        </p:grpSp>
-        <p:sp>
-          <p:nvSpPr>
-            <p:cNvPr id="6" name="TextBox 5">
-              <a:extLst>
-                <a:ext uri="{FF2B5EF4-FFF2-40B4-BE49-F238E27FC236}">
-                  <a16:creationId xmlns:a16="http://schemas.microsoft.com/office/drawing/2014/main" id="{ED2AC89E-4012-8F3D-85B6-1CE0D991512B}"/>
-                </a:ext>
-              </a:extLst>
-            </p:cNvPr>
-            <p:cNvSpPr txBox="1"/>
-            <p:nvPr/>
-          </p:nvSpPr>
-          <p:spPr>
-            <a:xfrm>
-              <a:off x="6226628" y="1487239"/>
-              <a:ext cx="287383" cy="369332"/>
-            </a:xfrm>
-            <a:prstGeom prst="rect">
-              <a:avLst/>
-            </a:prstGeom>
-            <a:noFill/>
-          </p:spPr>
-          <p:txBody>
-            <a:bodyPr wrap="square" rtlCol="0">
-              <a:spAutoFit/>
-            </a:bodyPr>
-            <a:lstStyle/>
-            <a:p>
-              <a:r>
-                <a:rPr lang="nl-BE" dirty="0"/>
-                <a:t>*</a:t>
-              </a:r>
-              <a:endParaRPr lang="en-US" dirty="0"/>
-            </a:p>
-          </p:txBody>
-        </p:sp>
-        <p:sp>
-          <p:nvSpPr>
-            <p:cNvPr id="7" name="TextBox 6">
-              <a:extLst>
-                <a:ext uri="{FF2B5EF4-FFF2-40B4-BE49-F238E27FC236}">
-                  <a16:creationId xmlns:a16="http://schemas.microsoft.com/office/drawing/2014/main" id="{74A4BDF4-B9C0-0A5F-F1CA-26ECE90217CB}"/>
-                </a:ext>
-              </a:extLst>
-            </p:cNvPr>
-            <p:cNvSpPr txBox="1"/>
-            <p:nvPr/>
-          </p:nvSpPr>
-          <p:spPr>
-            <a:xfrm>
-              <a:off x="6770914" y="5695387"/>
-              <a:ext cx="287383" cy="369332"/>
-            </a:xfrm>
-            <a:prstGeom prst="rect">
-              <a:avLst/>
-            </a:prstGeom>
-            <a:noFill/>
-          </p:spPr>
-          <p:txBody>
-            <a:bodyPr wrap="square" rtlCol="0">
-              <a:spAutoFit/>
-            </a:bodyPr>
-            <a:lstStyle/>
-            <a:p>
-              <a:r>
-                <a:rPr lang="nl-BE" dirty="0"/>
-                <a:t>*</a:t>
-              </a:r>
-              <a:endParaRPr lang="en-US" dirty="0"/>
-            </a:p>
-          </p:txBody>
-        </p:sp>
-        <p:sp>
-          <p:nvSpPr>
-            <p:cNvPr id="8" name="TextBox 7">
-              <a:extLst>
-                <a:ext uri="{FF2B5EF4-FFF2-40B4-BE49-F238E27FC236}">
-                  <a16:creationId xmlns:a16="http://schemas.microsoft.com/office/drawing/2014/main" id="{E3BECAA9-86A3-F611-1F5A-A8F35EE5F0F9}"/>
-                </a:ext>
-              </a:extLst>
-            </p:cNvPr>
-            <p:cNvSpPr txBox="1"/>
-            <p:nvPr/>
-          </p:nvSpPr>
-          <p:spPr>
-            <a:xfrm>
-              <a:off x="7593874" y="3725705"/>
-              <a:ext cx="287383" cy="369332"/>
-            </a:xfrm>
-            <a:prstGeom prst="rect">
-              <a:avLst/>
-            </a:prstGeom>
-            <a:noFill/>
-          </p:spPr>
-          <p:txBody>
-            <a:bodyPr wrap="square" rtlCol="0">
-              <a:spAutoFit/>
-            </a:bodyPr>
-            <a:lstStyle/>
-            <a:p>
-              <a:r>
-                <a:rPr lang="nl-BE" dirty="0"/>
-                <a:t>*</a:t>
-              </a:r>
-              <a:endParaRPr lang="en-US" dirty="0"/>
-            </a:p>
-          </p:txBody>
-        </p:sp>
-        <p:sp>
-          <p:nvSpPr>
-            <p:cNvPr id="9" name="TextBox 8">
-              <a:extLst>
-                <a:ext uri="{FF2B5EF4-FFF2-40B4-BE49-F238E27FC236}">
-                  <a16:creationId xmlns:a16="http://schemas.microsoft.com/office/drawing/2014/main" id="{A83321D3-C6E6-87A0-F6A3-885611C63D4D}"/>
-                </a:ext>
-              </a:extLst>
-            </p:cNvPr>
-            <p:cNvSpPr txBox="1"/>
-            <p:nvPr/>
-          </p:nvSpPr>
-          <p:spPr>
-            <a:xfrm>
-              <a:off x="6483531" y="3404224"/>
-              <a:ext cx="287383" cy="369332"/>
-            </a:xfrm>
-            <a:prstGeom prst="rect">
-              <a:avLst/>
-            </a:prstGeom>
-            <a:noFill/>
-          </p:spPr>
-          <p:txBody>
-            <a:bodyPr wrap="square" rtlCol="0">
-              <a:spAutoFit/>
-            </a:bodyPr>
-            <a:lstStyle/>
-            <a:p>
-              <a:r>
-                <a:rPr lang="nl-BE" dirty="0"/>
-                <a:t>*</a:t>
-              </a:r>
-              <a:endParaRPr lang="en-US" dirty="0"/>
-            </a:p>
-          </p:txBody>
-        </p:sp>
-        <p:sp>
-          <p:nvSpPr>
-            <p:cNvPr id="10" name="TextBox 9">
-              <a:extLst>
-                <a:ext uri="{FF2B5EF4-FFF2-40B4-BE49-F238E27FC236}">
-                  <a16:creationId xmlns:a16="http://schemas.microsoft.com/office/drawing/2014/main" id="{742DB4F4-F586-60F4-BE0B-878AFCCBCC06}"/>
-                </a:ext>
-              </a:extLst>
-            </p:cNvPr>
-            <p:cNvSpPr txBox="1"/>
-            <p:nvPr/>
-          </p:nvSpPr>
-          <p:spPr>
-            <a:xfrm>
-              <a:off x="6096000" y="1186873"/>
-              <a:ext cx="287383" cy="369332"/>
-            </a:xfrm>
-            <a:prstGeom prst="rect">
-              <a:avLst/>
-            </a:prstGeom>
-            <a:noFill/>
-          </p:spPr>
-          <p:txBody>
-            <a:bodyPr wrap="square" rtlCol="0">
-              <a:spAutoFit/>
-            </a:bodyPr>
-            <a:lstStyle/>
-            <a:p>
-              <a:r>
-                <a:rPr lang="nl-BE" dirty="0"/>
-                <a:t>*</a:t>
-              </a:r>
-              <a:endParaRPr lang="en-US" dirty="0"/>
-            </a:p>
-          </p:txBody>
-        </p:sp>
-        <p:sp>
-          <p:nvSpPr>
-            <p:cNvPr id="11" name="TextBox 10">
-              <a:extLst>
-                <a:ext uri="{FF2B5EF4-FFF2-40B4-BE49-F238E27FC236}">
-                  <a16:creationId xmlns:a16="http://schemas.microsoft.com/office/drawing/2014/main" id="{5114AD73-D6B4-A339-D2C2-682CFE2DE73C}"/>
-                </a:ext>
-              </a:extLst>
-            </p:cNvPr>
-            <p:cNvSpPr txBox="1"/>
-            <p:nvPr/>
-          </p:nvSpPr>
-          <p:spPr>
-            <a:xfrm>
-              <a:off x="8255725" y="2453468"/>
-              <a:ext cx="287383" cy="369332"/>
-            </a:xfrm>
-            <a:prstGeom prst="rect">
-              <a:avLst/>
-            </a:prstGeom>
-            <a:noFill/>
-          </p:spPr>
-          <p:txBody>
-            <a:bodyPr wrap="square" rtlCol="0">
-              <a:spAutoFit/>
-            </a:bodyPr>
-            <a:lstStyle/>
-            <a:p>
-              <a:r>
-                <a:rPr lang="nl-BE" dirty="0"/>
-                <a:t>*</a:t>
-              </a:r>
-              <a:endParaRPr lang="en-US" dirty="0"/>
-            </a:p>
-          </p:txBody>
-        </p:sp>
-        <p:sp>
-          <p:nvSpPr>
-            <p:cNvPr id="12" name="TextBox 11">
-              <a:extLst>
-                <a:ext uri="{FF2B5EF4-FFF2-40B4-BE49-F238E27FC236}">
-                  <a16:creationId xmlns:a16="http://schemas.microsoft.com/office/drawing/2014/main" id="{DC86B0F3-FD07-3697-B85F-A891C25429CA}"/>
-                </a:ext>
-              </a:extLst>
-            </p:cNvPr>
-            <p:cNvSpPr txBox="1"/>
-            <p:nvPr/>
-          </p:nvSpPr>
-          <p:spPr>
-            <a:xfrm>
-              <a:off x="8255725" y="2740981"/>
-              <a:ext cx="287383" cy="369332"/>
-            </a:xfrm>
-            <a:prstGeom prst="rect">
-              <a:avLst/>
-            </a:prstGeom>
-            <a:noFill/>
-          </p:spPr>
-          <p:txBody>
-            <a:bodyPr wrap="square" rtlCol="0">
-              <a:spAutoFit/>
-            </a:bodyPr>
-            <a:lstStyle/>
-            <a:p>
-              <a:r>
-                <a:rPr lang="nl-BE" dirty="0"/>
-                <a:t>*</a:t>
-              </a:r>
-              <a:endParaRPr lang="en-US" dirty="0"/>
-            </a:p>
-          </p:txBody>
-        </p:sp>
-        <p:sp>
-          <p:nvSpPr>
-            <p:cNvPr id="13" name="TextBox 12">
-              <a:extLst>
-                <a:ext uri="{FF2B5EF4-FFF2-40B4-BE49-F238E27FC236}">
-                  <a16:creationId xmlns:a16="http://schemas.microsoft.com/office/drawing/2014/main" id="{FBCBCECC-4ADB-940A-6E54-43EF0BFF5D9A}"/>
-                </a:ext>
-              </a:extLst>
-            </p:cNvPr>
-            <p:cNvSpPr txBox="1"/>
-            <p:nvPr/>
-          </p:nvSpPr>
-          <p:spPr>
-            <a:xfrm>
-              <a:off x="8255724" y="4078809"/>
-              <a:ext cx="287383" cy="369332"/>
-            </a:xfrm>
-            <a:prstGeom prst="rect">
-              <a:avLst/>
-            </a:prstGeom>
-            <a:noFill/>
-          </p:spPr>
-          <p:txBody>
-            <a:bodyPr wrap="square" rtlCol="0">
-              <a:spAutoFit/>
-            </a:bodyPr>
-            <a:lstStyle/>
-            <a:p>
-              <a:r>
-                <a:rPr lang="nl-BE" dirty="0"/>
-                <a:t>*</a:t>
-              </a:r>
-              <a:endParaRPr lang="en-US" dirty="0"/>
-            </a:p>
-          </p:txBody>
-        </p:sp>
-        <p:sp>
-          <p:nvSpPr>
-            <p:cNvPr id="14" name="TextBox 13">
-              <a:extLst>
-                <a:ext uri="{FF2B5EF4-FFF2-40B4-BE49-F238E27FC236}">
-                  <a16:creationId xmlns:a16="http://schemas.microsoft.com/office/drawing/2014/main" id="{E724F163-4B83-AAC2-9313-351E07109EE2}"/>
-                </a:ext>
-              </a:extLst>
-            </p:cNvPr>
-            <p:cNvSpPr txBox="1"/>
-            <p:nvPr/>
-          </p:nvSpPr>
-          <p:spPr>
-            <a:xfrm>
-              <a:off x="5821680" y="1500512"/>
-              <a:ext cx="287383" cy="369332"/>
-            </a:xfrm>
-            <a:prstGeom prst="rect">
-              <a:avLst/>
-            </a:prstGeom>
-            <a:noFill/>
-          </p:spPr>
-          <p:txBody>
-            <a:bodyPr wrap="square" rtlCol="0">
-              <a:spAutoFit/>
-            </a:bodyPr>
-            <a:lstStyle/>
-            <a:p>
-              <a:r>
-                <a:rPr lang="nl-BE" dirty="0"/>
-                <a:t>*</a:t>
-              </a:r>
-              <a:endParaRPr lang="en-US" dirty="0"/>
-            </a:p>
-          </p:txBody>
-        </p:sp>
-        <p:sp>
-          <p:nvSpPr>
-            <p:cNvPr id="15" name="TextBox 14">
-              <a:extLst>
-                <a:ext uri="{FF2B5EF4-FFF2-40B4-BE49-F238E27FC236}">
-                  <a16:creationId xmlns:a16="http://schemas.microsoft.com/office/drawing/2014/main" id="{97C6E5FC-DFF0-BA84-A037-D107BEAB367A}"/>
-                </a:ext>
-              </a:extLst>
-            </p:cNvPr>
-            <p:cNvSpPr txBox="1"/>
-            <p:nvPr/>
-          </p:nvSpPr>
-          <p:spPr>
-            <a:xfrm>
-              <a:off x="5277395" y="5695387"/>
-              <a:ext cx="287383" cy="369332"/>
-            </a:xfrm>
-            <a:prstGeom prst="rect">
-              <a:avLst/>
-            </a:prstGeom>
-            <a:noFill/>
-          </p:spPr>
-          <p:txBody>
-            <a:bodyPr wrap="square" rtlCol="0">
-              <a:spAutoFit/>
-            </a:bodyPr>
-            <a:lstStyle/>
-            <a:p>
-              <a:r>
-                <a:rPr lang="nl-BE" dirty="0"/>
-                <a:t>*</a:t>
-              </a:r>
-              <a:endParaRPr lang="en-US" dirty="0"/>
-            </a:p>
-          </p:txBody>
-        </p:sp>
-        <p:sp>
-          <p:nvSpPr>
-            <p:cNvPr id="16" name="TextBox 15">
-              <a:extLst>
-                <a:ext uri="{FF2B5EF4-FFF2-40B4-BE49-F238E27FC236}">
-                  <a16:creationId xmlns:a16="http://schemas.microsoft.com/office/drawing/2014/main" id="{ACCC1E26-F017-6B4E-E9D3-98802F4D305E}"/>
-                </a:ext>
-              </a:extLst>
-            </p:cNvPr>
-            <p:cNvSpPr txBox="1"/>
-            <p:nvPr/>
-          </p:nvSpPr>
-          <p:spPr>
-            <a:xfrm>
-              <a:off x="3971108" y="1186873"/>
-              <a:ext cx="287383" cy="369332"/>
-            </a:xfrm>
-            <a:prstGeom prst="rect">
-              <a:avLst/>
-            </a:prstGeom>
-            <a:noFill/>
-          </p:spPr>
-          <p:txBody>
-            <a:bodyPr wrap="square" rtlCol="0">
-              <a:spAutoFit/>
-            </a:bodyPr>
-            <a:lstStyle/>
-            <a:p>
-              <a:r>
-                <a:rPr lang="nl-BE" dirty="0"/>
-                <a:t>*</a:t>
-              </a:r>
-              <a:endParaRPr lang="en-US" dirty="0"/>
-            </a:p>
-          </p:txBody>
-        </p:sp>
-        <p:sp>
-          <p:nvSpPr>
-            <p:cNvPr id="17" name="TextBox 16">
-              <a:extLst>
-                <a:ext uri="{FF2B5EF4-FFF2-40B4-BE49-F238E27FC236}">
-                  <a16:creationId xmlns:a16="http://schemas.microsoft.com/office/drawing/2014/main" id="{1B8D3CE3-CA13-3C47-7ECF-04512EE6F60E}"/>
-                </a:ext>
-              </a:extLst>
-            </p:cNvPr>
-            <p:cNvSpPr txBox="1"/>
-            <p:nvPr/>
-          </p:nvSpPr>
-          <p:spPr>
-            <a:xfrm>
-              <a:off x="5564778" y="3725705"/>
-              <a:ext cx="287383" cy="369332"/>
-            </a:xfrm>
-            <a:prstGeom prst="rect">
-              <a:avLst/>
-            </a:prstGeom>
-            <a:noFill/>
-          </p:spPr>
-          <p:txBody>
-            <a:bodyPr wrap="square" rtlCol="0">
-              <a:spAutoFit/>
-            </a:bodyPr>
-            <a:lstStyle/>
-            <a:p>
-              <a:r>
-                <a:rPr lang="nl-BE" dirty="0"/>
-                <a:t>*</a:t>
-              </a:r>
-              <a:endParaRPr lang="en-US" dirty="0"/>
-            </a:p>
-          </p:txBody>
-        </p:sp>
-        <p:sp>
-          <p:nvSpPr>
-            <p:cNvPr id="18" name="TextBox 17">
-              <a:extLst>
-                <a:ext uri="{FF2B5EF4-FFF2-40B4-BE49-F238E27FC236}">
-                  <a16:creationId xmlns:a16="http://schemas.microsoft.com/office/drawing/2014/main" id="{DA206639-B354-CFFD-15A7-8F622BAD3525}"/>
-                </a:ext>
-              </a:extLst>
-            </p:cNvPr>
-            <p:cNvSpPr txBox="1"/>
-            <p:nvPr/>
-          </p:nvSpPr>
-          <p:spPr>
-            <a:xfrm>
-              <a:off x="4262847" y="3412066"/>
-              <a:ext cx="287383" cy="369332"/>
-            </a:xfrm>
-            <a:prstGeom prst="rect">
-              <a:avLst/>
-            </a:prstGeom>
-            <a:noFill/>
-          </p:spPr>
-          <p:txBody>
-            <a:bodyPr wrap="square" rtlCol="0">
-              <a:spAutoFit/>
-            </a:bodyPr>
-            <a:lstStyle/>
-            <a:p>
-              <a:r>
-                <a:rPr lang="nl-BE" dirty="0"/>
-                <a:t>*</a:t>
-              </a:r>
-              <a:endParaRPr lang="en-US" dirty="0"/>
-            </a:p>
-          </p:txBody>
-        </p:sp>
-      </p:grpSp>
+          <a:prstGeom prst="rect">
+            <a:avLst/>
+          </a:prstGeom>
+        </p:spPr>
+      </p:pic>
     </p:spTree>
     <p:extLst>
       <p:ext uri="{BB962C8B-B14F-4D97-AF65-F5344CB8AC3E}">
-        <p14:creationId xmlns:p14="http://schemas.microsoft.com/office/powerpoint/2010/main" val="2189420211"/>
+        <p14:creationId xmlns:p14="http://schemas.microsoft.com/office/powerpoint/2010/main" val="3383698100"/>
+      </p:ext>
+    </p:extLst>
+  </p:cSld>
+  <p:clrMapOvr>
+    <a:masterClrMapping/>
+  </p:clrMapOvr>
+</p:sld>
+</file>
+
+<file path=ppt/slides/slide32.xml><?xml version="1.0" encoding="utf-8"?>
+<p:sld xmlns:a="http://schemas.openxmlformats.org/drawingml/2006/main" xmlns:r="http://schemas.openxmlformats.org/officeDocument/2006/relationships" xmlns:p="http://schemas.openxmlformats.org/presentationml/2006/main">
+  <p:cSld>
+    <p:spTree>
+      <p:nvGrpSpPr>
+        <p:cNvPr id="1" name=""/>
+        <p:cNvGrpSpPr/>
+        <p:nvPr/>
+      </p:nvGrpSpPr>
+      <p:grpSpPr>
+        <a:xfrm>
+          <a:off x="0" y="0"/>
+          <a:ext cx="0" cy="0"/>
+          <a:chOff x="0" y="0"/>
+          <a:chExt cx="0" cy="0"/>
+        </a:xfrm>
+      </p:grpSpPr>
+      <p:pic>
+        <p:nvPicPr>
+          <p:cNvPr id="2" name="Picture 1">
+            <a:extLst>
+              <a:ext uri="{FF2B5EF4-FFF2-40B4-BE49-F238E27FC236}">
+                <a16:creationId xmlns:a16="http://schemas.microsoft.com/office/drawing/2014/main" id="{B0A7E23D-8116-4DA5-BD13-D1568B22F60F}"/>
+              </a:ext>
+            </a:extLst>
+          </p:cNvPr>
+          <p:cNvPicPr>
+            <a:picLocks noChangeAspect="1"/>
+          </p:cNvPicPr>
+          <p:nvPr/>
+        </p:nvPicPr>
+        <p:blipFill>
+          <a:blip r:embed="rId3"/>
+          <a:stretch>
+            <a:fillRect/>
+          </a:stretch>
+        </p:blipFill>
+        <p:spPr>
+          <a:xfrm>
+            <a:off x="0" y="557090"/>
+            <a:ext cx="12192000" cy="5743819"/>
+          </a:xfrm>
+          <a:prstGeom prst="rect">
+            <a:avLst/>
+          </a:prstGeom>
+        </p:spPr>
+      </p:pic>
+    </p:spTree>
+    <p:extLst>
+      <p:ext uri="{BB962C8B-B14F-4D97-AF65-F5344CB8AC3E}">
+        <p14:creationId xmlns:p14="http://schemas.microsoft.com/office/powerpoint/2010/main" val="2982277789"/>
       </p:ext>
     </p:extLst>
   </p:cSld>
@@ -7185,12 +9603,72 @@
           <a:chExt cx="0" cy="0"/>
         </a:xfrm>
       </p:grpSpPr>
+      <p:pic>
+        <p:nvPicPr>
+          <p:cNvPr id="4" name="Picture 3">
+            <a:extLst>
+              <a:ext uri="{FF2B5EF4-FFF2-40B4-BE49-F238E27FC236}">
+                <a16:creationId xmlns:a16="http://schemas.microsoft.com/office/drawing/2014/main" id="{5C1B2AF7-BAEB-890F-A2DF-EC15C885BA3F}"/>
+              </a:ext>
+            </a:extLst>
+          </p:cNvPr>
+          <p:cNvPicPr>
+            <a:picLocks noChangeAspect="1"/>
+          </p:cNvPicPr>
+          <p:nvPr/>
+        </p:nvPicPr>
+        <p:blipFill>
+          <a:blip r:embed="rId2"/>
+          <a:stretch>
+            <a:fillRect/>
+          </a:stretch>
+        </p:blipFill>
+        <p:spPr>
+          <a:xfrm>
+            <a:off x="260216" y="593590"/>
+            <a:ext cx="11049000" cy="5048250"/>
+          </a:xfrm>
+          <a:prstGeom prst="rect">
+            <a:avLst/>
+          </a:prstGeom>
+        </p:spPr>
+      </p:pic>
+    </p:spTree>
+    <p:extLst>
+      <p:ext uri="{BB962C8B-B14F-4D97-AF65-F5344CB8AC3E}">
+        <p14:creationId xmlns:p14="http://schemas.microsoft.com/office/powerpoint/2010/main" val="2770299113"/>
+      </p:ext>
+    </p:extLst>
+  </p:cSld>
+  <p:clrMapOvr>
+    <a:masterClrMapping/>
+  </p:clrMapOvr>
+</p:sld>
+</file>
+
+<file path=ppt/slides/slide5.xml><?xml version="1.0" encoding="utf-8"?>
+<p:sld xmlns:a="http://schemas.openxmlformats.org/drawingml/2006/main" xmlns:r="http://schemas.openxmlformats.org/officeDocument/2006/relationships" xmlns:p="http://schemas.openxmlformats.org/presentationml/2006/main">
+  <p:cSld>
+    <p:spTree>
+      <p:nvGrpSpPr>
+        <p:cNvPr id="1" name=""/>
+        <p:cNvGrpSpPr/>
+        <p:nvPr/>
+      </p:nvGrpSpPr>
+      <p:grpSpPr>
+        <a:xfrm>
+          <a:off x="0" y="0"/>
+          <a:ext cx="0" cy="0"/>
+          <a:chOff x="0" y="0"/>
+          <a:chExt cx="0" cy="0"/>
+        </a:xfrm>
+      </p:grpSpPr>
       <p:grpSp>
         <p:nvGrpSpPr>
-          <p:cNvPr id="4" name="Group 3">
+          <p:cNvPr id="18" name="Group 17">
             <a:extLst>
               <a:ext uri="{FF2B5EF4-FFF2-40B4-BE49-F238E27FC236}">
-                <a16:creationId xmlns:a16="http://schemas.microsoft.com/office/drawing/2014/main" id="{37AEF501-431A-BB70-528F-0281CD23DFCA}"/>
+                <a16:creationId xmlns:a16="http://schemas.microsoft.com/office/drawing/2014/main" id="{29C84B15-39D2-6146-BF6B-EFE063D46C8F}"/>
               </a:ext>
             </a:extLst>
           </p:cNvPr>
@@ -7199,18 +9677,97 @@
         </p:nvGrpSpPr>
         <p:grpSpPr>
           <a:xfrm>
-            <a:off x="0" y="733737"/>
-            <a:ext cx="12192000" cy="1567490"/>
-            <a:chOff x="0" y="733737"/>
-            <a:chExt cx="12192000" cy="1567490"/>
+            <a:off x="104572" y="1135162"/>
+            <a:ext cx="11049000" cy="5637063"/>
+            <a:chOff x="104572" y="1135162"/>
+            <a:chExt cx="11049000" cy="5637063"/>
           </a:xfrm>
         </p:grpSpPr>
+        <p:grpSp>
+          <p:nvGrpSpPr>
+            <p:cNvPr id="17" name="Group 16">
+              <a:extLst>
+                <a:ext uri="{FF2B5EF4-FFF2-40B4-BE49-F238E27FC236}">
+                  <a16:creationId xmlns:a16="http://schemas.microsoft.com/office/drawing/2014/main" id="{66825F74-DF43-9A85-C8C1-9EC8FFCC4ECF}"/>
+                </a:ext>
+              </a:extLst>
+            </p:cNvPr>
+            <p:cNvGrpSpPr/>
+            <p:nvPr/>
+          </p:nvGrpSpPr>
+          <p:grpSpPr>
+            <a:xfrm>
+              <a:off x="104572" y="1135162"/>
+              <a:ext cx="11049000" cy="1525598"/>
+              <a:chOff x="231033" y="613045"/>
+              <a:chExt cx="11049000" cy="1525598"/>
+            </a:xfrm>
+          </p:grpSpPr>
+          <p:pic>
+            <p:nvPicPr>
+              <p:cNvPr id="15" name="Picture 14">
+                <a:extLst>
+                  <a:ext uri="{FF2B5EF4-FFF2-40B4-BE49-F238E27FC236}">
+                    <a16:creationId xmlns:a16="http://schemas.microsoft.com/office/drawing/2014/main" id="{CE8C44ED-DFB7-632A-6C50-A97ECD750BEB}"/>
+                  </a:ext>
+                </a:extLst>
+              </p:cNvPr>
+              <p:cNvPicPr>
+                <a:picLocks noChangeAspect="1"/>
+              </p:cNvPicPr>
+              <p:nvPr/>
+            </p:nvPicPr>
+            <p:blipFill>
+              <a:blip r:embed="rId2"/>
+              <a:srcRect b="80048"/>
+              <a:stretch/>
+            </p:blipFill>
+            <p:spPr>
+              <a:xfrm>
+                <a:off x="231033" y="613045"/>
+                <a:ext cx="11049000" cy="1007199"/>
+              </a:xfrm>
+              <a:prstGeom prst="rect">
+                <a:avLst/>
+              </a:prstGeom>
+            </p:spPr>
+          </p:pic>
+          <p:pic>
+            <p:nvPicPr>
+              <p:cNvPr id="16" name="Picture 15">
+                <a:extLst>
+                  <a:ext uri="{FF2B5EF4-FFF2-40B4-BE49-F238E27FC236}">
+                    <a16:creationId xmlns:a16="http://schemas.microsoft.com/office/drawing/2014/main" id="{4004A7DC-2092-04C8-6FCF-5B6F881DA9BE}"/>
+                  </a:ext>
+                </a:extLst>
+              </p:cNvPr>
+              <p:cNvPicPr>
+                <a:picLocks noChangeAspect="1"/>
+              </p:cNvPicPr>
+              <p:nvPr/>
+            </p:nvPicPr>
+            <p:blipFill>
+              <a:blip r:embed="rId2"/>
+              <a:srcRect t="89406"/>
+              <a:stretch/>
+            </p:blipFill>
+            <p:spPr>
+              <a:xfrm>
+                <a:off x="231033" y="1603824"/>
+                <a:ext cx="11049000" cy="534819"/>
+              </a:xfrm>
+              <a:prstGeom prst="rect">
+                <a:avLst/>
+              </a:prstGeom>
+            </p:spPr>
+          </p:pic>
+        </p:grpSp>
         <p:pic>
           <p:nvPicPr>
-            <p:cNvPr id="2" name="Picture 1">
+            <p:cNvPr id="14" name="Picture 13">
               <a:extLst>
                 <a:ext uri="{FF2B5EF4-FFF2-40B4-BE49-F238E27FC236}">
-                  <a16:creationId xmlns:a16="http://schemas.microsoft.com/office/drawing/2014/main" id="{3F4349C7-1C8F-5EE2-8DC1-1A02DC3F8610}"/>
+                  <a16:creationId xmlns:a16="http://schemas.microsoft.com/office/drawing/2014/main" id="{B8CA3483-6DB6-B5CC-9675-9ED8FAF21380}"/>
                 </a:ext>
               </a:extLst>
             </p:cNvPr>
@@ -7220,43 +9777,14 @@
             <p:nvPr/>
           </p:nvPicPr>
           <p:blipFill>
-            <a:blip r:embed="rId2"/>
-            <a:srcRect b="80581"/>
+            <a:blip r:embed="rId3"/>
+            <a:srcRect t="18876"/>
             <a:stretch/>
           </p:blipFill>
           <p:spPr>
             <a:xfrm>
-              <a:off x="0" y="733737"/>
-              <a:ext cx="12192000" cy="1049357"/>
-            </a:xfrm>
-            <a:prstGeom prst="rect">
-              <a:avLst/>
-            </a:prstGeom>
-          </p:spPr>
-        </p:pic>
-        <p:pic>
-          <p:nvPicPr>
-            <p:cNvPr id="3" name="Picture 2">
-              <a:extLst>
-                <a:ext uri="{FF2B5EF4-FFF2-40B4-BE49-F238E27FC236}">
-                  <a16:creationId xmlns:a16="http://schemas.microsoft.com/office/drawing/2014/main" id="{75DADD47-701D-54B6-234A-C52144000F7E}"/>
-                </a:ext>
-              </a:extLst>
-            </p:cNvPr>
-            <p:cNvPicPr>
-              <a:picLocks noChangeAspect="1"/>
-            </p:cNvPicPr>
-            <p:nvPr/>
-          </p:nvPicPr>
-          <p:blipFill>
-            <a:blip r:embed="rId2"/>
-            <a:srcRect t="90411"/>
-            <a:stretch/>
-          </p:blipFill>
-          <p:spPr>
-            <a:xfrm>
-              <a:off x="0" y="1783094"/>
-              <a:ext cx="12192000" cy="518133"/>
+              <a:off x="104572" y="2676880"/>
+              <a:ext cx="11049000" cy="4095345"/>
             </a:xfrm>
             <a:prstGeom prst="rect">
               <a:avLst/>
@@ -7264,35 +9792,6 @@
           </p:spPr>
         </p:pic>
       </p:grpSp>
-      <p:pic>
-        <p:nvPicPr>
-          <p:cNvPr id="5" name="Picture 4">
-            <a:extLst>
-              <a:ext uri="{FF2B5EF4-FFF2-40B4-BE49-F238E27FC236}">
-                <a16:creationId xmlns:a16="http://schemas.microsoft.com/office/drawing/2014/main" id="{B5B03F69-2E25-E705-A4F9-B8C5BB24AC1E}"/>
-              </a:ext>
-            </a:extLst>
-          </p:cNvPr>
-          <p:cNvPicPr>
-            <a:picLocks noChangeAspect="1"/>
-          </p:cNvPicPr>
-          <p:nvPr/>
-        </p:nvPicPr>
-        <p:blipFill>
-          <a:blip r:embed="rId3"/>
-          <a:srcRect t="18271"/>
-          <a:stretch/>
-        </p:blipFill>
-        <p:spPr>
-          <a:xfrm>
-            <a:off x="0" y="2301227"/>
-            <a:ext cx="12192000" cy="4416307"/>
-          </a:xfrm>
-          <a:prstGeom prst="rect">
-            <a:avLst/>
-          </a:prstGeom>
-        </p:spPr>
-      </p:pic>
       <p:sp>
         <p:nvSpPr>
           <p:cNvPr id="6" name="TextBox 5">
@@ -7594,7 +10093,7 @@
 </p:sld>
 </file>
 
-<file path=ppt/slides/slide5.xml><?xml version="1.0" encoding="utf-8"?>
+<file path=ppt/slides/slide6.xml><?xml version="1.0" encoding="utf-8"?>
 <p:sld xmlns:a="http://schemas.openxmlformats.org/drawingml/2006/main" xmlns:r="http://schemas.openxmlformats.org/officeDocument/2006/relationships" xmlns:p="http://schemas.openxmlformats.org/presentationml/2006/main">
   <p:cSld>
     <p:spTree>
@@ -7613,10 +10112,10 @@
       </p:grpSpPr>
       <p:grpSp>
         <p:nvGrpSpPr>
-          <p:cNvPr id="8" name="Group 7">
+          <p:cNvPr id="37" name="Group 36">
             <a:extLst>
               <a:ext uri="{FF2B5EF4-FFF2-40B4-BE49-F238E27FC236}">
-                <a16:creationId xmlns:a16="http://schemas.microsoft.com/office/drawing/2014/main" id="{8BB00BFE-3559-D2DD-92A4-9CC726FDC61E}"/>
+                <a16:creationId xmlns:a16="http://schemas.microsoft.com/office/drawing/2014/main" id="{043F17D2-9830-E959-A2CB-6A264360AC24}"/>
               </a:ext>
             </a:extLst>
           </p:cNvPr>
@@ -7625,149 +10124,1255 @@
         </p:nvGrpSpPr>
         <p:grpSpPr>
           <a:xfrm>
-            <a:off x="1925053" y="106593"/>
-            <a:ext cx="9785683" cy="10571007"/>
-            <a:chOff x="1925053" y="106593"/>
-            <a:chExt cx="9785683" cy="10571007"/>
+            <a:off x="240759" y="-650081"/>
+            <a:ext cx="11550787" cy="10118143"/>
+            <a:chOff x="240759" y="-650081"/>
+            <a:chExt cx="11550787" cy="10118143"/>
           </a:xfrm>
         </p:grpSpPr>
-        <p:pic>
-          <p:nvPicPr>
-            <p:cNvPr id="3" name="Picture 2" descr="A diagram of a computer&#10;&#10;Description automatically generated">
+        <p:grpSp>
+          <p:nvGrpSpPr>
+            <p:cNvPr id="24" name="Group 23">
               <a:extLst>
                 <a:ext uri="{FF2B5EF4-FFF2-40B4-BE49-F238E27FC236}">
-                  <a16:creationId xmlns:a16="http://schemas.microsoft.com/office/drawing/2014/main" id="{53373272-26D6-0128-9A00-A9402EB226B4}"/>
+                  <a16:creationId xmlns:a16="http://schemas.microsoft.com/office/drawing/2014/main" id="{82C83067-2738-26B7-3650-04100EB5879D}"/>
                 </a:ext>
               </a:extLst>
             </p:cNvPr>
-            <p:cNvPicPr>
-              <a:picLocks noChangeAspect="1"/>
-            </p:cNvPicPr>
+            <p:cNvGrpSpPr/>
             <p:nvPr/>
-          </p:nvPicPr>
-          <p:blipFill>
-            <a:blip r:embed="rId2">
+          </p:nvGrpSpPr>
+          <p:grpSpPr>
+            <a:xfrm>
+              <a:off x="240759" y="-650081"/>
+              <a:ext cx="11550787" cy="10118143"/>
+              <a:chOff x="240759" y="-650081"/>
+              <a:chExt cx="11550787" cy="10118143"/>
+            </a:xfrm>
+          </p:grpSpPr>
+          <p:pic>
+            <p:nvPicPr>
+              <p:cNvPr id="18" name="Picture 17">
+                <a:extLst>
+                  <a:ext uri="{FF2B5EF4-FFF2-40B4-BE49-F238E27FC236}">
+                    <a16:creationId xmlns:a16="http://schemas.microsoft.com/office/drawing/2014/main" id="{F8175942-31B7-C464-B741-3E6649B91A73}"/>
+                  </a:ext>
+                </a:extLst>
+              </p:cNvPr>
+              <p:cNvPicPr>
+                <a:picLocks noChangeAspect="1"/>
+              </p:cNvPicPr>
+              <p:nvPr/>
+            </p:nvPicPr>
+            <p:blipFill>
+              <a:blip r:embed="rId2">
+                <a:extLst>
+                  <a:ext uri="{28A0092B-C50C-407E-A947-70E740481C1C}">
+                    <a14:useLocalDpi xmlns:a14="http://schemas.microsoft.com/office/drawing/2010/main" val="0"/>
+                  </a:ext>
+                </a:extLst>
+              </a:blip>
+              <a:srcRect t="85107"/>
+              <a:stretch/>
+            </p:blipFill>
+            <p:spPr>
+              <a:xfrm>
+                <a:off x="400454" y="2623942"/>
+                <a:ext cx="11068456" cy="892992"/>
+              </a:xfrm>
+              <a:prstGeom prst="rect">
+                <a:avLst/>
+              </a:prstGeom>
+            </p:spPr>
+          </p:pic>
+          <p:grpSp>
+            <p:nvGrpSpPr>
+              <p:cNvPr id="2" name="Group 1">
+                <a:extLst>
+                  <a:ext uri="{FF2B5EF4-FFF2-40B4-BE49-F238E27FC236}">
+                    <a16:creationId xmlns:a16="http://schemas.microsoft.com/office/drawing/2014/main" id="{5B1C2830-E483-27FA-BACD-566A826FAD68}"/>
+                  </a:ext>
+                </a:extLst>
+              </p:cNvPr>
+              <p:cNvGrpSpPr/>
+              <p:nvPr/>
+            </p:nvGrpSpPr>
+            <p:grpSpPr>
+              <a:xfrm>
+                <a:off x="1001948" y="-650081"/>
+                <a:ext cx="10789598" cy="4522785"/>
+                <a:chOff x="1001948" y="-620898"/>
+                <a:chExt cx="10789598" cy="4522785"/>
+              </a:xfrm>
+            </p:grpSpPr>
+            <p:pic>
+              <p:nvPicPr>
+                <p:cNvPr id="4" name="Picture 3">
+                  <a:extLst>
+                    <a:ext uri="{FF2B5EF4-FFF2-40B4-BE49-F238E27FC236}">
+                      <a16:creationId xmlns:a16="http://schemas.microsoft.com/office/drawing/2014/main" id="{6BC3F0AC-F0BC-6134-DE25-A25331AF3A4F}"/>
+                    </a:ext>
+                  </a:extLst>
+                </p:cNvPr>
+                <p:cNvPicPr>
+                  <a:picLocks noChangeAspect="1"/>
+                </p:cNvPicPr>
+                <p:nvPr/>
+              </p:nvPicPr>
+              <p:blipFill>
+                <a:blip r:embed="rId2">
+                  <a:extLst>
+                    <a:ext uri="{28A0092B-C50C-407E-A947-70E740481C1C}">
+                      <a14:useLocalDpi xmlns:a14="http://schemas.microsoft.com/office/drawing/2010/main" val="0"/>
+                    </a:ext>
+                  </a:extLst>
+                </a:blip>
+                <a:srcRect l="5434" b="14638"/>
+                <a:stretch/>
+              </p:blipFill>
+              <p:spPr>
+                <a:xfrm>
+                  <a:off x="1001948" y="-620898"/>
+                  <a:ext cx="10466961" cy="3266821"/>
+                </a:xfrm>
+                <a:prstGeom prst="rect">
+                  <a:avLst/>
+                </a:prstGeom>
+              </p:spPr>
+            </p:pic>
+            <p:sp>
+              <p:nvSpPr>
+                <p:cNvPr id="5" name="TextBox 4">
+                  <a:extLst>
+                    <a:ext uri="{FF2B5EF4-FFF2-40B4-BE49-F238E27FC236}">
+                      <a16:creationId xmlns:a16="http://schemas.microsoft.com/office/drawing/2014/main" id="{59AD996D-45A5-4A4D-F41B-320F2941C98F}"/>
+                    </a:ext>
+                  </a:extLst>
+                </p:cNvPr>
+                <p:cNvSpPr txBox="1"/>
+                <p:nvPr/>
+              </p:nvSpPr>
+              <p:spPr>
+                <a:xfrm>
+                  <a:off x="1245457" y="3532555"/>
+                  <a:ext cx="1855959" cy="369332"/>
+                </a:xfrm>
+                <a:prstGeom prst="rect">
+                  <a:avLst/>
+                </a:prstGeom>
+                <a:noFill/>
+              </p:spPr>
+              <p:txBody>
+                <a:bodyPr wrap="square" rtlCol="0">
+                  <a:spAutoFit/>
+                </a:bodyPr>
+                <a:lstStyle/>
+                <a:p>
+                  <a:pPr algn="ctr"/>
+                  <a:r>
+                    <a:rPr lang="nl-BE" dirty="0"/>
+                    <a:t>Cluster 3</a:t>
+                  </a:r>
+                  <a:endParaRPr lang="en-US" dirty="0"/>
+                </a:p>
+              </p:txBody>
+            </p:sp>
+            <p:sp>
+              <p:nvSpPr>
+                <p:cNvPr id="6" name="TextBox 5">
+                  <a:extLst>
+                    <a:ext uri="{FF2B5EF4-FFF2-40B4-BE49-F238E27FC236}">
+                      <a16:creationId xmlns:a16="http://schemas.microsoft.com/office/drawing/2014/main" id="{C2C86C59-B274-4111-07C5-D2AEC64359F9}"/>
+                    </a:ext>
+                  </a:extLst>
+                </p:cNvPr>
+                <p:cNvSpPr txBox="1"/>
+                <p:nvPr/>
+              </p:nvSpPr>
+              <p:spPr>
+                <a:xfrm>
+                  <a:off x="9935587" y="3532555"/>
+                  <a:ext cx="1855959" cy="369332"/>
+                </a:xfrm>
+                <a:prstGeom prst="rect">
+                  <a:avLst/>
+                </a:prstGeom>
+                <a:noFill/>
+              </p:spPr>
+              <p:txBody>
+                <a:bodyPr wrap="square" rtlCol="0">
+                  <a:spAutoFit/>
+                </a:bodyPr>
+                <a:lstStyle/>
+                <a:p>
+                  <a:pPr algn="ctr"/>
+                  <a:r>
+                    <a:rPr lang="nl-BE" dirty="0"/>
+                    <a:t>Cluster 2</a:t>
+                  </a:r>
+                  <a:endParaRPr lang="en-US" dirty="0"/>
+                </a:p>
+              </p:txBody>
+            </p:sp>
+            <p:sp>
+              <p:nvSpPr>
+                <p:cNvPr id="9" name="TextBox 8">
+                  <a:extLst>
+                    <a:ext uri="{FF2B5EF4-FFF2-40B4-BE49-F238E27FC236}">
+                      <a16:creationId xmlns:a16="http://schemas.microsoft.com/office/drawing/2014/main" id="{89B2572C-4640-EE59-4D19-AB6B6780A446}"/>
+                    </a:ext>
+                  </a:extLst>
+                </p:cNvPr>
+                <p:cNvSpPr txBox="1"/>
+                <p:nvPr/>
+              </p:nvSpPr>
+              <p:spPr>
+                <a:xfrm>
+                  <a:off x="3487985" y="3481350"/>
+                  <a:ext cx="7120648" cy="369332"/>
+                </a:xfrm>
+                <a:prstGeom prst="rect">
+                  <a:avLst/>
+                </a:prstGeom>
+                <a:noFill/>
+              </p:spPr>
+              <p:txBody>
+                <a:bodyPr wrap="square" rtlCol="0">
+                  <a:spAutoFit/>
+                </a:bodyPr>
+                <a:lstStyle/>
+                <a:p>
+                  <a:pPr algn="ctr"/>
+                  <a:r>
+                    <a:rPr lang="nl-BE" dirty="0"/>
+                    <a:t>Cluster 1</a:t>
+                  </a:r>
+                  <a:endParaRPr lang="en-US" dirty="0"/>
+                </a:p>
+              </p:txBody>
+            </p:sp>
+            <p:sp>
+              <p:nvSpPr>
+                <p:cNvPr id="10" name="TextBox 9">
+                  <a:extLst>
+                    <a:ext uri="{FF2B5EF4-FFF2-40B4-BE49-F238E27FC236}">
+                      <a16:creationId xmlns:a16="http://schemas.microsoft.com/office/drawing/2014/main" id="{75344B4F-0B16-3BFD-4DD4-FA1DF58F1195}"/>
+                    </a:ext>
+                  </a:extLst>
+                </p:cNvPr>
+                <p:cNvSpPr txBox="1"/>
+                <p:nvPr/>
+              </p:nvSpPr>
+              <p:spPr>
+                <a:xfrm>
+                  <a:off x="2159262" y="1943322"/>
+                  <a:ext cx="2544024" cy="276999"/>
+                </a:xfrm>
+                <a:prstGeom prst="rect">
+                  <a:avLst/>
+                </a:prstGeom>
+                <a:noFill/>
+              </p:spPr>
+              <p:txBody>
+                <a:bodyPr wrap="square" rtlCol="0">
+                  <a:spAutoFit/>
+                </a:bodyPr>
+                <a:lstStyle/>
+                <a:p>
+                  <a:pPr algn="ctr"/>
+                  <a:r>
+                    <a:rPr lang="nl-BE" sz="1200" dirty="0" err="1">
+                      <a:solidFill>
+                        <a:schemeClr val="bg1">
+                          <a:lumMod val="50000"/>
+                        </a:schemeClr>
+                      </a:solidFill>
+                    </a:rPr>
+                    <a:t>Subcluster</a:t>
+                  </a:r>
+                  <a:r>
+                    <a:rPr lang="nl-BE" sz="1200" dirty="0">
+                      <a:solidFill>
+                        <a:schemeClr val="bg1">
+                          <a:lumMod val="50000"/>
+                        </a:schemeClr>
+                      </a:solidFill>
+                    </a:rPr>
+                    <a:t> 1</a:t>
+                  </a:r>
+                  <a:endParaRPr lang="en-US" sz="1200" dirty="0">
+                    <a:solidFill>
+                      <a:schemeClr val="bg1">
+                        <a:lumMod val="50000"/>
+                      </a:schemeClr>
+                    </a:solidFill>
+                  </a:endParaRPr>
+                </a:p>
+              </p:txBody>
+            </p:sp>
+            <p:sp>
+              <p:nvSpPr>
+                <p:cNvPr id="11" name="TextBox 10">
+                  <a:extLst>
+                    <a:ext uri="{FF2B5EF4-FFF2-40B4-BE49-F238E27FC236}">
+                      <a16:creationId xmlns:a16="http://schemas.microsoft.com/office/drawing/2014/main" id="{4E9BA3F8-1141-4200-9D71-937A47B761E8}"/>
+                    </a:ext>
+                  </a:extLst>
+                </p:cNvPr>
+                <p:cNvSpPr txBox="1"/>
+                <p:nvPr/>
+              </p:nvSpPr>
+              <p:spPr>
+                <a:xfrm>
+                  <a:off x="3507486" y="2156122"/>
+                  <a:ext cx="1050200" cy="276999"/>
+                </a:xfrm>
+                <a:prstGeom prst="rect">
+                  <a:avLst/>
+                </a:prstGeom>
+                <a:noFill/>
+              </p:spPr>
+              <p:txBody>
+                <a:bodyPr wrap="square" rtlCol="0">
+                  <a:spAutoFit/>
+                </a:bodyPr>
+                <a:lstStyle/>
+                <a:p>
+                  <a:pPr algn="ctr"/>
+                  <a:r>
+                    <a:rPr lang="nl-BE" sz="1200" dirty="0" err="1">
+                      <a:solidFill>
+                        <a:schemeClr val="bg1">
+                          <a:lumMod val="50000"/>
+                        </a:schemeClr>
+                      </a:solidFill>
+                    </a:rPr>
+                    <a:t>Subcluster</a:t>
+                  </a:r>
+                  <a:r>
+                    <a:rPr lang="nl-BE" sz="1200" dirty="0">
+                      <a:solidFill>
+                        <a:schemeClr val="bg1">
+                          <a:lumMod val="50000"/>
+                        </a:schemeClr>
+                      </a:solidFill>
+                    </a:rPr>
+                    <a:t> 2</a:t>
+                  </a:r>
+                  <a:endParaRPr lang="en-US" sz="1200" dirty="0">
+                    <a:solidFill>
+                      <a:schemeClr val="bg1">
+                        <a:lumMod val="50000"/>
+                      </a:schemeClr>
+                    </a:solidFill>
+                  </a:endParaRPr>
+                </a:p>
+              </p:txBody>
+            </p:sp>
+            <p:sp>
+              <p:nvSpPr>
+                <p:cNvPr id="12" name="TextBox 11">
+                  <a:extLst>
+                    <a:ext uri="{FF2B5EF4-FFF2-40B4-BE49-F238E27FC236}">
+                      <a16:creationId xmlns:a16="http://schemas.microsoft.com/office/drawing/2014/main" id="{D450DB8D-E025-B129-44EE-FBEED9393116}"/>
+                    </a:ext>
+                  </a:extLst>
+                </p:cNvPr>
+                <p:cNvSpPr txBox="1"/>
+                <p:nvPr/>
+              </p:nvSpPr>
+              <p:spPr>
+                <a:xfrm>
+                  <a:off x="4019543" y="2319239"/>
+                  <a:ext cx="1383672" cy="276999"/>
+                </a:xfrm>
+                <a:prstGeom prst="rect">
+                  <a:avLst/>
+                </a:prstGeom>
+                <a:noFill/>
+              </p:spPr>
+              <p:txBody>
+                <a:bodyPr wrap="square" rtlCol="0">
+                  <a:spAutoFit/>
+                </a:bodyPr>
+                <a:lstStyle/>
+                <a:p>
+                  <a:pPr algn="ctr"/>
+                  <a:r>
+                    <a:rPr lang="nl-BE" sz="1200" dirty="0" err="1">
+                      <a:solidFill>
+                        <a:schemeClr val="bg1">
+                          <a:lumMod val="50000"/>
+                        </a:schemeClr>
+                      </a:solidFill>
+                    </a:rPr>
+                    <a:t>Subcluster</a:t>
+                  </a:r>
+                  <a:r>
+                    <a:rPr lang="nl-BE" sz="1200" dirty="0">
+                      <a:solidFill>
+                        <a:schemeClr val="bg1">
+                          <a:lumMod val="50000"/>
+                        </a:schemeClr>
+                      </a:solidFill>
+                    </a:rPr>
+                    <a:t> 3</a:t>
+                  </a:r>
+                  <a:endParaRPr lang="en-US" sz="1200" dirty="0">
+                    <a:solidFill>
+                      <a:schemeClr val="bg1">
+                        <a:lumMod val="50000"/>
+                      </a:schemeClr>
+                    </a:solidFill>
+                  </a:endParaRPr>
+                </a:p>
+              </p:txBody>
+            </p:sp>
+            <p:sp>
+              <p:nvSpPr>
+                <p:cNvPr id="13" name="TextBox 12">
+                  <a:extLst>
+                    <a:ext uri="{FF2B5EF4-FFF2-40B4-BE49-F238E27FC236}">
+                      <a16:creationId xmlns:a16="http://schemas.microsoft.com/office/drawing/2014/main" id="{35BA436D-0BEB-6090-D72F-B91B5D8959BE}"/>
+                    </a:ext>
+                  </a:extLst>
+                </p:cNvPr>
+                <p:cNvSpPr txBox="1"/>
+                <p:nvPr/>
+              </p:nvSpPr>
+              <p:spPr>
+                <a:xfrm>
+                  <a:off x="4533025" y="2362421"/>
+                  <a:ext cx="3482502" cy="276999"/>
+                </a:xfrm>
+                <a:prstGeom prst="rect">
+                  <a:avLst/>
+                </a:prstGeom>
+                <a:noFill/>
+              </p:spPr>
+              <p:txBody>
+                <a:bodyPr wrap="square" rtlCol="0">
+                  <a:spAutoFit/>
+                </a:bodyPr>
+                <a:lstStyle/>
+                <a:p>
+                  <a:pPr algn="ctr"/>
+                  <a:r>
+                    <a:rPr lang="nl-BE" sz="1200" dirty="0" err="1">
+                      <a:solidFill>
+                        <a:schemeClr val="bg1">
+                          <a:lumMod val="50000"/>
+                        </a:schemeClr>
+                      </a:solidFill>
+                    </a:rPr>
+                    <a:t>Subcluster</a:t>
+                  </a:r>
+                  <a:r>
+                    <a:rPr lang="nl-BE" sz="1200" dirty="0">
+                      <a:solidFill>
+                        <a:schemeClr val="bg1">
+                          <a:lumMod val="50000"/>
+                        </a:schemeClr>
+                      </a:solidFill>
+                    </a:rPr>
+                    <a:t> 4</a:t>
+                  </a:r>
+                  <a:endParaRPr lang="en-US" sz="1200" dirty="0">
+                    <a:solidFill>
+                      <a:schemeClr val="bg1">
+                        <a:lumMod val="50000"/>
+                      </a:schemeClr>
+                    </a:solidFill>
+                  </a:endParaRPr>
+                </a:p>
+              </p:txBody>
+            </p:sp>
+            <p:sp>
+              <p:nvSpPr>
+                <p:cNvPr id="14" name="Rectangle 13">
+                  <a:extLst>
+                    <a:ext uri="{FF2B5EF4-FFF2-40B4-BE49-F238E27FC236}">
+                      <a16:creationId xmlns:a16="http://schemas.microsoft.com/office/drawing/2014/main" id="{6F11A55A-0D9D-8A68-D315-FE50D63D91D6}"/>
+                    </a:ext>
+                  </a:extLst>
+                </p:cNvPr>
+                <p:cNvSpPr/>
+                <p:nvPr/>
+              </p:nvSpPr>
+              <p:spPr>
+                <a:xfrm>
+                  <a:off x="1156464" y="1063089"/>
+                  <a:ext cx="1748242" cy="2464569"/>
+                </a:xfrm>
+                <a:prstGeom prst="rect">
+                  <a:avLst/>
+                </a:prstGeom>
+                <a:noFill/>
+                <a:ln w="19050">
+                  <a:solidFill>
+                    <a:schemeClr val="tx1"/>
+                  </a:solidFill>
+                  <a:prstDash val="dash"/>
+                </a:ln>
+              </p:spPr>
+              <p:style>
+                <a:lnRef idx="2">
+                  <a:schemeClr val="accent1">
+                    <a:shade val="15000"/>
+                  </a:schemeClr>
+                </a:lnRef>
+                <a:fillRef idx="1">
+                  <a:schemeClr val="accent1"/>
+                </a:fillRef>
+                <a:effectRef idx="0">
+                  <a:schemeClr val="accent1"/>
+                </a:effectRef>
+                <a:fontRef idx="minor">
+                  <a:schemeClr val="lt1"/>
+                </a:fontRef>
+              </p:style>
+              <p:txBody>
+                <a:bodyPr rtlCol="0" anchor="ctr"/>
+                <a:lstStyle/>
+                <a:p>
+                  <a:pPr algn="ctr"/>
+                  <a:endParaRPr lang="en-US"/>
+                </a:p>
+              </p:txBody>
+            </p:sp>
+            <p:sp>
+              <p:nvSpPr>
+                <p:cNvPr id="15" name="Rectangle 14">
+                  <a:extLst>
+                    <a:ext uri="{FF2B5EF4-FFF2-40B4-BE49-F238E27FC236}">
+                      <a16:creationId xmlns:a16="http://schemas.microsoft.com/office/drawing/2014/main" id="{0F3BF294-3418-86AB-F821-56242B933D59}"/>
+                    </a:ext>
+                  </a:extLst>
+                </p:cNvPr>
+                <p:cNvSpPr/>
+                <p:nvPr/>
+              </p:nvSpPr>
+              <p:spPr>
+                <a:xfrm>
+                  <a:off x="10551118" y="1081548"/>
+                  <a:ext cx="510409" cy="2464569"/>
+                </a:xfrm>
+                <a:prstGeom prst="rect">
+                  <a:avLst/>
+                </a:prstGeom>
+                <a:noFill/>
+                <a:ln w="19050">
+                  <a:solidFill>
+                    <a:schemeClr val="tx1"/>
+                  </a:solidFill>
+                  <a:prstDash val="dash"/>
+                </a:ln>
+              </p:spPr>
+              <p:style>
+                <a:lnRef idx="2">
+                  <a:schemeClr val="accent1">
+                    <a:shade val="15000"/>
+                  </a:schemeClr>
+                </a:lnRef>
+                <a:fillRef idx="1">
+                  <a:schemeClr val="accent1"/>
+                </a:fillRef>
+                <a:effectRef idx="0">
+                  <a:schemeClr val="accent1"/>
+                </a:effectRef>
+                <a:fontRef idx="minor">
+                  <a:schemeClr val="lt1"/>
+                </a:fontRef>
+              </p:style>
+              <p:txBody>
+                <a:bodyPr rtlCol="0" anchor="ctr"/>
+                <a:lstStyle/>
+                <a:p>
+                  <a:pPr algn="ctr"/>
+                  <a:endParaRPr lang="en-US"/>
+                </a:p>
+              </p:txBody>
+            </p:sp>
+            <p:sp>
+              <p:nvSpPr>
+                <p:cNvPr id="16" name="Rectangle 15">
+                  <a:extLst>
+                    <a:ext uri="{FF2B5EF4-FFF2-40B4-BE49-F238E27FC236}">
+                      <a16:creationId xmlns:a16="http://schemas.microsoft.com/office/drawing/2014/main" id="{2A79C189-C157-8C98-33AB-A745840A1CD6}"/>
+                    </a:ext>
+                  </a:extLst>
+                </p:cNvPr>
+                <p:cNvSpPr/>
+                <p:nvPr/>
+              </p:nvSpPr>
+              <p:spPr>
+                <a:xfrm>
+                  <a:off x="2904706" y="1084092"/>
+                  <a:ext cx="7646411" cy="2473261"/>
+                </a:xfrm>
+                <a:prstGeom prst="rect">
+                  <a:avLst/>
+                </a:prstGeom>
+                <a:noFill/>
+                <a:ln w="19050">
+                  <a:solidFill>
+                    <a:schemeClr val="tx1"/>
+                  </a:solidFill>
+                  <a:prstDash val="dash"/>
+                </a:ln>
+              </p:spPr>
+              <p:style>
+                <a:lnRef idx="2">
+                  <a:schemeClr val="accent1">
+                    <a:shade val="15000"/>
+                  </a:schemeClr>
+                </a:lnRef>
+                <a:fillRef idx="1">
+                  <a:schemeClr val="accent1"/>
+                </a:fillRef>
+                <a:effectRef idx="0">
+                  <a:schemeClr val="accent1"/>
+                </a:effectRef>
+                <a:fontRef idx="minor">
+                  <a:schemeClr val="lt1"/>
+                </a:fontRef>
+              </p:style>
+              <p:txBody>
+                <a:bodyPr rtlCol="0" anchor="ctr"/>
+                <a:lstStyle/>
+                <a:p>
+                  <a:pPr algn="ctr"/>
+                  <a:endParaRPr lang="en-US"/>
+                </a:p>
+              </p:txBody>
+            </p:sp>
+            <p:sp>
+              <p:nvSpPr>
+                <p:cNvPr id="17" name="TextBox 16">
+                  <a:extLst>
+                    <a:ext uri="{FF2B5EF4-FFF2-40B4-BE49-F238E27FC236}">
+                      <a16:creationId xmlns:a16="http://schemas.microsoft.com/office/drawing/2014/main" id="{537AF6F7-1DC0-FE54-06A7-B9BD4F2A7B84}"/>
+                    </a:ext>
+                  </a:extLst>
+                </p:cNvPr>
+                <p:cNvSpPr txBox="1"/>
+                <p:nvPr/>
+              </p:nvSpPr>
+              <p:spPr>
+                <a:xfrm>
+                  <a:off x="7685083" y="2233676"/>
+                  <a:ext cx="2386757" cy="276999"/>
+                </a:xfrm>
+                <a:prstGeom prst="rect">
+                  <a:avLst/>
+                </a:prstGeom>
+                <a:noFill/>
+              </p:spPr>
+              <p:txBody>
+                <a:bodyPr wrap="square" rtlCol="0">
+                  <a:spAutoFit/>
+                </a:bodyPr>
+                <a:lstStyle/>
+                <a:p>
+                  <a:pPr algn="ctr"/>
+                  <a:r>
+                    <a:rPr lang="nl-BE" sz="1200" dirty="0" err="1">
+                      <a:solidFill>
+                        <a:schemeClr val="bg1">
+                          <a:lumMod val="50000"/>
+                        </a:schemeClr>
+                      </a:solidFill>
+                    </a:rPr>
+                    <a:t>Subcluster</a:t>
+                  </a:r>
+                  <a:r>
+                    <a:rPr lang="nl-BE" sz="1200" dirty="0">
+                      <a:solidFill>
+                        <a:schemeClr val="bg1">
+                          <a:lumMod val="50000"/>
+                        </a:schemeClr>
+                      </a:solidFill>
+                    </a:rPr>
+                    <a:t> 5</a:t>
+                  </a:r>
+                  <a:endParaRPr lang="en-US" sz="1200" dirty="0">
+                    <a:solidFill>
+                      <a:schemeClr val="bg1">
+                        <a:lumMod val="50000"/>
+                      </a:schemeClr>
+                    </a:solidFill>
+                  </a:endParaRPr>
+                </a:p>
+              </p:txBody>
+            </p:sp>
+          </p:grpSp>
+          <p:grpSp>
+            <p:nvGrpSpPr>
+              <p:cNvPr id="19" name="Group 18">
+                <a:extLst>
+                  <a:ext uri="{FF2B5EF4-FFF2-40B4-BE49-F238E27FC236}">
+                    <a16:creationId xmlns:a16="http://schemas.microsoft.com/office/drawing/2014/main" id="{C64AE380-8B66-477F-EA25-21B2371E6054}"/>
+                  </a:ext>
+                </a:extLst>
+              </p:cNvPr>
+              <p:cNvGrpSpPr/>
+              <p:nvPr/>
+            </p:nvGrpSpPr>
+            <p:grpSpPr>
+              <a:xfrm>
+                <a:off x="240759" y="3830999"/>
+                <a:ext cx="11049000" cy="5637063"/>
+                <a:chOff x="104572" y="1135162"/>
+                <a:chExt cx="11049000" cy="5637063"/>
+              </a:xfrm>
+            </p:grpSpPr>
+            <p:grpSp>
+              <p:nvGrpSpPr>
+                <p:cNvPr id="20" name="Group 19">
+                  <a:extLst>
+                    <a:ext uri="{FF2B5EF4-FFF2-40B4-BE49-F238E27FC236}">
+                      <a16:creationId xmlns:a16="http://schemas.microsoft.com/office/drawing/2014/main" id="{E1BE39D1-4A9D-8B99-2596-F34D8D4011E9}"/>
+                    </a:ext>
+                  </a:extLst>
+                </p:cNvPr>
+                <p:cNvGrpSpPr/>
+                <p:nvPr/>
+              </p:nvGrpSpPr>
+              <p:grpSpPr>
+                <a:xfrm>
+                  <a:off x="104572" y="1135162"/>
+                  <a:ext cx="11049000" cy="1525598"/>
+                  <a:chOff x="231033" y="613045"/>
+                  <a:chExt cx="11049000" cy="1525598"/>
+                </a:xfrm>
+              </p:grpSpPr>
+              <p:pic>
+                <p:nvPicPr>
+                  <p:cNvPr id="22" name="Picture 21">
+                    <a:extLst>
+                      <a:ext uri="{FF2B5EF4-FFF2-40B4-BE49-F238E27FC236}">
+                        <a16:creationId xmlns:a16="http://schemas.microsoft.com/office/drawing/2014/main" id="{BCF4680E-7E11-D927-4A5B-7EC01EA6D569}"/>
+                      </a:ext>
+                    </a:extLst>
+                  </p:cNvPr>
+                  <p:cNvPicPr>
+                    <a:picLocks noChangeAspect="1"/>
+                  </p:cNvPicPr>
+                  <p:nvPr/>
+                </p:nvPicPr>
+                <p:blipFill>
+                  <a:blip r:embed="rId3"/>
+                  <a:srcRect b="80048"/>
+                  <a:stretch/>
+                </p:blipFill>
+                <p:spPr>
+                  <a:xfrm>
+                    <a:off x="231033" y="613045"/>
+                    <a:ext cx="11049000" cy="1007199"/>
+                  </a:xfrm>
+                  <a:prstGeom prst="rect">
+                    <a:avLst/>
+                  </a:prstGeom>
+                </p:spPr>
+              </p:pic>
+              <p:pic>
+                <p:nvPicPr>
+                  <p:cNvPr id="23" name="Picture 22">
+                    <a:extLst>
+                      <a:ext uri="{FF2B5EF4-FFF2-40B4-BE49-F238E27FC236}">
+                        <a16:creationId xmlns:a16="http://schemas.microsoft.com/office/drawing/2014/main" id="{A1BA95AD-459C-55DD-9628-E0CE7FC3A107}"/>
+                      </a:ext>
+                    </a:extLst>
+                  </p:cNvPr>
+                  <p:cNvPicPr>
+                    <a:picLocks noChangeAspect="1"/>
+                  </p:cNvPicPr>
+                  <p:nvPr/>
+                </p:nvPicPr>
+                <p:blipFill>
+                  <a:blip r:embed="rId3"/>
+                  <a:srcRect t="89406"/>
+                  <a:stretch/>
+                </p:blipFill>
+                <p:spPr>
+                  <a:xfrm>
+                    <a:off x="231033" y="1603824"/>
+                    <a:ext cx="11049000" cy="534819"/>
+                  </a:xfrm>
+                  <a:prstGeom prst="rect">
+                    <a:avLst/>
+                  </a:prstGeom>
+                </p:spPr>
+              </p:pic>
+            </p:grpSp>
+            <p:pic>
+              <p:nvPicPr>
+                <p:cNvPr id="21" name="Picture 20">
+                  <a:extLst>
+                    <a:ext uri="{FF2B5EF4-FFF2-40B4-BE49-F238E27FC236}">
+                      <a16:creationId xmlns:a16="http://schemas.microsoft.com/office/drawing/2014/main" id="{3F4775F8-4742-65F4-75B2-D44CFA6A2A0A}"/>
+                    </a:ext>
+                  </a:extLst>
+                </p:cNvPr>
+                <p:cNvPicPr>
+                  <a:picLocks noChangeAspect="1"/>
+                </p:cNvPicPr>
+                <p:nvPr/>
+              </p:nvPicPr>
+              <p:blipFill>
+                <a:blip r:embed="rId4"/>
+                <a:srcRect t="18876"/>
+                <a:stretch/>
+              </p:blipFill>
+              <p:spPr>
+                <a:xfrm>
+                  <a:off x="104572" y="2676880"/>
+                  <a:ext cx="11049000" cy="4095345"/>
+                </a:xfrm>
+                <a:prstGeom prst="rect">
+                  <a:avLst/>
+                </a:prstGeom>
+              </p:spPr>
+            </p:pic>
+          </p:grpSp>
+        </p:grpSp>
+        <p:sp>
+          <p:nvSpPr>
+            <p:cNvPr id="25" name="TextBox 24">
               <a:extLst>
-                <a:ext uri="{28A0092B-C50C-407E-A947-70E740481C1C}">
-                  <a14:useLocalDpi xmlns:a14="http://schemas.microsoft.com/office/drawing/2010/main" val="0"/>
+                <a:ext uri="{FF2B5EF4-FFF2-40B4-BE49-F238E27FC236}">
+                  <a16:creationId xmlns:a16="http://schemas.microsoft.com/office/drawing/2014/main" id="{61921805-1D0F-5EB3-F07E-17A296718FB3}"/>
                 </a:ext>
               </a:extLst>
-            </a:blip>
-            <a:stretch>
-              <a:fillRect/>
-            </a:stretch>
-          </p:blipFill>
+            </p:cNvPr>
+            <p:cNvSpPr txBox="1"/>
+            <p:nvPr/>
+          </p:nvSpPr>
           <p:spPr>
             <a:xfrm>
-              <a:off x="1925053" y="106593"/>
-              <a:ext cx="9785683" cy="4527596"/>
+              <a:off x="5115832" y="4468866"/>
+              <a:ext cx="287383" cy="369332"/>
             </a:xfrm>
             <a:prstGeom prst="rect">
               <a:avLst/>
             </a:prstGeom>
+            <a:noFill/>
           </p:spPr>
-        </p:pic>
-        <p:pic>
-          <p:nvPicPr>
-            <p:cNvPr id="7" name="Picture 6" descr="A graph of a bar chart&#10;&#10;Description automatically generated with medium confidence">
+          <p:txBody>
+            <a:bodyPr wrap="square" rtlCol="0">
+              <a:spAutoFit/>
+            </a:bodyPr>
+            <a:lstStyle/>
+            <a:p>
+              <a:r>
+                <a:rPr lang="nl-BE" dirty="0"/>
+                <a:t>*</a:t>
+              </a:r>
+              <a:endParaRPr lang="en-US" dirty="0"/>
+            </a:p>
+          </p:txBody>
+        </p:sp>
+        <p:sp>
+          <p:nvSpPr>
+            <p:cNvPr id="26" name="TextBox 25">
               <a:extLst>
                 <a:ext uri="{FF2B5EF4-FFF2-40B4-BE49-F238E27FC236}">
-                  <a16:creationId xmlns:a16="http://schemas.microsoft.com/office/drawing/2014/main" id="{AB9393E5-9437-8888-D9AA-EE6A51A86D6D}"/>
+                  <a16:creationId xmlns:a16="http://schemas.microsoft.com/office/drawing/2014/main" id="{5B00F0E6-9047-712A-3175-C7D7C2F00B09}"/>
                 </a:ext>
               </a:extLst>
             </p:cNvPr>
-            <p:cNvPicPr>
-              <a:picLocks noChangeAspect="1"/>
-            </p:cNvPicPr>
+            <p:cNvSpPr txBox="1"/>
             <p:nvPr/>
-          </p:nvPicPr>
-          <p:blipFill>
-            <a:blip r:embed="rId3">
-              <a:extLst>
-                <a:ext uri="{28A0092B-C50C-407E-A947-70E740481C1C}">
-                  <a14:useLocalDpi xmlns:a14="http://schemas.microsoft.com/office/drawing/2010/main" val="0"/>
-                </a:ext>
-              </a:extLst>
-            </a:blip>
-            <a:stretch>
-              <a:fillRect/>
-            </a:stretch>
-          </p:blipFill>
+          </p:nvSpPr>
           <p:spPr>
             <a:xfrm>
-              <a:off x="1925053" y="4634189"/>
-              <a:ext cx="9400673" cy="6043411"/>
+              <a:off x="5619356" y="4476926"/>
+              <a:ext cx="287383" cy="369332"/>
             </a:xfrm>
             <a:prstGeom prst="rect">
               <a:avLst/>
             </a:prstGeom>
+            <a:noFill/>
           </p:spPr>
-        </p:pic>
+          <p:txBody>
+            <a:bodyPr wrap="square" rtlCol="0">
+              <a:spAutoFit/>
+            </a:bodyPr>
+            <a:lstStyle/>
+            <a:p>
+              <a:r>
+                <a:rPr lang="nl-BE" dirty="0"/>
+                <a:t>*</a:t>
+              </a:r>
+              <a:endParaRPr lang="en-US" dirty="0"/>
+            </a:p>
+          </p:txBody>
+        </p:sp>
+        <p:sp>
+          <p:nvSpPr>
+            <p:cNvPr id="27" name="TextBox 26">
+              <a:extLst>
+                <a:ext uri="{FF2B5EF4-FFF2-40B4-BE49-F238E27FC236}">
+                  <a16:creationId xmlns:a16="http://schemas.microsoft.com/office/drawing/2014/main" id="{54076C20-DE3A-3E1C-F3CB-B9DAF248E88E}"/>
+                </a:ext>
+              </a:extLst>
+            </p:cNvPr>
+            <p:cNvSpPr txBox="1"/>
+            <p:nvPr/>
+          </p:nvSpPr>
+          <p:spPr>
+            <a:xfrm>
+              <a:off x="2957724" y="6259951"/>
+              <a:ext cx="287383" cy="369332"/>
+            </a:xfrm>
+            <a:prstGeom prst="rect">
+              <a:avLst/>
+            </a:prstGeom>
+            <a:noFill/>
+          </p:spPr>
+          <p:txBody>
+            <a:bodyPr wrap="square" rtlCol="0">
+              <a:spAutoFit/>
+            </a:bodyPr>
+            <a:lstStyle/>
+            <a:p>
+              <a:r>
+                <a:rPr lang="nl-BE" dirty="0"/>
+                <a:t>*</a:t>
+              </a:r>
+              <a:endParaRPr lang="en-US" dirty="0"/>
+            </a:p>
+          </p:txBody>
+        </p:sp>
+        <p:sp>
+          <p:nvSpPr>
+            <p:cNvPr id="28" name="TextBox 27">
+              <a:extLst>
+                <a:ext uri="{FF2B5EF4-FFF2-40B4-BE49-F238E27FC236}">
+                  <a16:creationId xmlns:a16="http://schemas.microsoft.com/office/drawing/2014/main" id="{0D5D7DC3-604C-F0C9-1E93-AA0BE90930CD}"/>
+                </a:ext>
+              </a:extLst>
+            </p:cNvPr>
+            <p:cNvSpPr txBox="1"/>
+            <p:nvPr/>
+          </p:nvSpPr>
+          <p:spPr>
+            <a:xfrm>
+              <a:off x="4734029" y="6577017"/>
+              <a:ext cx="287383" cy="369332"/>
+            </a:xfrm>
+            <a:prstGeom prst="rect">
+              <a:avLst/>
+            </a:prstGeom>
+            <a:noFill/>
+          </p:spPr>
+          <p:txBody>
+            <a:bodyPr wrap="square" rtlCol="0">
+              <a:spAutoFit/>
+            </a:bodyPr>
+            <a:lstStyle/>
+            <a:p>
+              <a:r>
+                <a:rPr lang="nl-BE" dirty="0"/>
+                <a:t>*</a:t>
+              </a:r>
+              <a:endParaRPr lang="en-US" dirty="0"/>
+            </a:p>
+          </p:txBody>
+        </p:sp>
+        <p:sp>
+          <p:nvSpPr>
+            <p:cNvPr id="29" name="TextBox 28">
+              <a:extLst>
+                <a:ext uri="{FF2B5EF4-FFF2-40B4-BE49-F238E27FC236}">
+                  <a16:creationId xmlns:a16="http://schemas.microsoft.com/office/drawing/2014/main" id="{ACF92BB0-138C-7368-E470-D74B6620BEB2}"/>
+                </a:ext>
+              </a:extLst>
+            </p:cNvPr>
+            <p:cNvSpPr txBox="1"/>
+            <p:nvPr/>
+          </p:nvSpPr>
+          <p:spPr>
+            <a:xfrm>
+              <a:off x="5938020" y="6259951"/>
+              <a:ext cx="287383" cy="369332"/>
+            </a:xfrm>
+            <a:prstGeom prst="rect">
+              <a:avLst/>
+            </a:prstGeom>
+            <a:noFill/>
+          </p:spPr>
+          <p:txBody>
+            <a:bodyPr wrap="square" rtlCol="0">
+              <a:spAutoFit/>
+            </a:bodyPr>
+            <a:lstStyle/>
+            <a:p>
+              <a:r>
+                <a:rPr lang="nl-BE" dirty="0"/>
+                <a:t>*</a:t>
+              </a:r>
+              <a:endParaRPr lang="en-US" dirty="0"/>
+            </a:p>
+          </p:txBody>
+        </p:sp>
+        <p:sp>
+          <p:nvSpPr>
+            <p:cNvPr id="30" name="TextBox 29">
+              <a:extLst>
+                <a:ext uri="{FF2B5EF4-FFF2-40B4-BE49-F238E27FC236}">
+                  <a16:creationId xmlns:a16="http://schemas.microsoft.com/office/drawing/2014/main" id="{1CFFA16B-3287-6914-86C7-AF39D3CA9993}"/>
+                </a:ext>
+              </a:extLst>
+            </p:cNvPr>
+            <p:cNvSpPr txBox="1"/>
+            <p:nvPr/>
+          </p:nvSpPr>
+          <p:spPr>
+            <a:xfrm>
+              <a:off x="7570633" y="6580563"/>
+              <a:ext cx="287383" cy="369332"/>
+            </a:xfrm>
+            <a:prstGeom prst="rect">
+              <a:avLst/>
+            </a:prstGeom>
+            <a:noFill/>
+          </p:spPr>
+          <p:txBody>
+            <a:bodyPr wrap="square" rtlCol="0">
+              <a:spAutoFit/>
+            </a:bodyPr>
+            <a:lstStyle/>
+            <a:p>
+              <a:r>
+                <a:rPr lang="nl-BE" dirty="0"/>
+                <a:t>*</a:t>
+              </a:r>
+              <a:endParaRPr lang="en-US" dirty="0"/>
+            </a:p>
+          </p:txBody>
+        </p:sp>
+        <p:sp>
+          <p:nvSpPr>
+            <p:cNvPr id="31" name="TextBox 30">
+              <a:extLst>
+                <a:ext uri="{FF2B5EF4-FFF2-40B4-BE49-F238E27FC236}">
+                  <a16:creationId xmlns:a16="http://schemas.microsoft.com/office/drawing/2014/main" id="{6DAF934E-06F2-FCF6-7762-408D407B41CC}"/>
+                </a:ext>
+              </a:extLst>
+            </p:cNvPr>
+            <p:cNvSpPr txBox="1"/>
+            <p:nvPr/>
+          </p:nvSpPr>
+          <p:spPr>
+            <a:xfrm>
+              <a:off x="2467791" y="3299776"/>
+              <a:ext cx="287383" cy="369332"/>
+            </a:xfrm>
+            <a:prstGeom prst="rect">
+              <a:avLst/>
+            </a:prstGeom>
+            <a:noFill/>
+          </p:spPr>
+          <p:txBody>
+            <a:bodyPr wrap="square" rtlCol="0">
+              <a:spAutoFit/>
+            </a:bodyPr>
+            <a:lstStyle/>
+            <a:p>
+              <a:r>
+                <a:rPr lang="nl-BE" dirty="0"/>
+                <a:t>*</a:t>
+              </a:r>
+              <a:endParaRPr lang="en-US" dirty="0"/>
+            </a:p>
+          </p:txBody>
+        </p:sp>
+        <p:sp>
+          <p:nvSpPr>
+            <p:cNvPr id="32" name="TextBox 31">
+              <a:extLst>
+                <a:ext uri="{FF2B5EF4-FFF2-40B4-BE49-F238E27FC236}">
+                  <a16:creationId xmlns:a16="http://schemas.microsoft.com/office/drawing/2014/main" id="{29A829DF-B3E3-6BD7-C893-329E9770D1B2}"/>
+                </a:ext>
+              </a:extLst>
+            </p:cNvPr>
+            <p:cNvSpPr txBox="1"/>
+            <p:nvPr/>
+          </p:nvSpPr>
+          <p:spPr>
+            <a:xfrm>
+              <a:off x="4389333" y="8344216"/>
+              <a:ext cx="287383" cy="369332"/>
+            </a:xfrm>
+            <a:prstGeom prst="rect">
+              <a:avLst/>
+            </a:prstGeom>
+            <a:noFill/>
+          </p:spPr>
+          <p:txBody>
+            <a:bodyPr wrap="square" rtlCol="0">
+              <a:spAutoFit/>
+            </a:bodyPr>
+            <a:lstStyle/>
+            <a:p>
+              <a:r>
+                <a:rPr lang="nl-BE" dirty="0"/>
+                <a:t>*</a:t>
+              </a:r>
+              <a:endParaRPr lang="en-US" dirty="0"/>
+            </a:p>
+          </p:txBody>
+        </p:sp>
+        <p:sp>
+          <p:nvSpPr>
+            <p:cNvPr id="33" name="TextBox 32">
+              <a:extLst>
+                <a:ext uri="{FF2B5EF4-FFF2-40B4-BE49-F238E27FC236}">
+                  <a16:creationId xmlns:a16="http://schemas.microsoft.com/office/drawing/2014/main" id="{C699DD8D-36D2-CE38-28B0-A9530ACE6A82}"/>
+                </a:ext>
+              </a:extLst>
+            </p:cNvPr>
+            <p:cNvSpPr txBox="1"/>
+            <p:nvPr/>
+          </p:nvSpPr>
+          <p:spPr>
+            <a:xfrm>
+              <a:off x="6440528" y="8344216"/>
+              <a:ext cx="287383" cy="369332"/>
+            </a:xfrm>
+            <a:prstGeom prst="rect">
+              <a:avLst/>
+            </a:prstGeom>
+            <a:noFill/>
+          </p:spPr>
+          <p:txBody>
+            <a:bodyPr wrap="square" rtlCol="0">
+              <a:spAutoFit/>
+            </a:bodyPr>
+            <a:lstStyle/>
+            <a:p>
+              <a:r>
+                <a:rPr lang="nl-BE" dirty="0"/>
+                <a:t>*</a:t>
+              </a:r>
+              <a:endParaRPr lang="en-US" dirty="0"/>
+            </a:p>
+          </p:txBody>
+        </p:sp>
+        <p:sp>
+          <p:nvSpPr>
+            <p:cNvPr id="34" name="TextBox 33">
+              <a:extLst>
+                <a:ext uri="{FF2B5EF4-FFF2-40B4-BE49-F238E27FC236}">
+                  <a16:creationId xmlns:a16="http://schemas.microsoft.com/office/drawing/2014/main" id="{AA445779-3192-2154-3CD0-F1EC098E4E1D}"/>
+                </a:ext>
+              </a:extLst>
+            </p:cNvPr>
+            <p:cNvSpPr txBox="1"/>
+            <p:nvPr/>
+          </p:nvSpPr>
+          <p:spPr>
+            <a:xfrm>
+              <a:off x="8564607" y="5379735"/>
+              <a:ext cx="287383" cy="369332"/>
+            </a:xfrm>
+            <a:prstGeom prst="rect">
+              <a:avLst/>
+            </a:prstGeom>
+            <a:noFill/>
+          </p:spPr>
+          <p:txBody>
+            <a:bodyPr wrap="square" rtlCol="0">
+              <a:spAutoFit/>
+            </a:bodyPr>
+            <a:lstStyle/>
+            <a:p>
+              <a:r>
+                <a:rPr lang="nl-BE" dirty="0"/>
+                <a:t>*</a:t>
+              </a:r>
+              <a:endParaRPr lang="en-US" dirty="0"/>
+            </a:p>
+          </p:txBody>
+        </p:sp>
+        <p:sp>
+          <p:nvSpPr>
+            <p:cNvPr id="35" name="TextBox 34">
+              <a:extLst>
+                <a:ext uri="{FF2B5EF4-FFF2-40B4-BE49-F238E27FC236}">
+                  <a16:creationId xmlns:a16="http://schemas.microsoft.com/office/drawing/2014/main" id="{4C870FE5-DE8B-9999-CF23-CEB889C5177E}"/>
+                </a:ext>
+              </a:extLst>
+            </p:cNvPr>
+            <p:cNvSpPr txBox="1"/>
+            <p:nvPr/>
+          </p:nvSpPr>
+          <p:spPr>
+            <a:xfrm>
+              <a:off x="8564606" y="5677987"/>
+              <a:ext cx="287383" cy="369332"/>
+            </a:xfrm>
+            <a:prstGeom prst="rect">
+              <a:avLst/>
+            </a:prstGeom>
+            <a:noFill/>
+          </p:spPr>
+          <p:txBody>
+            <a:bodyPr wrap="square" rtlCol="0">
+              <a:spAutoFit/>
+            </a:bodyPr>
+            <a:lstStyle/>
+            <a:p>
+              <a:r>
+                <a:rPr lang="nl-BE" dirty="0"/>
+                <a:t>*</a:t>
+              </a:r>
+              <a:endParaRPr lang="en-US" dirty="0"/>
+            </a:p>
+          </p:txBody>
+        </p:sp>
+        <p:sp>
+          <p:nvSpPr>
+            <p:cNvPr id="36" name="TextBox 35">
+              <a:extLst>
+                <a:ext uri="{FF2B5EF4-FFF2-40B4-BE49-F238E27FC236}">
+                  <a16:creationId xmlns:a16="http://schemas.microsoft.com/office/drawing/2014/main" id="{996499D2-9F10-B2CC-EAFC-7DD5C3901FDD}"/>
+                </a:ext>
+              </a:extLst>
+            </p:cNvPr>
+            <p:cNvSpPr txBox="1"/>
+            <p:nvPr/>
+          </p:nvSpPr>
+          <p:spPr>
+            <a:xfrm>
+              <a:off x="8538135" y="6834538"/>
+              <a:ext cx="287383" cy="369332"/>
+            </a:xfrm>
+            <a:prstGeom prst="rect">
+              <a:avLst/>
+            </a:prstGeom>
+            <a:noFill/>
+          </p:spPr>
+          <p:txBody>
+            <a:bodyPr wrap="square" rtlCol="0">
+              <a:spAutoFit/>
+            </a:bodyPr>
+            <a:lstStyle/>
+            <a:p>
+              <a:r>
+                <a:rPr lang="nl-BE" dirty="0"/>
+                <a:t>*</a:t>
+              </a:r>
+              <a:endParaRPr lang="en-US" dirty="0"/>
+            </a:p>
+          </p:txBody>
+        </p:sp>
       </p:grpSp>
     </p:spTree>
     <p:extLst>
       <p:ext uri="{BB962C8B-B14F-4D97-AF65-F5344CB8AC3E}">
         <p14:creationId xmlns:p14="http://schemas.microsoft.com/office/powerpoint/2010/main" val="2164078111"/>
-      </p:ext>
-    </p:extLst>
-  </p:cSld>
-  <p:clrMapOvr>
-    <a:masterClrMapping/>
-  </p:clrMapOvr>
-</p:sld>
-</file>
-
-<file path=ppt/slides/slide6.xml><?xml version="1.0" encoding="utf-8"?>
-<p:sld xmlns:a="http://schemas.openxmlformats.org/drawingml/2006/main" xmlns:r="http://schemas.openxmlformats.org/officeDocument/2006/relationships" xmlns:p="http://schemas.openxmlformats.org/presentationml/2006/main">
-  <p:cSld>
-    <p:spTree>
-      <p:nvGrpSpPr>
-        <p:cNvPr id="1" name=""/>
-        <p:cNvGrpSpPr/>
-        <p:nvPr/>
-      </p:nvGrpSpPr>
-      <p:grpSpPr>
-        <a:xfrm>
-          <a:off x="0" y="0"/>
-          <a:ext cx="0" cy="0"/>
-          <a:chOff x="0" y="0"/>
-          <a:chExt cx="0" cy="0"/>
-        </a:xfrm>
-      </p:grpSpPr>
-      <p:pic>
-        <p:nvPicPr>
-          <p:cNvPr id="2" name="Picture 1">
-            <a:extLst>
-              <a:ext uri="{FF2B5EF4-FFF2-40B4-BE49-F238E27FC236}">
-                <a16:creationId xmlns:a16="http://schemas.microsoft.com/office/drawing/2014/main" id="{2BA297C2-735B-19A0-E3FB-AD53C55643D0}"/>
-              </a:ext>
-            </a:extLst>
-          </p:cNvPr>
-          <p:cNvPicPr>
-            <a:picLocks noChangeAspect="1"/>
-          </p:cNvPicPr>
-          <p:nvPr/>
-        </p:nvPicPr>
-        <p:blipFill>
-          <a:blip r:embed="rId2"/>
-          <a:stretch>
-            <a:fillRect/>
-          </a:stretch>
-        </p:blipFill>
-        <p:spPr>
-          <a:xfrm>
-            <a:off x="0" y="748701"/>
-            <a:ext cx="12192000" cy="5360598"/>
-          </a:xfrm>
-          <a:prstGeom prst="rect">
-            <a:avLst/>
-          </a:prstGeom>
-        </p:spPr>
-      </p:pic>
-    </p:spTree>
-    <p:extLst>
-      <p:ext uri="{BB962C8B-B14F-4D97-AF65-F5344CB8AC3E}">
-        <p14:creationId xmlns:p14="http://schemas.microsoft.com/office/powerpoint/2010/main" val="2292916659"/>
       </p:ext>
     </p:extLst>
   </p:cSld>
@@ -7796,10 +11401,10 @@
       </p:grpSpPr>
       <p:pic>
         <p:nvPicPr>
-          <p:cNvPr id="2" name="Picture 1">
+          <p:cNvPr id="4" name="Picture 3">
             <a:extLst>
               <a:ext uri="{FF2B5EF4-FFF2-40B4-BE49-F238E27FC236}">
-                <a16:creationId xmlns:a16="http://schemas.microsoft.com/office/drawing/2014/main" id="{B40C30F4-1CD0-11A3-2728-1FCD2CC8D748}"/>
+                <a16:creationId xmlns:a16="http://schemas.microsoft.com/office/drawing/2014/main" id="{3D696133-EBD6-16AC-7D1B-D137C2A8D6CD}"/>
               </a:ext>
             </a:extLst>
           </p:cNvPr>
@@ -7816,8 +11421,8 @@
         </p:blipFill>
         <p:spPr>
           <a:xfrm>
-            <a:off x="0" y="779528"/>
-            <a:ext cx="12192000" cy="5298944"/>
+            <a:off x="1119398" y="0"/>
+            <a:ext cx="9953204" cy="6858000"/>
           </a:xfrm>
           <a:prstGeom prst="rect">
             <a:avLst/>
@@ -7827,7 +11432,7 @@
     </p:spTree>
     <p:extLst>
       <p:ext uri="{BB962C8B-B14F-4D97-AF65-F5344CB8AC3E}">
-        <p14:creationId xmlns:p14="http://schemas.microsoft.com/office/powerpoint/2010/main" val="624012253"/>
+        <p14:creationId xmlns:p14="http://schemas.microsoft.com/office/powerpoint/2010/main" val="2160086040"/>
       </p:ext>
     </p:extLst>
   </p:cSld>
@@ -7854,64 +11459,45 @@
           <a:chExt cx="0" cy="0"/>
         </a:xfrm>
       </p:grpSpPr>
-      <p:sp>
-        <p:nvSpPr>
-          <p:cNvPr id="2" name="Title 1">
+      <p:pic>
+        <p:nvPicPr>
+          <p:cNvPr id="3" name="Picture 2">
             <a:extLst>
               <a:ext uri="{FF2B5EF4-FFF2-40B4-BE49-F238E27FC236}">
-                <a16:creationId xmlns:a16="http://schemas.microsoft.com/office/drawing/2014/main" id="{4EBD8E55-BBB8-0018-2052-A58FC50F2B1A}"/>
+                <a16:creationId xmlns:a16="http://schemas.microsoft.com/office/drawing/2014/main" id="{DEB70CC4-5DA7-0E44-85B4-B94A5F786849}"/>
               </a:ext>
             </a:extLst>
           </p:cNvPr>
-          <p:cNvSpPr>
-            <a:spLocks noGrp="1"/>
-          </p:cNvSpPr>
-          <p:nvPr>
-            <p:ph type="title"/>
-          </p:nvPr>
-        </p:nvSpPr>
-        <p:spPr/>
-        <p:txBody>
-          <a:bodyPr/>
-          <a:lstStyle/>
-          <a:p>
-            <a:r>
-              <a:rPr lang="nl-BE" dirty="0" err="1"/>
-              <a:t>Macro_WAT</a:t>
-            </a:r>
-            <a:endParaRPr lang="en-US" dirty="0"/>
-          </a:p>
-        </p:txBody>
-      </p:sp>
-      <p:sp>
-        <p:nvSpPr>
-          <p:cNvPr id="3" name="Text Placeholder 2">
+          <p:cNvPicPr>
+            <a:picLocks noChangeAspect="1"/>
+          </p:cNvPicPr>
+          <p:nvPr/>
+        </p:nvPicPr>
+        <p:blipFill>
+          <a:blip r:embed="rId3">
             <a:extLst>
-              <a:ext uri="{FF2B5EF4-FFF2-40B4-BE49-F238E27FC236}">
-                <a16:creationId xmlns:a16="http://schemas.microsoft.com/office/drawing/2014/main" id="{C47C39F4-C682-6248-24BE-BED55C1ED1BA}"/>
+              <a:ext uri="{28A0092B-C50C-407E-A947-70E740481C1C}">
+                <a14:useLocalDpi xmlns:a14="http://schemas.microsoft.com/office/drawing/2010/main" val="0"/>
               </a:ext>
             </a:extLst>
-          </p:cNvPr>
-          <p:cNvSpPr>
-            <a:spLocks noGrp="1"/>
-          </p:cNvSpPr>
-          <p:nvPr>
-            <p:ph type="body" idx="1"/>
-          </p:nvPr>
-        </p:nvSpPr>
-        <p:spPr/>
-        <p:txBody>
-          <a:bodyPr/>
-          <a:lstStyle/>
-          <a:p>
-            <a:endParaRPr lang="en-US"/>
-          </a:p>
-        </p:txBody>
-      </p:sp>
+          </a:blip>
+          <a:srcRect/>
+          <a:stretch/>
+        </p:blipFill>
+        <p:spPr>
+          <a:xfrm>
+            <a:off x="223150" y="392753"/>
+            <a:ext cx="11745700" cy="6072494"/>
+          </a:xfrm>
+          <a:prstGeom prst="rect">
+            <a:avLst/>
+          </a:prstGeom>
+        </p:spPr>
+      </p:pic>
     </p:spTree>
     <p:extLst>
       <p:ext uri="{BB962C8B-B14F-4D97-AF65-F5344CB8AC3E}">
-        <p14:creationId xmlns:p14="http://schemas.microsoft.com/office/powerpoint/2010/main" val="1797133414"/>
+        <p14:creationId xmlns:p14="http://schemas.microsoft.com/office/powerpoint/2010/main" val="2292916659"/>
       </p:ext>
     </p:extLst>
   </p:cSld>
@@ -7943,7 +11529,7 @@
           <p:cNvPr id="2" name="Picture 1">
             <a:extLst>
               <a:ext uri="{FF2B5EF4-FFF2-40B4-BE49-F238E27FC236}">
-                <a16:creationId xmlns:a16="http://schemas.microsoft.com/office/drawing/2014/main" id="{1E78AD4F-CA12-DC71-DDC1-920BB16329EF}"/>
+                <a16:creationId xmlns:a16="http://schemas.microsoft.com/office/drawing/2014/main" id="{05CE09CE-1335-C1D1-C44F-8DDC3EAA9C0B}"/>
               </a:ext>
             </a:extLst>
           </p:cNvPr>
@@ -7960,8 +11546,8 @@
         </p:blipFill>
         <p:spPr>
           <a:xfrm>
-            <a:off x="729038" y="0"/>
-            <a:ext cx="10889568" cy="6858000"/>
+            <a:off x="0" y="277385"/>
+            <a:ext cx="12192000" cy="6303229"/>
           </a:xfrm>
           <a:prstGeom prst="rect">
             <a:avLst/>
@@ -7971,7 +11557,7 @@
     </p:spTree>
     <p:extLst>
       <p:ext uri="{BB962C8B-B14F-4D97-AF65-F5344CB8AC3E}">
-        <p14:creationId xmlns:p14="http://schemas.microsoft.com/office/powerpoint/2010/main" val="556799258"/>
+        <p14:creationId xmlns:p14="http://schemas.microsoft.com/office/powerpoint/2010/main" val="762415662"/>
       </p:ext>
     </p:extLst>
   </p:cSld>
